--- a/public/documents/business-simulation/round-6/section-d/section-d-round6-u1-vs-u2-insights-debrief.pptx
+++ b/public/documents/business-simulation/round-6/section-d/section-d-round6-u1-vs-u2-insights-debrief.pptx
@@ -3088,6 +3088,14 @@
 <file path=ppt/slides/slide1.xml><?xml version="1.0" encoding="utf-8"?>
 <p:sld xmlns:a="http://schemas.openxmlformats.org/drawingml/2006/main" xmlns:p="http://schemas.openxmlformats.org/presentationml/2006/main" xmlns:r="http://schemas.openxmlformats.org/officeDocument/2006/relationships">
   <p:cSld>
+    <p:bg>
+      <p:bgPr>
+        <a:solidFill>
+          <a:srgbClr val="FFFFFF"/>
+        </a:solidFill>
+        <a:effectLst/>
+      </p:bgPr>
+    </p:bg>
     <p:spTree>
       <p:nvGrpSpPr>
         <p:cNvPr id="1" name=""/>
@@ -3097,14 +3105,106 @@
       <p:grpSpPr/>
       <p:sp>
         <p:nvSpPr>
-          <p:cNvPr id="2" name="Rectangle 1"/>
+          <p:cNvPr id="2" name="Oval 1"/>
           <p:cNvSpPr/>
           <p:nvPr/>
         </p:nvSpPr>
         <p:spPr>
           <a:xfrm>
+            <a:off x="10607040" y="-1188720"/>
+            <a:ext cx="2926080" cy="2560320"/>
+          </a:xfrm>
+          <a:prstGeom prst="ellipse">
+            <a:avLst/>
+          </a:prstGeom>
+          <a:solidFill>
+            <a:srgbClr val="DDE8DE">
+              <a:alpha val="55000"/>
+            </a:srgbClr>
+          </a:solidFill>
+          <a:ln>
+            <a:noFill/>
+          </a:ln>
+          <a:effectLst/>
+        </p:spPr>
+        <p:style>
+          <a:lnRef idx="1">
+            <a:schemeClr val="accent1"/>
+          </a:lnRef>
+          <a:fillRef idx="3">
+            <a:schemeClr val="accent1"/>
+          </a:fillRef>
+          <a:effectRef idx="2">
+            <a:schemeClr val="accent1"/>
+          </a:effectRef>
+          <a:fontRef idx="minor">
+            <a:schemeClr val="lt1"/>
+          </a:fontRef>
+        </p:style>
+        <p:txBody>
+          <a:bodyPr rtlCol="0" anchor="ctr"/>
+          <a:lstStyle/>
+          <a:p>
+            <a:pPr algn="ctr"/>
+          </a:p>
+        </p:txBody>
+      </p:sp>
+      <p:sp>
+        <p:nvSpPr>
+          <p:cNvPr id="3" name="Oval 2"/>
+          <p:cNvSpPr/>
+          <p:nvPr/>
+        </p:nvSpPr>
+        <p:spPr>
+          <a:xfrm>
+            <a:off x="-1005840" y="5760720"/>
+            <a:ext cx="2468880" cy="1463040"/>
+          </a:xfrm>
+          <a:prstGeom prst="ellipse">
+            <a:avLst/>
+          </a:prstGeom>
+          <a:solidFill>
+            <a:srgbClr val="EFE2CC">
+              <a:alpha val="55000"/>
+            </a:srgbClr>
+          </a:solidFill>
+          <a:ln>
+            <a:noFill/>
+          </a:ln>
+          <a:effectLst/>
+        </p:spPr>
+        <p:style>
+          <a:lnRef idx="1">
+            <a:schemeClr val="accent1"/>
+          </a:lnRef>
+          <a:fillRef idx="3">
+            <a:schemeClr val="accent1"/>
+          </a:fillRef>
+          <a:effectRef idx="2">
+            <a:schemeClr val="accent1"/>
+          </a:effectRef>
+          <a:fontRef idx="minor">
+            <a:schemeClr val="lt1"/>
+          </a:fontRef>
+        </p:style>
+        <p:txBody>
+          <a:bodyPr rtlCol="0" anchor="ctr"/>
+          <a:lstStyle/>
+          <a:p>
+            <a:pPr algn="ctr"/>
+          </a:p>
+        </p:txBody>
+      </p:sp>
+      <p:sp>
+        <p:nvSpPr>
+          <p:cNvPr id="4" name="Rectangle 3"/>
+          <p:cNvSpPr/>
+          <p:nvPr/>
+        </p:nvSpPr>
+        <p:spPr>
+          <a:xfrm>
             <a:off x="0" y="0"/>
-            <a:ext cx="12191695" cy="54864"/>
+            <a:ext cx="12191695" cy="109728"/>
           </a:xfrm>
           <a:prstGeom prst="rect">
             <a:avLst/>
@@ -3141,7 +3241,7 @@
       </p:sp>
       <p:sp>
         <p:nvSpPr>
-          <p:cNvPr id="3" name="TextBox 2"/>
+          <p:cNvPr id="5" name="TextBox 4"/>
           <p:cNvSpPr txBox="1"/>
           <p:nvPr/>
         </p:nvSpPr>
@@ -3180,7 +3280,7 @@
       </p:sp>
       <p:sp>
         <p:nvSpPr>
-          <p:cNvPr id="4" name="TextBox 3"/>
+          <p:cNvPr id="6" name="TextBox 5"/>
           <p:cNvSpPr txBox="1"/>
           <p:nvPr/>
         </p:nvSpPr>
@@ -3219,7 +3319,7 @@
       </p:sp>
       <p:sp>
         <p:nvSpPr>
-          <p:cNvPr id="5" name="TextBox 4"/>
+          <p:cNvPr id="7" name="TextBox 6"/>
           <p:cNvSpPr txBox="1"/>
           <p:nvPr/>
         </p:nvSpPr>
@@ -3247,7 +3347,7 @@
             <a:r>
               <a:rPr sz="1300" b="0" i="0">
                 <a:solidFill>
-                  <a:srgbClr val="4A5552"/>
+                  <a:srgbClr val="55605D"/>
                 </a:solidFill>
                 <a:latin typeface="Calibri"/>
               </a:rPr>
@@ -3258,13 +3358,349 @@
       </p:sp>
       <p:sp>
         <p:nvSpPr>
-          <p:cNvPr id="6" name="Rounded Rectangle 5"/>
+          <p:cNvPr id="8" name="Rounded Rectangle 7"/>
           <p:cNvSpPr/>
           <p:nvPr/>
         </p:nvSpPr>
         <p:spPr>
           <a:xfrm>
-            <a:off x="502920" y="2286000"/>
+            <a:off x="502920" y="2194560"/>
+            <a:ext cx="3520440" cy="960120"/>
+          </a:xfrm>
+          <a:prstGeom prst="roundRect">
+            <a:avLst>
+              <a:gd name="adj" fmla="val 16000"/>
+            </a:avLst>
+          </a:prstGeom>
+          <a:solidFill>
+            <a:srgbClr val="DDE8DE"/>
+          </a:solidFill>
+          <a:ln>
+            <a:noFill/>
+          </a:ln>
+          <a:effectLst/>
+        </p:spPr>
+        <p:style>
+          <a:lnRef idx="1">
+            <a:schemeClr val="accent1"/>
+          </a:lnRef>
+          <a:fillRef idx="3">
+            <a:schemeClr val="accent1"/>
+          </a:fillRef>
+          <a:effectRef idx="2">
+            <a:schemeClr val="accent1"/>
+          </a:effectRef>
+          <a:fontRef idx="minor">
+            <a:schemeClr val="lt1"/>
+          </a:fontRef>
+        </p:style>
+        <p:txBody>
+          <a:bodyPr rtlCol="0" anchor="ctr"/>
+          <a:lstStyle/>
+          <a:p>
+            <a:pPr algn="ctr"/>
+          </a:p>
+        </p:txBody>
+      </p:sp>
+      <p:sp>
+        <p:nvSpPr>
+          <p:cNvPr id="9" name="Rectangle 8"/>
+          <p:cNvSpPr/>
+          <p:nvPr/>
+        </p:nvSpPr>
+        <p:spPr>
+          <a:xfrm>
+            <a:off x="502920" y="2194560"/>
+            <a:ext cx="3520440" cy="54864"/>
+          </a:xfrm>
+          <a:prstGeom prst="rect">
+            <a:avLst/>
+          </a:prstGeom>
+          <a:solidFill>
+            <a:srgbClr val="4E7D72"/>
+          </a:solidFill>
+          <a:ln>
+            <a:noFill/>
+          </a:ln>
+          <a:effectLst/>
+        </p:spPr>
+        <p:style>
+          <a:lnRef idx="1">
+            <a:schemeClr val="accent1"/>
+          </a:lnRef>
+          <a:fillRef idx="3">
+            <a:schemeClr val="accent1"/>
+          </a:fillRef>
+          <a:effectRef idx="2">
+            <a:schemeClr val="accent1"/>
+          </a:effectRef>
+          <a:fontRef idx="minor">
+            <a:schemeClr val="lt1"/>
+          </a:fontRef>
+        </p:style>
+        <p:txBody>
+          <a:bodyPr rtlCol="0" anchor="ctr"/>
+          <a:lstStyle/>
+          <a:p>
+            <a:pPr algn="ctr"/>
+          </a:p>
+        </p:txBody>
+      </p:sp>
+      <p:sp>
+        <p:nvSpPr>
+          <p:cNvPr id="10" name="TextBox 9"/>
+          <p:cNvSpPr txBox="1"/>
+          <p:nvPr/>
+        </p:nvSpPr>
+        <p:spPr>
+          <a:xfrm>
+            <a:off x="667512" y="2322576"/>
+            <a:ext cx="3200400" cy="365760"/>
+          </a:xfrm>
+          <a:prstGeom prst="rect">
+            <a:avLst/>
+          </a:prstGeom>
+          <a:noFill/>
+        </p:spPr>
+        <p:txBody>
+          <a:bodyPr wrap="square">
+            <a:spAutoFit/>
+          </a:bodyPr>
+          <a:lstStyle/>
+          <a:p>
+            <a:pPr algn="l">
+              <a:lnSpc>
+                <a:spcPct val="115000"/>
+              </a:lnSpc>
+            </a:pPr>
+            <a:r>
+              <a:rPr sz="1000" b="1" i="0">
+                <a:solidFill>
+                  <a:srgbClr val="55605D"/>
+                </a:solidFill>
+                <a:latin typeface="Calibri"/>
+              </a:rPr>
+              <a:t>UNIVERSE 1 LEADER</a:t>
+            </a:r>
+          </a:p>
+        </p:txBody>
+      </p:sp>
+      <p:sp>
+        <p:nvSpPr>
+          <p:cNvPr id="11" name="TextBox 10"/>
+          <p:cNvSpPr txBox="1"/>
+          <p:nvPr/>
+        </p:nvSpPr>
+        <p:spPr>
+          <a:xfrm>
+            <a:off x="667512" y="2697480"/>
+            <a:ext cx="3200400" cy="411480"/>
+          </a:xfrm>
+          <a:prstGeom prst="rect">
+            <a:avLst/>
+          </a:prstGeom>
+          <a:noFill/>
+        </p:spPr>
+        <p:txBody>
+          <a:bodyPr wrap="square">
+            <a:spAutoFit/>
+          </a:bodyPr>
+          <a:lstStyle/>
+          <a:p>
+            <a:pPr algn="l">
+              <a:lnSpc>
+                <a:spcPct val="115000"/>
+              </a:lnSpc>
+            </a:pPr>
+            <a:r>
+              <a:rPr sz="1600" b="1" i="0">
+                <a:solidFill>
+                  <a:srgbClr val="1F2A28"/>
+                </a:solidFill>
+                <a:latin typeface="Calibri"/>
+              </a:rPr>
+              <a:t>Orange</a:t>
+            </a:r>
+          </a:p>
+        </p:txBody>
+      </p:sp>
+      <p:sp>
+        <p:nvSpPr>
+          <p:cNvPr id="12" name="Rounded Rectangle 11"/>
+          <p:cNvSpPr/>
+          <p:nvPr/>
+        </p:nvSpPr>
+        <p:spPr>
+          <a:xfrm>
+            <a:off x="4251960" y="2194560"/>
+            <a:ext cx="3520440" cy="960120"/>
+          </a:xfrm>
+          <a:prstGeom prst="roundRect">
+            <a:avLst>
+              <a:gd name="adj" fmla="val 16000"/>
+            </a:avLst>
+          </a:prstGeom>
+          <a:solidFill>
+            <a:srgbClr val="EFE2CC"/>
+          </a:solidFill>
+          <a:ln>
+            <a:noFill/>
+          </a:ln>
+          <a:effectLst/>
+        </p:spPr>
+        <p:style>
+          <a:lnRef idx="1">
+            <a:schemeClr val="accent1"/>
+          </a:lnRef>
+          <a:fillRef idx="3">
+            <a:schemeClr val="accent1"/>
+          </a:fillRef>
+          <a:effectRef idx="2">
+            <a:schemeClr val="accent1"/>
+          </a:effectRef>
+          <a:fontRef idx="minor">
+            <a:schemeClr val="lt1"/>
+          </a:fontRef>
+        </p:style>
+        <p:txBody>
+          <a:bodyPr rtlCol="0" anchor="ctr"/>
+          <a:lstStyle/>
+          <a:p>
+            <a:pPr algn="ctr"/>
+          </a:p>
+        </p:txBody>
+      </p:sp>
+      <p:sp>
+        <p:nvSpPr>
+          <p:cNvPr id="13" name="Rectangle 12"/>
+          <p:cNvSpPr/>
+          <p:nvPr/>
+        </p:nvSpPr>
+        <p:spPr>
+          <a:xfrm>
+            <a:off x="4251960" y="2194560"/>
+            <a:ext cx="3520440" cy="54864"/>
+          </a:xfrm>
+          <a:prstGeom prst="rect">
+            <a:avLst/>
+          </a:prstGeom>
+          <a:solidFill>
+            <a:srgbClr val="8A6D2A"/>
+          </a:solidFill>
+          <a:ln>
+            <a:noFill/>
+          </a:ln>
+          <a:effectLst/>
+        </p:spPr>
+        <p:style>
+          <a:lnRef idx="1">
+            <a:schemeClr val="accent1"/>
+          </a:lnRef>
+          <a:fillRef idx="3">
+            <a:schemeClr val="accent1"/>
+          </a:fillRef>
+          <a:effectRef idx="2">
+            <a:schemeClr val="accent1"/>
+          </a:effectRef>
+          <a:fontRef idx="minor">
+            <a:schemeClr val="lt1"/>
+          </a:fontRef>
+        </p:style>
+        <p:txBody>
+          <a:bodyPr rtlCol="0" anchor="ctr"/>
+          <a:lstStyle/>
+          <a:p>
+            <a:pPr algn="ctr"/>
+          </a:p>
+        </p:txBody>
+      </p:sp>
+      <p:sp>
+        <p:nvSpPr>
+          <p:cNvPr id="14" name="TextBox 13"/>
+          <p:cNvSpPr txBox="1"/>
+          <p:nvPr/>
+        </p:nvSpPr>
+        <p:spPr>
+          <a:xfrm>
+            <a:off x="4416552" y="2322576"/>
+            <a:ext cx="3200400" cy="365760"/>
+          </a:xfrm>
+          <a:prstGeom prst="rect">
+            <a:avLst/>
+          </a:prstGeom>
+          <a:noFill/>
+        </p:spPr>
+        <p:txBody>
+          <a:bodyPr wrap="square">
+            <a:spAutoFit/>
+          </a:bodyPr>
+          <a:lstStyle/>
+          <a:p>
+            <a:pPr algn="l">
+              <a:lnSpc>
+                <a:spcPct val="115000"/>
+              </a:lnSpc>
+            </a:pPr>
+            <a:r>
+              <a:rPr sz="1000" b="1" i="0">
+                <a:solidFill>
+                  <a:srgbClr val="55605D"/>
+                </a:solidFill>
+                <a:latin typeface="Calibri"/>
+              </a:rPr>
+              <a:t>UNIVERSE 2 LEADER</a:t>
+            </a:r>
+          </a:p>
+        </p:txBody>
+      </p:sp>
+      <p:sp>
+        <p:nvSpPr>
+          <p:cNvPr id="15" name="TextBox 14"/>
+          <p:cNvSpPr txBox="1"/>
+          <p:nvPr/>
+        </p:nvSpPr>
+        <p:spPr>
+          <a:xfrm>
+            <a:off x="4416552" y="2697480"/>
+            <a:ext cx="3200400" cy="411480"/>
+          </a:xfrm>
+          <a:prstGeom prst="rect">
+            <a:avLst/>
+          </a:prstGeom>
+          <a:noFill/>
+        </p:spPr>
+        <p:txBody>
+          <a:bodyPr wrap="square">
+            <a:spAutoFit/>
+          </a:bodyPr>
+          <a:lstStyle/>
+          <a:p>
+            <a:pPr algn="l">
+              <a:lnSpc>
+                <a:spcPct val="115000"/>
+              </a:lnSpc>
+            </a:pPr>
+            <a:r>
+              <a:rPr sz="1600" b="1" i="0">
+                <a:solidFill>
+                  <a:srgbClr val="1F2A28"/>
+                </a:solidFill>
+                <a:latin typeface="Calibri"/>
+              </a:rPr>
+              <a:t>Grey</a:t>
+            </a:r>
+          </a:p>
+        </p:txBody>
+      </p:sp>
+      <p:sp>
+        <p:nvSpPr>
+          <p:cNvPr id="16" name="Rounded Rectangle 15"/>
+          <p:cNvSpPr/>
+          <p:nvPr/>
+        </p:nvSpPr>
+        <p:spPr>
+          <a:xfrm>
+            <a:off x="502920" y="3429000"/>
             <a:ext cx="6949440" cy="1051560"/>
           </a:xfrm>
           <a:prstGeom prst="roundRect">
@@ -3306,13 +3742,13 @@
       </p:sp>
       <p:sp>
         <p:nvSpPr>
-          <p:cNvPr id="7" name="TextBox 6"/>
+          <p:cNvPr id="17" name="TextBox 16"/>
           <p:cNvSpPr txBox="1"/>
           <p:nvPr/>
         </p:nvSpPr>
         <p:spPr>
           <a:xfrm>
-            <a:off x="731520" y="2404872"/>
+            <a:off x="731520" y="3547872"/>
             <a:ext cx="6492240" cy="274320"/>
           </a:xfrm>
           <a:prstGeom prst="rect">
@@ -3345,13 +3781,13 @@
       </p:sp>
       <p:sp>
         <p:nvSpPr>
-          <p:cNvPr id="8" name="TextBox 7"/>
+          <p:cNvPr id="18" name="TextBox 17"/>
           <p:cNvSpPr txBox="1"/>
           <p:nvPr/>
         </p:nvSpPr>
         <p:spPr>
           <a:xfrm>
-            <a:off x="731520" y="2697480"/>
+            <a:off x="731520" y="3840480"/>
             <a:ext cx="6492240" cy="594360"/>
           </a:xfrm>
           <a:prstGeom prst="rect">
@@ -3384,13 +3820,13 @@
       </p:sp>
       <p:sp>
         <p:nvSpPr>
-          <p:cNvPr id="9" name="Rounded Rectangle 8"/>
+          <p:cNvPr id="19" name="Rounded Rectangle 18"/>
           <p:cNvSpPr/>
           <p:nvPr/>
         </p:nvSpPr>
         <p:spPr>
           <a:xfrm>
-            <a:off x="7635240" y="2286000"/>
+            <a:off x="7635240" y="3429000"/>
             <a:ext cx="4069080" cy="1051560"/>
           </a:xfrm>
           <a:prstGeom prst="roundRect">
@@ -3430,13 +3866,13 @@
       </p:sp>
       <p:sp>
         <p:nvSpPr>
-          <p:cNvPr id="10" name="TextBox 9"/>
+          <p:cNvPr id="20" name="TextBox 19"/>
           <p:cNvSpPr txBox="1"/>
           <p:nvPr/>
         </p:nvSpPr>
         <p:spPr>
           <a:xfrm>
-            <a:off x="7818120" y="2404872"/>
+            <a:off x="7818120" y="3547872"/>
             <a:ext cx="3703320" cy="274320"/>
           </a:xfrm>
           <a:prstGeom prst="rect">
@@ -3469,13 +3905,13 @@
       </p:sp>
       <p:sp>
         <p:nvSpPr>
-          <p:cNvPr id="11" name="TextBox 10"/>
+          <p:cNvPr id="21" name="TextBox 20"/>
           <p:cNvSpPr txBox="1"/>
           <p:nvPr/>
         </p:nvSpPr>
         <p:spPr>
           <a:xfrm>
-            <a:off x="7818120" y="2651760"/>
+            <a:off x="7818120" y="3794760"/>
             <a:ext cx="3703320" cy="640080"/>
           </a:xfrm>
           <a:prstGeom prst="rect">
@@ -3524,68 +3960,7 @@
       </p:sp>
       <p:sp>
         <p:nvSpPr>
-          <p:cNvPr id="12" name="TextBox 11"/>
-          <p:cNvSpPr txBox="1"/>
-          <p:nvPr/>
-        </p:nvSpPr>
-        <p:spPr>
-          <a:xfrm>
-            <a:off x="502920" y="3749039"/>
-            <a:ext cx="10789920" cy="1371600"/>
-          </a:xfrm>
-          <a:prstGeom prst="rect">
-            <a:avLst/>
-          </a:prstGeom>
-          <a:noFill/>
-        </p:spPr>
-        <p:txBody>
-          <a:bodyPr wrap="square">
-            <a:spAutoFit/>
-          </a:bodyPr>
-          <a:lstStyle/>
-          <a:p>
-            <a:pPr>
-              <a:lnSpc>
-                <a:spcPct val="112000"/>
-              </a:lnSpc>
-              <a:spcAft>
-                <a:spcPts val="864"/>
-              </a:spcAft>
-            </a:pPr>
-            <a:r>
-              <a:rPr sz="1400" b="0" i="0">
-                <a:solidFill>
-                  <a:srgbClr val="1F2A28"/>
-                </a:solidFill>
-                <a:latin typeface="Calibri"/>
-              </a:rPr>
-              <a:t>•  Universe 1 leader: Orange (+9.12% TSR).</a:t>
-            </a:r>
-          </a:p>
-          <a:p>
-            <a:pPr>
-              <a:lnSpc>
-                <a:spcPct val="112000"/>
-              </a:lnSpc>
-              <a:spcAft>
-                <a:spcPts val="864"/>
-              </a:spcAft>
-            </a:pPr>
-            <a:r>
-              <a:rPr sz="1400" b="0" i="0">
-                <a:solidFill>
-                  <a:srgbClr val="1F2A28"/>
-                </a:solidFill>
-                <a:latin typeface="Calibri"/>
-              </a:rPr>
-              <a:t>•  Universe 2 leader: Grey (+14.29% TSR).</a:t>
-            </a:r>
-          </a:p>
-        </p:txBody>
-      </p:sp>
-      <p:sp>
-        <p:nvSpPr>
-          <p:cNvPr id="13" name="Rectangle 12"/>
+          <p:cNvPr id="22" name="Rectangle 21"/>
           <p:cNvSpPr/>
           <p:nvPr/>
         </p:nvSpPr>
@@ -3629,7 +4004,7 @@
       </p:sp>
       <p:sp>
         <p:nvSpPr>
-          <p:cNvPr id="14" name="TextBox 13"/>
+          <p:cNvPr id="23" name="TextBox 22"/>
           <p:cNvSpPr txBox="1"/>
           <p:nvPr/>
         </p:nvSpPr>
@@ -3657,7 +4032,7 @@
             <a:r>
               <a:rPr sz="1000" b="0" i="0">
                 <a:solidFill>
-                  <a:srgbClr val="4A5552"/>
+                  <a:srgbClr val="55605D"/>
                 </a:solidFill>
                 <a:latin typeface="Calibri"/>
               </a:rPr>
@@ -3668,7 +4043,7 @@
       </p:sp>
       <p:sp>
         <p:nvSpPr>
-          <p:cNvPr id="15" name="TextBox 14"/>
+          <p:cNvPr id="24" name="TextBox 23"/>
           <p:cNvSpPr txBox="1"/>
           <p:nvPr/>
         </p:nvSpPr>
@@ -3696,7 +4071,7 @@
             <a:r>
               <a:rPr sz="1000" b="0" i="0">
                 <a:solidFill>
-                  <a:srgbClr val="4A5552"/>
+                  <a:srgbClr val="55605D"/>
                 </a:solidFill>
                 <a:latin typeface="Calibri"/>
               </a:rPr>
@@ -3716,6 +4091,14 @@
 <file path=ppt/slides/slide2.xml><?xml version="1.0" encoding="utf-8"?>
 <p:sld xmlns:a="http://schemas.openxmlformats.org/drawingml/2006/main" xmlns:p="http://schemas.openxmlformats.org/presentationml/2006/main" xmlns:r="http://schemas.openxmlformats.org/officeDocument/2006/relationships">
   <p:cSld>
+    <p:bg>
+      <p:bgPr>
+        <a:solidFill>
+          <a:srgbClr val="FFFFFF"/>
+        </a:solidFill>
+        <a:effectLst/>
+      </p:bgPr>
+    </p:bg>
     <p:spTree>
       <p:nvGrpSpPr>
         <p:cNvPr id="1" name=""/>
@@ -3725,616 +4108,14 @@
       <p:grpSpPr/>
       <p:sp>
         <p:nvSpPr>
-          <p:cNvPr id="2" name="TextBox 1"/>
-          <p:cNvSpPr txBox="1"/>
-          <p:nvPr/>
-        </p:nvSpPr>
-        <p:spPr>
-          <a:xfrm>
-            <a:off x="502920" y="320040"/>
-            <a:ext cx="10058400" cy="320040"/>
-          </a:xfrm>
-          <a:prstGeom prst="rect">
-            <a:avLst/>
-          </a:prstGeom>
-          <a:noFill/>
-        </p:spPr>
-        <p:txBody>
-          <a:bodyPr wrap="square">
-            <a:spAutoFit/>
-          </a:bodyPr>
-          <a:lstStyle/>
-          <a:p>
-            <a:pPr algn="l">
-              <a:lnSpc>
-                <a:spcPct val="115000"/>
-              </a:lnSpc>
-            </a:pPr>
-            <a:r>
-              <a:rPr sz="1100" b="1" i="0">
-                <a:solidFill>
-                  <a:srgbClr val="78A79B"/>
-                </a:solidFill>
-                <a:latin typeface="Calibri"/>
-              </a:rPr>
-              <a:t>01 / SIDE BY SIDE</a:t>
-            </a:r>
-          </a:p>
-        </p:txBody>
-      </p:sp>
-      <p:sp>
-        <p:nvSpPr>
-          <p:cNvPr id="3" name="TextBox 2"/>
-          <p:cNvSpPr txBox="1"/>
-          <p:nvPr/>
-        </p:nvSpPr>
-        <p:spPr>
-          <a:xfrm>
-            <a:off x="502920" y="621792"/>
-            <a:ext cx="11155680" cy="685800"/>
-          </a:xfrm>
-          <a:prstGeom prst="rect">
-            <a:avLst/>
-          </a:prstGeom>
-          <a:noFill/>
-        </p:spPr>
-        <p:txBody>
-          <a:bodyPr wrap="square">
-            <a:spAutoFit/>
-          </a:bodyPr>
-          <a:lstStyle/>
-          <a:p>
-            <a:pPr algn="l">
-              <a:lnSpc>
-                <a:spcPct val="115000"/>
-              </a:lnSpc>
-            </a:pPr>
-            <a:r>
-              <a:rPr sz="2400" b="1" i="0">
-                <a:solidFill>
-                  <a:srgbClr val="1F2A28"/>
-                </a:solidFill>
-                <a:latin typeface="Calibri"/>
-              </a:rPr>
-              <a:t>The two universes at a glance.</a:t>
-            </a:r>
-          </a:p>
-        </p:txBody>
-      </p:sp>
-      <p:graphicFrame>
-        <p:nvGraphicFramePr>
-          <p:cNvPr id="4" name="Table 3"/>
-          <p:cNvGraphicFramePr>
-            <a:graphicFrameLocks noGrp="1"/>
-          </p:cNvGraphicFramePr>
-          <p:nvPr/>
-        </p:nvGraphicFramePr>
-        <p:xfrm>
-          <a:off x="502920" y="1737360"/>
-          <a:ext cx="11201400" cy="3474720"/>
-        </p:xfrm>
-        <a:graphic>
-          <a:graphicData uri="http://schemas.openxmlformats.org/drawingml/2006/table">
-            <a:tbl>
-              <a:tblPr firstRow="1" bandRow="1">
-                <a:tableStyleId>{5C22544A-7EE6-4342-B048-85BDC9FD1C3A}</a:tableStyleId>
-              </a:tblPr>
-              <a:tblGrid>
-                <a:gridCol w="3108960"/>
-                <a:gridCol w="4023360"/>
-                <a:gridCol w="4069080"/>
-              </a:tblGrid>
-              <a:tr h="496388">
-                <a:tc>
-                  <a:txBody>
-                    <a:bodyPr/>
-                    <a:lstStyle/>
-                    <a:p>
-                      <a:pPr algn="l"/>
-                      <a:r>
-                        <a:rPr sz="1250" b="1" i="0">
-                          <a:solidFill>
-                            <a:srgbClr val="FFFFFF"/>
-                          </a:solidFill>
-                          <a:latin typeface="Calibri"/>
-                        </a:rPr>
-                        <a:t>Metric</a:t>
-                      </a:r>
-                    </a:p>
-                  </a:txBody>
-                  <a:tcPr anchor="ctr">
-                    <a:solidFill>
-                      <a:srgbClr val="78A79B"/>
-                    </a:solidFill>
-                  </a:tcPr>
-                </a:tc>
-                <a:tc>
-                  <a:txBody>
-                    <a:bodyPr/>
-                    <a:lstStyle/>
-                    <a:p>
-                      <a:pPr algn="l"/>
-                      <a:r>
-                        <a:rPr sz="1250" b="1" i="0">
-                          <a:solidFill>
-                            <a:srgbClr val="FFFFFF"/>
-                          </a:solidFill>
-                          <a:latin typeface="Calibri"/>
-                        </a:rPr>
-                        <a:t>Universe 1</a:t>
-                      </a:r>
-                    </a:p>
-                  </a:txBody>
-                  <a:tcPr anchor="ctr">
-                    <a:solidFill>
-                      <a:srgbClr val="78A79B"/>
-                    </a:solidFill>
-                  </a:tcPr>
-                </a:tc>
-                <a:tc>
-                  <a:txBody>
-                    <a:bodyPr/>
-                    <a:lstStyle/>
-                    <a:p>
-                      <a:pPr algn="l"/>
-                      <a:r>
-                        <a:rPr sz="1250" b="1" i="0">
-                          <a:solidFill>
-                            <a:srgbClr val="FFFFFF"/>
-                          </a:solidFill>
-                          <a:latin typeface="Calibri"/>
-                        </a:rPr>
-                        <a:t>Universe 2</a:t>
-                      </a:r>
-                    </a:p>
-                  </a:txBody>
-                  <a:tcPr anchor="ctr">
-                    <a:solidFill>
-                      <a:srgbClr val="78A79B"/>
-                    </a:solidFill>
-                  </a:tcPr>
-                </a:tc>
-              </a:tr>
-              <a:tr h="496388">
-                <a:tc>
-                  <a:txBody>
-                    <a:bodyPr/>
-                    <a:lstStyle/>
-                    <a:p>
-                      <a:pPr algn="l"/>
-                      <a:r>
-                        <a:rPr sz="1250" b="0" i="0">
-                          <a:solidFill>
-                            <a:srgbClr val="1F2A28"/>
-                          </a:solidFill>
-                          <a:latin typeface="Calibri"/>
-                        </a:rPr>
-                        <a:t>TSR leader</a:t>
-                      </a:r>
-                    </a:p>
-                  </a:txBody>
-                  <a:tcPr anchor="ctr" marT="38100" marB="38100">
-                    <a:solidFill>
-                      <a:srgbClr val="DDE8DE"/>
-                    </a:solidFill>
-                  </a:tcPr>
-                </a:tc>
-                <a:tc>
-                  <a:txBody>
-                    <a:bodyPr/>
-                    <a:lstStyle/>
-                    <a:p>
-                      <a:pPr algn="l"/>
-                      <a:r>
-                        <a:rPr sz="1250" b="0" i="0">
-                          <a:solidFill>
-                            <a:srgbClr val="1F2A28"/>
-                          </a:solidFill>
-                          <a:latin typeface="Calibri"/>
-                        </a:rPr>
-                        <a:t>Orange</a:t>
-                      </a:r>
-                    </a:p>
-                  </a:txBody>
-                  <a:tcPr anchor="ctr" marT="38100" marB="38100">
-                    <a:solidFill>
-                      <a:srgbClr val="DDE8DE"/>
-                    </a:solidFill>
-                  </a:tcPr>
-                </a:tc>
-                <a:tc>
-                  <a:txBody>
-                    <a:bodyPr/>
-                    <a:lstStyle/>
-                    <a:p>
-                      <a:pPr algn="l"/>
-                      <a:r>
-                        <a:rPr sz="1250" b="0" i="0">
-                          <a:solidFill>
-                            <a:srgbClr val="1F2A28"/>
-                          </a:solidFill>
-                          <a:latin typeface="Calibri"/>
-                        </a:rPr>
-                        <a:t>Grey</a:t>
-                      </a:r>
-                    </a:p>
-                  </a:txBody>
-                  <a:tcPr anchor="ctr" marT="38100" marB="38100">
-                    <a:solidFill>
-                      <a:srgbClr val="DDE8DE"/>
-                    </a:solidFill>
-                  </a:tcPr>
-                </a:tc>
-              </a:tr>
-              <a:tr h="496388">
-                <a:tc>
-                  <a:txBody>
-                    <a:bodyPr/>
-                    <a:lstStyle/>
-                    <a:p>
-                      <a:pPr algn="l"/>
-                      <a:r>
-                        <a:rPr sz="1250" b="0" i="0">
-                          <a:solidFill>
-                            <a:srgbClr val="1F2A28"/>
-                          </a:solidFill>
-                          <a:latin typeface="Calibri"/>
-                        </a:rPr>
-                        <a:t>This round's profit leader</a:t>
-                      </a:r>
-                    </a:p>
-                  </a:txBody>
-                  <a:tcPr anchor="ctr" marT="38100" marB="38100">
-                    <a:solidFill>
-                      <a:srgbClr val="DDE8DE"/>
-                    </a:solidFill>
-                  </a:tcPr>
-                </a:tc>
-                <a:tc>
-                  <a:txBody>
-                    <a:bodyPr/>
-                    <a:lstStyle/>
-                    <a:p>
-                      <a:pPr algn="l"/>
-                      <a:r>
-                        <a:rPr sz="1250" b="0" i="0">
-                          <a:solidFill>
-                            <a:srgbClr val="1F2A28"/>
-                          </a:solidFill>
-                          <a:latin typeface="Calibri"/>
-                        </a:rPr>
-                        <a:t>Ochre</a:t>
-                      </a:r>
-                    </a:p>
-                  </a:txBody>
-                  <a:tcPr anchor="ctr" marT="38100" marB="38100">
-                    <a:solidFill>
-                      <a:srgbClr val="DDE8DE"/>
-                    </a:solidFill>
-                  </a:tcPr>
-                </a:tc>
-                <a:tc>
-                  <a:txBody>
-                    <a:bodyPr/>
-                    <a:lstStyle/>
-                    <a:p>
-                      <a:pPr algn="l"/>
-                      <a:r>
-                        <a:rPr sz="1250" b="0" i="0">
-                          <a:solidFill>
-                            <a:srgbClr val="1F2A28"/>
-                          </a:solidFill>
-                          <a:latin typeface="Calibri"/>
-                        </a:rPr>
-                        <a:t>HallaBol</a:t>
-                      </a:r>
-                    </a:p>
-                  </a:txBody>
-                  <a:tcPr anchor="ctr" marT="38100" marB="38100">
-                    <a:solidFill>
-                      <a:srgbClr val="DDE8DE"/>
-                    </a:solidFill>
-                  </a:tcPr>
-                </a:tc>
-              </a:tr>
-              <a:tr h="496388">
-                <a:tc>
-                  <a:txBody>
-                    <a:bodyPr/>
-                    <a:lstStyle/>
-                    <a:p>
-                      <a:pPr algn="l"/>
-                      <a:r>
-                        <a:rPr sz="1250" b="0" i="0">
-                          <a:solidFill>
-                            <a:srgbClr val="1F2A28"/>
-                          </a:solidFill>
-                          <a:latin typeface="Calibri"/>
-                        </a:rPr>
-                        <a:t>Aggregate profit this round</a:t>
-                      </a:r>
-                    </a:p>
-                  </a:txBody>
-                  <a:tcPr anchor="ctr" marT="38100" marB="38100">
-                    <a:solidFill>
-                      <a:srgbClr val="DDE8DE"/>
-                    </a:solidFill>
-                  </a:tcPr>
-                </a:tc>
-                <a:tc>
-                  <a:txBody>
-                    <a:bodyPr/>
-                    <a:lstStyle/>
-                    <a:p>
-                      <a:pPr algn="l"/>
-                      <a:r>
-                        <a:rPr sz="1250" b="0" i="0">
-                          <a:solidFill>
-                            <a:srgbClr val="1F2A28"/>
-                          </a:solidFill>
-                          <a:latin typeface="Calibri"/>
-                        </a:rPr>
-                        <a:t>$2.06bn</a:t>
-                      </a:r>
-                    </a:p>
-                  </a:txBody>
-                  <a:tcPr anchor="ctr" marT="38100" marB="38100">
-                    <a:solidFill>
-                      <a:srgbClr val="DDE8DE"/>
-                    </a:solidFill>
-                  </a:tcPr>
-                </a:tc>
-                <a:tc>
-                  <a:txBody>
-                    <a:bodyPr/>
-                    <a:lstStyle/>
-                    <a:p>
-                      <a:pPr algn="l"/>
-                      <a:r>
-                        <a:rPr sz="1250" b="0" i="0">
-                          <a:solidFill>
-                            <a:srgbClr val="1F2A28"/>
-                          </a:solidFill>
-                          <a:latin typeface="Calibri"/>
-                        </a:rPr>
-                        <a:t>$593m</a:t>
-                      </a:r>
-                    </a:p>
-                  </a:txBody>
-                  <a:tcPr anchor="ctr" marT="38100" marB="38100">
-                    <a:solidFill>
-                      <a:srgbClr val="DDE8DE"/>
-                    </a:solidFill>
-                  </a:tcPr>
-                </a:tc>
-              </a:tr>
-              <a:tr h="496388">
-                <a:tc>
-                  <a:txBody>
-                    <a:bodyPr/>
-                    <a:lstStyle/>
-                    <a:p>
-                      <a:pPr algn="l"/>
-                      <a:r>
-                        <a:rPr sz="1250" b="0" i="0">
-                          <a:solidFill>
-                            <a:srgbClr val="1F2A28"/>
-                          </a:solidFill>
-                          <a:latin typeface="Calibri"/>
-                        </a:rPr>
-                        <a:t>Average TSR</a:t>
-                      </a:r>
-                    </a:p>
-                  </a:txBody>
-                  <a:tcPr anchor="ctr" marT="38100" marB="38100">
-                    <a:solidFill>
-                      <a:srgbClr val="DDE8DE"/>
-                    </a:solidFill>
-                  </a:tcPr>
-                </a:tc>
-                <a:tc>
-                  <a:txBody>
-                    <a:bodyPr/>
-                    <a:lstStyle/>
-                    <a:p>
-                      <a:pPr algn="l"/>
-                      <a:r>
-                        <a:rPr sz="1250" b="0" i="0">
-                          <a:solidFill>
-                            <a:srgbClr val="1F2A28"/>
-                          </a:solidFill>
-                          <a:latin typeface="Calibri"/>
-                        </a:rPr>
-                        <a:t>+4.1%</a:t>
-                      </a:r>
-                    </a:p>
-                  </a:txBody>
-                  <a:tcPr anchor="ctr" marT="38100" marB="38100">
-                    <a:solidFill>
-                      <a:srgbClr val="DDE8DE"/>
-                    </a:solidFill>
-                  </a:tcPr>
-                </a:tc>
-                <a:tc>
-                  <a:txBody>
-                    <a:bodyPr/>
-                    <a:lstStyle/>
-                    <a:p>
-                      <a:pPr algn="l"/>
-                      <a:r>
-                        <a:rPr sz="1250" b="0" i="0">
-                          <a:solidFill>
-                            <a:srgbClr val="1F2A28"/>
-                          </a:solidFill>
-                          <a:latin typeface="Calibri"/>
-                        </a:rPr>
-                        <a:t>+2.5%</a:t>
-                      </a:r>
-                    </a:p>
-                  </a:txBody>
-                  <a:tcPr anchor="ctr" marT="38100" marB="38100">
-                    <a:solidFill>
-                      <a:srgbClr val="DDE8DE"/>
-                    </a:solidFill>
-                  </a:tcPr>
-                </a:tc>
-              </a:tr>
-              <a:tr h="496388">
-                <a:tc>
-                  <a:txBody>
-                    <a:bodyPr/>
-                    <a:lstStyle/>
-                    <a:p>
-                      <a:pPr algn="l"/>
-                      <a:r>
-                        <a:rPr sz="1250" b="0" i="0">
-                          <a:solidFill>
-                            <a:srgbClr val="1F2A28"/>
-                          </a:solidFill>
-                          <a:latin typeface="Calibri"/>
-                        </a:rPr>
-                        <a:t>Biggest riser</a:t>
-                      </a:r>
-                    </a:p>
-                  </a:txBody>
-                  <a:tcPr anchor="ctr" marT="38100" marB="38100">
-                    <a:solidFill>
-                      <a:srgbClr val="DDE8DE"/>
-                    </a:solidFill>
-                  </a:tcPr>
-                </a:tc>
-                <a:tc>
-                  <a:txBody>
-                    <a:bodyPr/>
-                    <a:lstStyle/>
-                    <a:p>
-                      <a:pPr algn="l"/>
-                      <a:r>
-                        <a:rPr sz="1250" b="0" i="0">
-                          <a:solidFill>
-                            <a:srgbClr val="1F2A28"/>
-                          </a:solidFill>
-                          <a:latin typeface="Calibri"/>
-                        </a:rPr>
-                        <a:t>Blue (6→5)</a:t>
-                      </a:r>
-                    </a:p>
-                  </a:txBody>
-                  <a:tcPr anchor="ctr" marT="38100" marB="38100">
-                    <a:solidFill>
-                      <a:srgbClr val="DDE8DE"/>
-                    </a:solidFill>
-                  </a:tcPr>
-                </a:tc>
-                <a:tc>
-                  <a:txBody>
-                    <a:bodyPr/>
-                    <a:lstStyle/>
-                    <a:p>
-                      <a:pPr algn="l"/>
-                      <a:r>
-                        <a:rPr sz="1250" b="0" i="0">
-                          <a:solidFill>
-                            <a:srgbClr val="1F2A28"/>
-                          </a:solidFill>
-                          <a:latin typeface="Calibri"/>
-                        </a:rPr>
-                        <a:t>Grey (1→1)</a:t>
-                      </a:r>
-                    </a:p>
-                  </a:txBody>
-                  <a:tcPr anchor="ctr" marT="38100" marB="38100">
-                    <a:solidFill>
-                      <a:srgbClr val="DDE8DE"/>
-                    </a:solidFill>
-                  </a:tcPr>
-                </a:tc>
-              </a:tr>
-              <a:tr h="496392">
-                <a:tc>
-                  <a:txBody>
-                    <a:bodyPr/>
-                    <a:lstStyle/>
-                    <a:p>
-                      <a:pPr algn="l"/>
-                      <a:r>
-                        <a:rPr sz="1250" b="0" i="0">
-                          <a:solidFill>
-                            <a:srgbClr val="1F2A28"/>
-                          </a:solidFill>
-                          <a:latin typeface="Calibri"/>
-                        </a:rPr>
-                        <a:t>Biggest faller</a:t>
-                      </a:r>
-                    </a:p>
-                  </a:txBody>
-                  <a:tcPr anchor="ctr" marT="38100" marB="38100">
-                    <a:solidFill>
-                      <a:srgbClr val="DDE8DE"/>
-                    </a:solidFill>
-                  </a:tcPr>
-                </a:tc>
-                <a:tc>
-                  <a:txBody>
-                    <a:bodyPr/>
-                    <a:lstStyle/>
-                    <a:p>
-                      <a:pPr algn="l"/>
-                      <a:r>
-                        <a:rPr sz="1250" b="0" i="0">
-                          <a:solidFill>
-                            <a:srgbClr val="1F2A28"/>
-                          </a:solidFill>
-                          <a:latin typeface="Calibri"/>
-                        </a:rPr>
-                        <a:t>Grey (5→6)</a:t>
-                      </a:r>
-                    </a:p>
-                  </a:txBody>
-                  <a:tcPr anchor="ctr" marT="38100" marB="38100">
-                    <a:solidFill>
-                      <a:srgbClr val="DDE8DE"/>
-                    </a:solidFill>
-                  </a:tcPr>
-                </a:tc>
-                <a:tc>
-                  <a:txBody>
-                    <a:bodyPr/>
-                    <a:lstStyle/>
-                    <a:p>
-                      <a:pPr algn="l"/>
-                      <a:r>
-                        <a:rPr sz="1250" b="0" i="0">
-                          <a:solidFill>
-                            <a:srgbClr val="1F2A28"/>
-                          </a:solidFill>
-                          <a:latin typeface="Calibri"/>
-                        </a:rPr>
-                        <a:t>Grey (1→1)</a:t>
-                      </a:r>
-                    </a:p>
-                  </a:txBody>
-                  <a:tcPr anchor="ctr" marT="38100" marB="38100">
-                    <a:solidFill>
-                      <a:srgbClr val="DDE8DE"/>
-                    </a:solidFill>
-                  </a:tcPr>
-                </a:tc>
-              </a:tr>
-            </a:tbl>
-          </a:graphicData>
-        </a:graphic>
-      </p:graphicFrame>
-      <p:sp>
-        <p:nvSpPr>
-          <p:cNvPr id="5" name="Rectangle 4"/>
+          <p:cNvPr id="2" name="Rectangle 1"/>
           <p:cNvSpPr/>
           <p:nvPr/>
         </p:nvSpPr>
         <p:spPr>
           <a:xfrm>
-            <a:off x="0" y="6812280"/>
-            <a:ext cx="12191695" cy="45720"/>
+            <a:off x="502920" y="384048"/>
+            <a:ext cx="320040" cy="54864"/>
           </a:xfrm>
           <a:prstGeom prst="rect">
             <a:avLst/>
@@ -4371,14 +4152,14 @@
       </p:sp>
       <p:sp>
         <p:nvSpPr>
-          <p:cNvPr id="6" name="TextBox 5"/>
+          <p:cNvPr id="3" name="TextBox 2"/>
           <p:cNvSpPr txBox="1"/>
           <p:nvPr/>
         </p:nvSpPr>
         <p:spPr>
           <a:xfrm>
-            <a:off x="365760" y="6473952"/>
-            <a:ext cx="7315200" cy="274320"/>
+            <a:off x="502920" y="475488"/>
+            <a:ext cx="10058400" cy="292608"/>
           </a:xfrm>
           <a:prstGeom prst="rect">
             <a:avLst/>
@@ -4397,9 +4178,1267 @@
               </a:lnSpc>
             </a:pPr>
             <a:r>
+              <a:rPr sz="1100" b="1" i="0">
+                <a:solidFill>
+                  <a:srgbClr val="78A79B"/>
+                </a:solidFill>
+                <a:latin typeface="Calibri"/>
+              </a:rPr>
+              <a:t>01 / SIDE BY SIDE</a:t>
+            </a:r>
+          </a:p>
+        </p:txBody>
+      </p:sp>
+      <p:sp>
+        <p:nvSpPr>
+          <p:cNvPr id="4" name="TextBox 3"/>
+          <p:cNvSpPr txBox="1"/>
+          <p:nvPr/>
+        </p:nvSpPr>
+        <p:spPr>
+          <a:xfrm>
+            <a:off x="502920" y="758952"/>
+            <a:ext cx="11155680" cy="658368"/>
+          </a:xfrm>
+          <a:prstGeom prst="rect">
+            <a:avLst/>
+          </a:prstGeom>
+          <a:noFill/>
+        </p:spPr>
+        <p:txBody>
+          <a:bodyPr wrap="square">
+            <a:spAutoFit/>
+          </a:bodyPr>
+          <a:lstStyle/>
+          <a:p>
+            <a:pPr algn="l">
+              <a:lnSpc>
+                <a:spcPct val="115000"/>
+              </a:lnSpc>
+            </a:pPr>
+            <a:r>
+              <a:rPr sz="2500" b="1" i="0">
+                <a:solidFill>
+                  <a:srgbClr val="1F2A28"/>
+                </a:solidFill>
+                <a:latin typeface="Calibri"/>
+              </a:rPr>
+              <a:t>The two universes at a glance.</a:t>
+            </a:r>
+          </a:p>
+        </p:txBody>
+      </p:sp>
+      <p:sp>
+        <p:nvSpPr>
+          <p:cNvPr id="5" name="Rounded Rectangle 4"/>
+          <p:cNvSpPr/>
+          <p:nvPr/>
+        </p:nvSpPr>
+        <p:spPr>
+          <a:xfrm>
+            <a:off x="3840479" y="1691640"/>
+            <a:ext cx="3977639" cy="457200"/>
+          </a:xfrm>
+          <a:prstGeom prst="roundRect">
+            <a:avLst>
+              <a:gd name="adj" fmla="val 8000"/>
+            </a:avLst>
+          </a:prstGeom>
+          <a:solidFill>
+            <a:srgbClr val="DDE8DE"/>
+          </a:solidFill>
+          <a:ln>
+            <a:noFill/>
+          </a:ln>
+          <a:effectLst/>
+        </p:spPr>
+        <p:style>
+          <a:lnRef idx="1">
+            <a:schemeClr val="accent1"/>
+          </a:lnRef>
+          <a:fillRef idx="3">
+            <a:schemeClr val="accent1"/>
+          </a:fillRef>
+          <a:effectRef idx="2">
+            <a:schemeClr val="accent1"/>
+          </a:effectRef>
+          <a:fontRef idx="minor">
+            <a:schemeClr val="lt1"/>
+          </a:fontRef>
+        </p:style>
+        <p:txBody>
+          <a:bodyPr rtlCol="0" anchor="ctr"/>
+          <a:lstStyle/>
+          <a:p>
+            <a:pPr algn="ctr"/>
+          </a:p>
+        </p:txBody>
+      </p:sp>
+      <p:sp>
+        <p:nvSpPr>
+          <p:cNvPr id="6" name="TextBox 5"/>
+          <p:cNvSpPr txBox="1"/>
+          <p:nvPr/>
+        </p:nvSpPr>
+        <p:spPr>
+          <a:xfrm>
+            <a:off x="3840479" y="1691640"/>
+            <a:ext cx="3977639" cy="457200"/>
+          </a:xfrm>
+          <a:prstGeom prst="rect">
+            <a:avLst/>
+          </a:prstGeom>
+          <a:noFill/>
+        </p:spPr>
+        <p:txBody>
+          <a:bodyPr wrap="square" anchor="ctr">
+            <a:spAutoFit/>
+          </a:bodyPr>
+          <a:lstStyle/>
+          <a:p>
+            <a:pPr algn="ctr">
+              <a:lnSpc>
+                <a:spcPct val="115000"/>
+              </a:lnSpc>
+            </a:pPr>
+            <a:r>
+              <a:rPr sz="1300" b="1" i="0">
+                <a:solidFill>
+                  <a:srgbClr val="4E7D72"/>
+                </a:solidFill>
+                <a:latin typeface="Calibri"/>
+              </a:rPr>
+              <a:t>UNIVERSE 1</a:t>
+            </a:r>
+          </a:p>
+        </p:txBody>
+      </p:sp>
+      <p:sp>
+        <p:nvSpPr>
+          <p:cNvPr id="7" name="Rounded Rectangle 6"/>
+          <p:cNvSpPr/>
+          <p:nvPr/>
+        </p:nvSpPr>
+        <p:spPr>
+          <a:xfrm>
+            <a:off x="8092440" y="1691640"/>
+            <a:ext cx="3977639" cy="457200"/>
+          </a:xfrm>
+          <a:prstGeom prst="roundRect">
+            <a:avLst>
+              <a:gd name="adj" fmla="val 8000"/>
+            </a:avLst>
+          </a:prstGeom>
+          <a:solidFill>
+            <a:srgbClr val="EFE2CC"/>
+          </a:solidFill>
+          <a:ln>
+            <a:noFill/>
+          </a:ln>
+          <a:effectLst/>
+        </p:spPr>
+        <p:style>
+          <a:lnRef idx="1">
+            <a:schemeClr val="accent1"/>
+          </a:lnRef>
+          <a:fillRef idx="3">
+            <a:schemeClr val="accent1"/>
+          </a:fillRef>
+          <a:effectRef idx="2">
+            <a:schemeClr val="accent1"/>
+          </a:effectRef>
+          <a:fontRef idx="minor">
+            <a:schemeClr val="lt1"/>
+          </a:fontRef>
+        </p:style>
+        <p:txBody>
+          <a:bodyPr rtlCol="0" anchor="ctr"/>
+          <a:lstStyle/>
+          <a:p>
+            <a:pPr algn="ctr"/>
+          </a:p>
+        </p:txBody>
+      </p:sp>
+      <p:sp>
+        <p:nvSpPr>
+          <p:cNvPr id="8" name="TextBox 7"/>
+          <p:cNvSpPr txBox="1"/>
+          <p:nvPr/>
+        </p:nvSpPr>
+        <p:spPr>
+          <a:xfrm>
+            <a:off x="8092440" y="1691640"/>
+            <a:ext cx="3977639" cy="457200"/>
+          </a:xfrm>
+          <a:prstGeom prst="rect">
+            <a:avLst/>
+          </a:prstGeom>
+          <a:noFill/>
+        </p:spPr>
+        <p:txBody>
+          <a:bodyPr wrap="square" anchor="ctr">
+            <a:spAutoFit/>
+          </a:bodyPr>
+          <a:lstStyle/>
+          <a:p>
+            <a:pPr algn="ctr">
+              <a:lnSpc>
+                <a:spcPct val="115000"/>
+              </a:lnSpc>
+            </a:pPr>
+            <a:r>
+              <a:rPr sz="1300" b="1" i="0">
+                <a:solidFill>
+                  <a:srgbClr val="8A6D2A"/>
+                </a:solidFill>
+                <a:latin typeface="Calibri"/>
+              </a:rPr>
+              <a:t>UNIVERSE 2</a:t>
+            </a:r>
+          </a:p>
+        </p:txBody>
+      </p:sp>
+      <p:sp>
+        <p:nvSpPr>
+          <p:cNvPr id="9" name="Rectangle 8"/>
+          <p:cNvSpPr/>
+          <p:nvPr/>
+        </p:nvSpPr>
+        <p:spPr>
+          <a:xfrm>
+            <a:off x="502920" y="2331720"/>
+            <a:ext cx="11201400" cy="658368"/>
+          </a:xfrm>
+          <a:prstGeom prst="rect">
+            <a:avLst/>
+          </a:prstGeom>
+          <a:solidFill>
+            <a:srgbClr val="F7F5F0"/>
+          </a:solidFill>
+          <a:ln>
+            <a:noFill/>
+          </a:ln>
+          <a:effectLst/>
+        </p:spPr>
+        <p:style>
+          <a:lnRef idx="1">
+            <a:schemeClr val="accent1"/>
+          </a:lnRef>
+          <a:fillRef idx="3">
+            <a:schemeClr val="accent1"/>
+          </a:fillRef>
+          <a:effectRef idx="2">
+            <a:schemeClr val="accent1"/>
+          </a:effectRef>
+          <a:fontRef idx="minor">
+            <a:schemeClr val="lt1"/>
+          </a:fontRef>
+        </p:style>
+        <p:txBody>
+          <a:bodyPr rtlCol="0" anchor="ctr"/>
+          <a:lstStyle/>
+          <a:p>
+            <a:pPr algn="ctr"/>
+          </a:p>
+        </p:txBody>
+      </p:sp>
+      <p:sp>
+        <p:nvSpPr>
+          <p:cNvPr id="10" name="TextBox 9"/>
+          <p:cNvSpPr txBox="1"/>
+          <p:nvPr/>
+        </p:nvSpPr>
+        <p:spPr>
+          <a:xfrm>
+            <a:off x="640080" y="2331720"/>
+            <a:ext cx="3200400" cy="658368"/>
+          </a:xfrm>
+          <a:prstGeom prst="rect">
+            <a:avLst/>
+          </a:prstGeom>
+          <a:noFill/>
+        </p:spPr>
+        <p:txBody>
+          <a:bodyPr wrap="square" anchor="ctr">
+            <a:spAutoFit/>
+          </a:bodyPr>
+          <a:lstStyle/>
+          <a:p>
+            <a:pPr algn="l">
+              <a:lnSpc>
+                <a:spcPct val="115000"/>
+              </a:lnSpc>
+            </a:pPr>
+            <a:r>
+              <a:rPr sz="1200" b="1" i="0">
+                <a:solidFill>
+                  <a:srgbClr val="55605D"/>
+                </a:solidFill>
+                <a:latin typeface="Calibri"/>
+              </a:rPr>
+              <a:t>TSR leader</a:t>
+            </a:r>
+          </a:p>
+        </p:txBody>
+      </p:sp>
+      <p:sp>
+        <p:nvSpPr>
+          <p:cNvPr id="11" name="TextBox 10"/>
+          <p:cNvSpPr txBox="1"/>
+          <p:nvPr/>
+        </p:nvSpPr>
+        <p:spPr>
+          <a:xfrm>
+            <a:off x="3840479" y="2331720"/>
+            <a:ext cx="3977639" cy="658368"/>
+          </a:xfrm>
+          <a:prstGeom prst="rect">
+            <a:avLst/>
+          </a:prstGeom>
+          <a:noFill/>
+        </p:spPr>
+        <p:txBody>
+          <a:bodyPr wrap="square" anchor="ctr">
+            <a:spAutoFit/>
+          </a:bodyPr>
+          <a:lstStyle/>
+          <a:p>
+            <a:pPr algn="ctr">
+              <a:lnSpc>
+                <a:spcPct val="115000"/>
+              </a:lnSpc>
+            </a:pPr>
+            <a:r>
+              <a:rPr sz="1300" b="0" i="0">
+                <a:solidFill>
+                  <a:srgbClr val="1F2A28"/>
+                </a:solidFill>
+                <a:latin typeface="Calibri"/>
+              </a:rPr>
+              <a:t>Orange</a:t>
+            </a:r>
+          </a:p>
+        </p:txBody>
+      </p:sp>
+      <p:sp>
+        <p:nvSpPr>
+          <p:cNvPr id="12" name="TextBox 11"/>
+          <p:cNvSpPr txBox="1"/>
+          <p:nvPr/>
+        </p:nvSpPr>
+        <p:spPr>
+          <a:xfrm>
+            <a:off x="8092440" y="2331720"/>
+            <a:ext cx="3977639" cy="658368"/>
+          </a:xfrm>
+          <a:prstGeom prst="rect">
+            <a:avLst/>
+          </a:prstGeom>
+          <a:noFill/>
+        </p:spPr>
+        <p:txBody>
+          <a:bodyPr wrap="square" anchor="ctr">
+            <a:spAutoFit/>
+          </a:bodyPr>
+          <a:lstStyle/>
+          <a:p>
+            <a:pPr algn="ctr">
+              <a:lnSpc>
+                <a:spcPct val="115000"/>
+              </a:lnSpc>
+            </a:pPr>
+            <a:r>
+              <a:rPr sz="1300" b="0" i="0">
+                <a:solidFill>
+                  <a:srgbClr val="1F2A28"/>
+                </a:solidFill>
+                <a:latin typeface="Calibri"/>
+              </a:rPr>
+              <a:t>Grey</a:t>
+            </a:r>
+          </a:p>
+        </p:txBody>
+      </p:sp>
+      <p:sp>
+        <p:nvSpPr>
+          <p:cNvPr id="13" name="Rectangle 12"/>
+          <p:cNvSpPr/>
+          <p:nvPr/>
+        </p:nvSpPr>
+        <p:spPr>
+          <a:xfrm>
+            <a:off x="502920" y="2990088"/>
+            <a:ext cx="11201400" cy="658368"/>
+          </a:xfrm>
+          <a:prstGeom prst="rect">
+            <a:avLst/>
+          </a:prstGeom>
+          <a:solidFill>
+            <a:srgbClr val="FFFFFF"/>
+          </a:solidFill>
+          <a:ln>
+            <a:noFill/>
+          </a:ln>
+          <a:effectLst/>
+        </p:spPr>
+        <p:style>
+          <a:lnRef idx="1">
+            <a:schemeClr val="accent1"/>
+          </a:lnRef>
+          <a:fillRef idx="3">
+            <a:schemeClr val="accent1"/>
+          </a:fillRef>
+          <a:effectRef idx="2">
+            <a:schemeClr val="accent1"/>
+          </a:effectRef>
+          <a:fontRef idx="minor">
+            <a:schemeClr val="lt1"/>
+          </a:fontRef>
+        </p:style>
+        <p:txBody>
+          <a:bodyPr rtlCol="0" anchor="ctr"/>
+          <a:lstStyle/>
+          <a:p>
+            <a:pPr algn="ctr"/>
+          </a:p>
+        </p:txBody>
+      </p:sp>
+      <p:sp>
+        <p:nvSpPr>
+          <p:cNvPr id="14" name="TextBox 13"/>
+          <p:cNvSpPr txBox="1"/>
+          <p:nvPr/>
+        </p:nvSpPr>
+        <p:spPr>
+          <a:xfrm>
+            <a:off x="640080" y="2990088"/>
+            <a:ext cx="3200400" cy="658368"/>
+          </a:xfrm>
+          <a:prstGeom prst="rect">
+            <a:avLst/>
+          </a:prstGeom>
+          <a:noFill/>
+        </p:spPr>
+        <p:txBody>
+          <a:bodyPr wrap="square" anchor="ctr">
+            <a:spAutoFit/>
+          </a:bodyPr>
+          <a:lstStyle/>
+          <a:p>
+            <a:pPr algn="l">
+              <a:lnSpc>
+                <a:spcPct val="115000"/>
+              </a:lnSpc>
+            </a:pPr>
+            <a:r>
+              <a:rPr sz="1200" b="1" i="0">
+                <a:solidFill>
+                  <a:srgbClr val="55605D"/>
+                </a:solidFill>
+                <a:latin typeface="Calibri"/>
+              </a:rPr>
+              <a:t>This round's profit leader</a:t>
+            </a:r>
+          </a:p>
+        </p:txBody>
+      </p:sp>
+      <p:sp>
+        <p:nvSpPr>
+          <p:cNvPr id="15" name="TextBox 14"/>
+          <p:cNvSpPr txBox="1"/>
+          <p:nvPr/>
+        </p:nvSpPr>
+        <p:spPr>
+          <a:xfrm>
+            <a:off x="3840479" y="2990088"/>
+            <a:ext cx="3977639" cy="658368"/>
+          </a:xfrm>
+          <a:prstGeom prst="rect">
+            <a:avLst/>
+          </a:prstGeom>
+          <a:noFill/>
+        </p:spPr>
+        <p:txBody>
+          <a:bodyPr wrap="square" anchor="ctr">
+            <a:spAutoFit/>
+          </a:bodyPr>
+          <a:lstStyle/>
+          <a:p>
+            <a:pPr algn="ctr">
+              <a:lnSpc>
+                <a:spcPct val="115000"/>
+              </a:lnSpc>
+            </a:pPr>
+            <a:r>
+              <a:rPr sz="1300" b="0" i="0">
+                <a:solidFill>
+                  <a:srgbClr val="1F2A28"/>
+                </a:solidFill>
+                <a:latin typeface="Calibri"/>
+              </a:rPr>
+              <a:t>Ochre</a:t>
+            </a:r>
+          </a:p>
+        </p:txBody>
+      </p:sp>
+      <p:sp>
+        <p:nvSpPr>
+          <p:cNvPr id="16" name="TextBox 15"/>
+          <p:cNvSpPr txBox="1"/>
+          <p:nvPr/>
+        </p:nvSpPr>
+        <p:spPr>
+          <a:xfrm>
+            <a:off x="8092440" y="2990088"/>
+            <a:ext cx="3977639" cy="658368"/>
+          </a:xfrm>
+          <a:prstGeom prst="rect">
+            <a:avLst/>
+          </a:prstGeom>
+          <a:noFill/>
+        </p:spPr>
+        <p:txBody>
+          <a:bodyPr wrap="square" anchor="ctr">
+            <a:spAutoFit/>
+          </a:bodyPr>
+          <a:lstStyle/>
+          <a:p>
+            <a:pPr algn="ctr">
+              <a:lnSpc>
+                <a:spcPct val="115000"/>
+              </a:lnSpc>
+            </a:pPr>
+            <a:r>
+              <a:rPr sz="1300" b="0" i="0">
+                <a:solidFill>
+                  <a:srgbClr val="1F2A28"/>
+                </a:solidFill>
+                <a:latin typeface="Calibri"/>
+              </a:rPr>
+              <a:t>HallaBol</a:t>
+            </a:r>
+          </a:p>
+        </p:txBody>
+      </p:sp>
+      <p:sp>
+        <p:nvSpPr>
+          <p:cNvPr id="17" name="Rectangle 16"/>
+          <p:cNvSpPr/>
+          <p:nvPr/>
+        </p:nvSpPr>
+        <p:spPr>
+          <a:xfrm>
+            <a:off x="502920" y="3648456"/>
+            <a:ext cx="11201400" cy="658368"/>
+          </a:xfrm>
+          <a:prstGeom prst="rect">
+            <a:avLst/>
+          </a:prstGeom>
+          <a:solidFill>
+            <a:srgbClr val="F7F5F0"/>
+          </a:solidFill>
+          <a:ln>
+            <a:noFill/>
+          </a:ln>
+          <a:effectLst/>
+        </p:spPr>
+        <p:style>
+          <a:lnRef idx="1">
+            <a:schemeClr val="accent1"/>
+          </a:lnRef>
+          <a:fillRef idx="3">
+            <a:schemeClr val="accent1"/>
+          </a:fillRef>
+          <a:effectRef idx="2">
+            <a:schemeClr val="accent1"/>
+          </a:effectRef>
+          <a:fontRef idx="minor">
+            <a:schemeClr val="lt1"/>
+          </a:fontRef>
+        </p:style>
+        <p:txBody>
+          <a:bodyPr rtlCol="0" anchor="ctr"/>
+          <a:lstStyle/>
+          <a:p>
+            <a:pPr algn="ctr"/>
+          </a:p>
+        </p:txBody>
+      </p:sp>
+      <p:sp>
+        <p:nvSpPr>
+          <p:cNvPr id="18" name="TextBox 17"/>
+          <p:cNvSpPr txBox="1"/>
+          <p:nvPr/>
+        </p:nvSpPr>
+        <p:spPr>
+          <a:xfrm>
+            <a:off x="640080" y="3648456"/>
+            <a:ext cx="3200400" cy="658368"/>
+          </a:xfrm>
+          <a:prstGeom prst="rect">
+            <a:avLst/>
+          </a:prstGeom>
+          <a:noFill/>
+        </p:spPr>
+        <p:txBody>
+          <a:bodyPr wrap="square" anchor="ctr">
+            <a:spAutoFit/>
+          </a:bodyPr>
+          <a:lstStyle/>
+          <a:p>
+            <a:pPr algn="l">
+              <a:lnSpc>
+                <a:spcPct val="115000"/>
+              </a:lnSpc>
+            </a:pPr>
+            <a:r>
+              <a:rPr sz="1200" b="1" i="0">
+                <a:solidFill>
+                  <a:srgbClr val="55605D"/>
+                </a:solidFill>
+                <a:latin typeface="Calibri"/>
+              </a:rPr>
+              <a:t>Aggregate profit this round</a:t>
+            </a:r>
+          </a:p>
+        </p:txBody>
+      </p:sp>
+      <p:sp>
+        <p:nvSpPr>
+          <p:cNvPr id="19" name="TextBox 18"/>
+          <p:cNvSpPr txBox="1"/>
+          <p:nvPr/>
+        </p:nvSpPr>
+        <p:spPr>
+          <a:xfrm>
+            <a:off x="3840479" y="3648456"/>
+            <a:ext cx="3977639" cy="658368"/>
+          </a:xfrm>
+          <a:prstGeom prst="rect">
+            <a:avLst/>
+          </a:prstGeom>
+          <a:noFill/>
+        </p:spPr>
+        <p:txBody>
+          <a:bodyPr wrap="square" anchor="ctr">
+            <a:spAutoFit/>
+          </a:bodyPr>
+          <a:lstStyle/>
+          <a:p>
+            <a:pPr algn="ctr">
+              <a:lnSpc>
+                <a:spcPct val="115000"/>
+              </a:lnSpc>
+            </a:pPr>
+            <a:r>
+              <a:rPr sz="1300" b="0" i="0">
+                <a:solidFill>
+                  <a:srgbClr val="1F2A28"/>
+                </a:solidFill>
+                <a:latin typeface="Calibri"/>
+              </a:rPr>
+              <a:t>$2.06bn</a:t>
+            </a:r>
+          </a:p>
+        </p:txBody>
+      </p:sp>
+      <p:sp>
+        <p:nvSpPr>
+          <p:cNvPr id="20" name="TextBox 19"/>
+          <p:cNvSpPr txBox="1"/>
+          <p:nvPr/>
+        </p:nvSpPr>
+        <p:spPr>
+          <a:xfrm>
+            <a:off x="8092440" y="3648456"/>
+            <a:ext cx="3977639" cy="658368"/>
+          </a:xfrm>
+          <a:prstGeom prst="rect">
+            <a:avLst/>
+          </a:prstGeom>
+          <a:noFill/>
+        </p:spPr>
+        <p:txBody>
+          <a:bodyPr wrap="square" anchor="ctr">
+            <a:spAutoFit/>
+          </a:bodyPr>
+          <a:lstStyle/>
+          <a:p>
+            <a:pPr algn="ctr">
+              <a:lnSpc>
+                <a:spcPct val="115000"/>
+              </a:lnSpc>
+            </a:pPr>
+            <a:r>
+              <a:rPr sz="1300" b="0" i="0">
+                <a:solidFill>
+                  <a:srgbClr val="1F2A28"/>
+                </a:solidFill>
+                <a:latin typeface="Calibri"/>
+              </a:rPr>
+              <a:t>$593m</a:t>
+            </a:r>
+          </a:p>
+        </p:txBody>
+      </p:sp>
+      <p:sp>
+        <p:nvSpPr>
+          <p:cNvPr id="21" name="Rectangle 20"/>
+          <p:cNvSpPr/>
+          <p:nvPr/>
+        </p:nvSpPr>
+        <p:spPr>
+          <a:xfrm>
+            <a:off x="502920" y="4306824"/>
+            <a:ext cx="11201400" cy="658368"/>
+          </a:xfrm>
+          <a:prstGeom prst="rect">
+            <a:avLst/>
+          </a:prstGeom>
+          <a:solidFill>
+            <a:srgbClr val="FFFFFF"/>
+          </a:solidFill>
+          <a:ln>
+            <a:noFill/>
+          </a:ln>
+          <a:effectLst/>
+        </p:spPr>
+        <p:style>
+          <a:lnRef idx="1">
+            <a:schemeClr val="accent1"/>
+          </a:lnRef>
+          <a:fillRef idx="3">
+            <a:schemeClr val="accent1"/>
+          </a:fillRef>
+          <a:effectRef idx="2">
+            <a:schemeClr val="accent1"/>
+          </a:effectRef>
+          <a:fontRef idx="minor">
+            <a:schemeClr val="lt1"/>
+          </a:fontRef>
+        </p:style>
+        <p:txBody>
+          <a:bodyPr rtlCol="0" anchor="ctr"/>
+          <a:lstStyle/>
+          <a:p>
+            <a:pPr algn="ctr"/>
+          </a:p>
+        </p:txBody>
+      </p:sp>
+      <p:sp>
+        <p:nvSpPr>
+          <p:cNvPr id="22" name="TextBox 21"/>
+          <p:cNvSpPr txBox="1"/>
+          <p:nvPr/>
+        </p:nvSpPr>
+        <p:spPr>
+          <a:xfrm>
+            <a:off x="640080" y="4306824"/>
+            <a:ext cx="3200400" cy="658368"/>
+          </a:xfrm>
+          <a:prstGeom prst="rect">
+            <a:avLst/>
+          </a:prstGeom>
+          <a:noFill/>
+        </p:spPr>
+        <p:txBody>
+          <a:bodyPr wrap="square" anchor="ctr">
+            <a:spAutoFit/>
+          </a:bodyPr>
+          <a:lstStyle/>
+          <a:p>
+            <a:pPr algn="l">
+              <a:lnSpc>
+                <a:spcPct val="115000"/>
+              </a:lnSpc>
+            </a:pPr>
+            <a:r>
+              <a:rPr sz="1200" b="1" i="0">
+                <a:solidFill>
+                  <a:srgbClr val="55605D"/>
+                </a:solidFill>
+                <a:latin typeface="Calibri"/>
+              </a:rPr>
+              <a:t>Average TSR</a:t>
+            </a:r>
+          </a:p>
+        </p:txBody>
+      </p:sp>
+      <p:sp>
+        <p:nvSpPr>
+          <p:cNvPr id="23" name="TextBox 22"/>
+          <p:cNvSpPr txBox="1"/>
+          <p:nvPr/>
+        </p:nvSpPr>
+        <p:spPr>
+          <a:xfrm>
+            <a:off x="3840479" y="4306824"/>
+            <a:ext cx="3977639" cy="658368"/>
+          </a:xfrm>
+          <a:prstGeom prst="rect">
+            <a:avLst/>
+          </a:prstGeom>
+          <a:noFill/>
+        </p:spPr>
+        <p:txBody>
+          <a:bodyPr wrap="square" anchor="ctr">
+            <a:spAutoFit/>
+          </a:bodyPr>
+          <a:lstStyle/>
+          <a:p>
+            <a:pPr algn="ctr">
+              <a:lnSpc>
+                <a:spcPct val="115000"/>
+              </a:lnSpc>
+            </a:pPr>
+            <a:r>
+              <a:rPr sz="1300" b="0" i="0">
+                <a:solidFill>
+                  <a:srgbClr val="1F2A28"/>
+                </a:solidFill>
+                <a:latin typeface="Calibri"/>
+              </a:rPr>
+              <a:t>+4.1%</a:t>
+            </a:r>
+          </a:p>
+        </p:txBody>
+      </p:sp>
+      <p:sp>
+        <p:nvSpPr>
+          <p:cNvPr id="24" name="TextBox 23"/>
+          <p:cNvSpPr txBox="1"/>
+          <p:nvPr/>
+        </p:nvSpPr>
+        <p:spPr>
+          <a:xfrm>
+            <a:off x="8092440" y="4306824"/>
+            <a:ext cx="3977639" cy="658368"/>
+          </a:xfrm>
+          <a:prstGeom prst="rect">
+            <a:avLst/>
+          </a:prstGeom>
+          <a:noFill/>
+        </p:spPr>
+        <p:txBody>
+          <a:bodyPr wrap="square" anchor="ctr">
+            <a:spAutoFit/>
+          </a:bodyPr>
+          <a:lstStyle/>
+          <a:p>
+            <a:pPr algn="ctr">
+              <a:lnSpc>
+                <a:spcPct val="115000"/>
+              </a:lnSpc>
+            </a:pPr>
+            <a:r>
+              <a:rPr sz="1300" b="0" i="0">
+                <a:solidFill>
+                  <a:srgbClr val="1F2A28"/>
+                </a:solidFill>
+                <a:latin typeface="Calibri"/>
+              </a:rPr>
+              <a:t>+2.5%</a:t>
+            </a:r>
+          </a:p>
+        </p:txBody>
+      </p:sp>
+      <p:sp>
+        <p:nvSpPr>
+          <p:cNvPr id="25" name="Rectangle 24"/>
+          <p:cNvSpPr/>
+          <p:nvPr/>
+        </p:nvSpPr>
+        <p:spPr>
+          <a:xfrm>
+            <a:off x="502920" y="4965192"/>
+            <a:ext cx="11201400" cy="658368"/>
+          </a:xfrm>
+          <a:prstGeom prst="rect">
+            <a:avLst/>
+          </a:prstGeom>
+          <a:solidFill>
+            <a:srgbClr val="F7F5F0"/>
+          </a:solidFill>
+          <a:ln>
+            <a:noFill/>
+          </a:ln>
+          <a:effectLst/>
+        </p:spPr>
+        <p:style>
+          <a:lnRef idx="1">
+            <a:schemeClr val="accent1"/>
+          </a:lnRef>
+          <a:fillRef idx="3">
+            <a:schemeClr val="accent1"/>
+          </a:fillRef>
+          <a:effectRef idx="2">
+            <a:schemeClr val="accent1"/>
+          </a:effectRef>
+          <a:fontRef idx="minor">
+            <a:schemeClr val="lt1"/>
+          </a:fontRef>
+        </p:style>
+        <p:txBody>
+          <a:bodyPr rtlCol="0" anchor="ctr"/>
+          <a:lstStyle/>
+          <a:p>
+            <a:pPr algn="ctr"/>
+          </a:p>
+        </p:txBody>
+      </p:sp>
+      <p:sp>
+        <p:nvSpPr>
+          <p:cNvPr id="26" name="TextBox 25"/>
+          <p:cNvSpPr txBox="1"/>
+          <p:nvPr/>
+        </p:nvSpPr>
+        <p:spPr>
+          <a:xfrm>
+            <a:off x="640080" y="4965192"/>
+            <a:ext cx="3200400" cy="658368"/>
+          </a:xfrm>
+          <a:prstGeom prst="rect">
+            <a:avLst/>
+          </a:prstGeom>
+          <a:noFill/>
+        </p:spPr>
+        <p:txBody>
+          <a:bodyPr wrap="square" anchor="ctr">
+            <a:spAutoFit/>
+          </a:bodyPr>
+          <a:lstStyle/>
+          <a:p>
+            <a:pPr algn="l">
+              <a:lnSpc>
+                <a:spcPct val="115000"/>
+              </a:lnSpc>
+            </a:pPr>
+            <a:r>
+              <a:rPr sz="1200" b="1" i="0">
+                <a:solidFill>
+                  <a:srgbClr val="55605D"/>
+                </a:solidFill>
+                <a:latin typeface="Calibri"/>
+              </a:rPr>
+              <a:t>Biggest riser</a:t>
+            </a:r>
+          </a:p>
+        </p:txBody>
+      </p:sp>
+      <p:sp>
+        <p:nvSpPr>
+          <p:cNvPr id="27" name="TextBox 26"/>
+          <p:cNvSpPr txBox="1"/>
+          <p:nvPr/>
+        </p:nvSpPr>
+        <p:spPr>
+          <a:xfrm>
+            <a:off x="3840479" y="4965192"/>
+            <a:ext cx="3977639" cy="658368"/>
+          </a:xfrm>
+          <a:prstGeom prst="rect">
+            <a:avLst/>
+          </a:prstGeom>
+          <a:noFill/>
+        </p:spPr>
+        <p:txBody>
+          <a:bodyPr wrap="square" anchor="ctr">
+            <a:spAutoFit/>
+          </a:bodyPr>
+          <a:lstStyle/>
+          <a:p>
+            <a:pPr algn="ctr">
+              <a:lnSpc>
+                <a:spcPct val="115000"/>
+              </a:lnSpc>
+            </a:pPr>
+            <a:r>
+              <a:rPr sz="1300" b="0" i="0">
+                <a:solidFill>
+                  <a:srgbClr val="1F2A28"/>
+                </a:solidFill>
+                <a:latin typeface="Calibri"/>
+              </a:rPr>
+              <a:t>Blue (6→5)</a:t>
+            </a:r>
+          </a:p>
+        </p:txBody>
+      </p:sp>
+      <p:sp>
+        <p:nvSpPr>
+          <p:cNvPr id="28" name="TextBox 27"/>
+          <p:cNvSpPr txBox="1"/>
+          <p:nvPr/>
+        </p:nvSpPr>
+        <p:spPr>
+          <a:xfrm>
+            <a:off x="8092440" y="4965192"/>
+            <a:ext cx="3977639" cy="658368"/>
+          </a:xfrm>
+          <a:prstGeom prst="rect">
+            <a:avLst/>
+          </a:prstGeom>
+          <a:noFill/>
+        </p:spPr>
+        <p:txBody>
+          <a:bodyPr wrap="square" anchor="ctr">
+            <a:spAutoFit/>
+          </a:bodyPr>
+          <a:lstStyle/>
+          <a:p>
+            <a:pPr algn="ctr">
+              <a:lnSpc>
+                <a:spcPct val="115000"/>
+              </a:lnSpc>
+            </a:pPr>
+            <a:r>
+              <a:rPr sz="1300" b="0" i="0">
+                <a:solidFill>
+                  <a:srgbClr val="1F2A28"/>
+                </a:solidFill>
+                <a:latin typeface="Calibri"/>
+              </a:rPr>
+              <a:t>Grey (1→1)</a:t>
+            </a:r>
+          </a:p>
+        </p:txBody>
+      </p:sp>
+      <p:sp>
+        <p:nvSpPr>
+          <p:cNvPr id="29" name="Rectangle 28"/>
+          <p:cNvSpPr/>
+          <p:nvPr/>
+        </p:nvSpPr>
+        <p:spPr>
+          <a:xfrm>
+            <a:off x="502920" y="5623560"/>
+            <a:ext cx="11201400" cy="658368"/>
+          </a:xfrm>
+          <a:prstGeom prst="rect">
+            <a:avLst/>
+          </a:prstGeom>
+          <a:solidFill>
+            <a:srgbClr val="FFFFFF"/>
+          </a:solidFill>
+          <a:ln>
+            <a:noFill/>
+          </a:ln>
+          <a:effectLst/>
+        </p:spPr>
+        <p:style>
+          <a:lnRef idx="1">
+            <a:schemeClr val="accent1"/>
+          </a:lnRef>
+          <a:fillRef idx="3">
+            <a:schemeClr val="accent1"/>
+          </a:fillRef>
+          <a:effectRef idx="2">
+            <a:schemeClr val="accent1"/>
+          </a:effectRef>
+          <a:fontRef idx="minor">
+            <a:schemeClr val="lt1"/>
+          </a:fontRef>
+        </p:style>
+        <p:txBody>
+          <a:bodyPr rtlCol="0" anchor="ctr"/>
+          <a:lstStyle/>
+          <a:p>
+            <a:pPr algn="ctr"/>
+          </a:p>
+        </p:txBody>
+      </p:sp>
+      <p:sp>
+        <p:nvSpPr>
+          <p:cNvPr id="30" name="TextBox 29"/>
+          <p:cNvSpPr txBox="1"/>
+          <p:nvPr/>
+        </p:nvSpPr>
+        <p:spPr>
+          <a:xfrm>
+            <a:off x="640080" y="5623560"/>
+            <a:ext cx="3200400" cy="658368"/>
+          </a:xfrm>
+          <a:prstGeom prst="rect">
+            <a:avLst/>
+          </a:prstGeom>
+          <a:noFill/>
+        </p:spPr>
+        <p:txBody>
+          <a:bodyPr wrap="square" anchor="ctr">
+            <a:spAutoFit/>
+          </a:bodyPr>
+          <a:lstStyle/>
+          <a:p>
+            <a:pPr algn="l">
+              <a:lnSpc>
+                <a:spcPct val="115000"/>
+              </a:lnSpc>
+            </a:pPr>
+            <a:r>
+              <a:rPr sz="1200" b="1" i="0">
+                <a:solidFill>
+                  <a:srgbClr val="55605D"/>
+                </a:solidFill>
+                <a:latin typeface="Calibri"/>
+              </a:rPr>
+              <a:t>Biggest faller</a:t>
+            </a:r>
+          </a:p>
+        </p:txBody>
+      </p:sp>
+      <p:sp>
+        <p:nvSpPr>
+          <p:cNvPr id="31" name="TextBox 30"/>
+          <p:cNvSpPr txBox="1"/>
+          <p:nvPr/>
+        </p:nvSpPr>
+        <p:spPr>
+          <a:xfrm>
+            <a:off x="3840479" y="5623560"/>
+            <a:ext cx="3977639" cy="658368"/>
+          </a:xfrm>
+          <a:prstGeom prst="rect">
+            <a:avLst/>
+          </a:prstGeom>
+          <a:noFill/>
+        </p:spPr>
+        <p:txBody>
+          <a:bodyPr wrap="square" anchor="ctr">
+            <a:spAutoFit/>
+          </a:bodyPr>
+          <a:lstStyle/>
+          <a:p>
+            <a:pPr algn="ctr">
+              <a:lnSpc>
+                <a:spcPct val="115000"/>
+              </a:lnSpc>
+            </a:pPr>
+            <a:r>
+              <a:rPr sz="1300" b="0" i="0">
+                <a:solidFill>
+                  <a:srgbClr val="1F2A28"/>
+                </a:solidFill>
+                <a:latin typeface="Calibri"/>
+              </a:rPr>
+              <a:t>Grey (5→6)</a:t>
+            </a:r>
+          </a:p>
+        </p:txBody>
+      </p:sp>
+      <p:sp>
+        <p:nvSpPr>
+          <p:cNvPr id="32" name="TextBox 31"/>
+          <p:cNvSpPr txBox="1"/>
+          <p:nvPr/>
+        </p:nvSpPr>
+        <p:spPr>
+          <a:xfrm>
+            <a:off x="8092440" y="5623560"/>
+            <a:ext cx="3977639" cy="658368"/>
+          </a:xfrm>
+          <a:prstGeom prst="rect">
+            <a:avLst/>
+          </a:prstGeom>
+          <a:noFill/>
+        </p:spPr>
+        <p:txBody>
+          <a:bodyPr wrap="square" anchor="ctr">
+            <a:spAutoFit/>
+          </a:bodyPr>
+          <a:lstStyle/>
+          <a:p>
+            <a:pPr algn="ctr">
+              <a:lnSpc>
+                <a:spcPct val="115000"/>
+              </a:lnSpc>
+            </a:pPr>
+            <a:r>
+              <a:rPr sz="1300" b="0" i="0">
+                <a:solidFill>
+                  <a:srgbClr val="1F2A28"/>
+                </a:solidFill>
+                <a:latin typeface="Calibri"/>
+              </a:rPr>
+              <a:t>Grey (1→1)</a:t>
+            </a:r>
+          </a:p>
+        </p:txBody>
+      </p:sp>
+      <p:sp>
+        <p:nvSpPr>
+          <p:cNvPr id="33" name="Rectangle 32"/>
+          <p:cNvSpPr/>
+          <p:nvPr/>
+        </p:nvSpPr>
+        <p:spPr>
+          <a:xfrm>
+            <a:off x="0" y="6812280"/>
+            <a:ext cx="12191695" cy="45720"/>
+          </a:xfrm>
+          <a:prstGeom prst="rect">
+            <a:avLst/>
+          </a:prstGeom>
+          <a:solidFill>
+            <a:srgbClr val="78A79B"/>
+          </a:solidFill>
+          <a:ln>
+            <a:noFill/>
+          </a:ln>
+          <a:effectLst/>
+        </p:spPr>
+        <p:style>
+          <a:lnRef idx="1">
+            <a:schemeClr val="accent1"/>
+          </a:lnRef>
+          <a:fillRef idx="3">
+            <a:schemeClr val="accent1"/>
+          </a:fillRef>
+          <a:effectRef idx="2">
+            <a:schemeClr val="accent1"/>
+          </a:effectRef>
+          <a:fontRef idx="minor">
+            <a:schemeClr val="lt1"/>
+          </a:fontRef>
+        </p:style>
+        <p:txBody>
+          <a:bodyPr rtlCol="0" anchor="ctr"/>
+          <a:lstStyle/>
+          <a:p>
+            <a:pPr algn="ctr"/>
+          </a:p>
+        </p:txBody>
+      </p:sp>
+      <p:sp>
+        <p:nvSpPr>
+          <p:cNvPr id="34" name="TextBox 33"/>
+          <p:cNvSpPr txBox="1"/>
+          <p:nvPr/>
+        </p:nvSpPr>
+        <p:spPr>
+          <a:xfrm>
+            <a:off x="365760" y="6473952"/>
+            <a:ext cx="7315200" cy="274320"/>
+          </a:xfrm>
+          <a:prstGeom prst="rect">
+            <a:avLst/>
+          </a:prstGeom>
+          <a:noFill/>
+        </p:spPr>
+        <p:txBody>
+          <a:bodyPr wrap="square">
+            <a:spAutoFit/>
+          </a:bodyPr>
+          <a:lstStyle/>
+          <a:p>
+            <a:pPr algn="l">
+              <a:lnSpc>
+                <a:spcPct val="115000"/>
+              </a:lnSpc>
+            </a:pPr>
+            <a:r>
               <a:rPr sz="1000" b="0" i="0">
                 <a:solidFill>
-                  <a:srgbClr val="4A5552"/>
+                  <a:srgbClr val="55605D"/>
                 </a:solidFill>
                 <a:latin typeface="Calibri"/>
               </a:rPr>
@@ -4410,7 +5449,7 @@
       </p:sp>
       <p:sp>
         <p:nvSpPr>
-          <p:cNvPr id="7" name="TextBox 6"/>
+          <p:cNvPr id="35" name="TextBox 34"/>
           <p:cNvSpPr txBox="1"/>
           <p:nvPr/>
         </p:nvSpPr>
@@ -4438,7 +5477,7 @@
             <a:r>
               <a:rPr sz="1000" b="0" i="0">
                 <a:solidFill>
-                  <a:srgbClr val="4A5552"/>
+                  <a:srgbClr val="55605D"/>
                 </a:solidFill>
                 <a:latin typeface="Calibri"/>
               </a:rPr>
@@ -4458,6 +5497,14 @@
 <file path=ppt/slides/slide3.xml><?xml version="1.0" encoding="utf-8"?>
 <p:sld xmlns:a="http://schemas.openxmlformats.org/drawingml/2006/main" xmlns:p="http://schemas.openxmlformats.org/presentationml/2006/main" xmlns:r="http://schemas.openxmlformats.org/officeDocument/2006/relationships">
   <p:cSld>
+    <p:bg>
+      <p:bgPr>
+        <a:solidFill>
+          <a:srgbClr val="F7F5F0"/>
+        </a:solidFill>
+        <a:effectLst/>
+      </p:bgPr>
+    </p:bg>
     <p:spTree>
       <p:nvGrpSpPr>
         <p:cNvPr id="1" name=""/>
@@ -4467,191 +5514,14 @@
       <p:grpSpPr/>
       <p:sp>
         <p:nvSpPr>
-          <p:cNvPr id="2" name="TextBox 1"/>
-          <p:cNvSpPr txBox="1"/>
-          <p:nvPr/>
-        </p:nvSpPr>
-        <p:spPr>
-          <a:xfrm>
-            <a:off x="502920" y="320040"/>
-            <a:ext cx="10058400" cy="320040"/>
-          </a:xfrm>
-          <a:prstGeom prst="rect">
-            <a:avLst/>
-          </a:prstGeom>
-          <a:noFill/>
-        </p:spPr>
-        <p:txBody>
-          <a:bodyPr wrap="square">
-            <a:spAutoFit/>
-          </a:bodyPr>
-          <a:lstStyle/>
-          <a:p>
-            <a:pPr algn="l">
-              <a:lnSpc>
-                <a:spcPct val="115000"/>
-              </a:lnSpc>
-            </a:pPr>
-            <a:r>
-              <a:rPr sz="1100" b="1" i="0">
-                <a:solidFill>
-                  <a:srgbClr val="78A79B"/>
-                </a:solidFill>
-                <a:latin typeface="Calibri"/>
-              </a:rPr>
-              <a:t>02 / LEADERSHIP PATTERNS</a:t>
-            </a:r>
-          </a:p>
-        </p:txBody>
-      </p:sp>
-      <p:sp>
-        <p:nvSpPr>
-          <p:cNvPr id="3" name="TextBox 2"/>
-          <p:cNvSpPr txBox="1"/>
-          <p:nvPr/>
-        </p:nvSpPr>
-        <p:spPr>
-          <a:xfrm>
-            <a:off x="502920" y="621792"/>
-            <a:ext cx="11155680" cy="685800"/>
-          </a:xfrm>
-          <a:prstGeom prst="rect">
-            <a:avLst/>
-          </a:prstGeom>
-          <a:noFill/>
-        </p:spPr>
-        <p:txBody>
-          <a:bodyPr wrap="square">
-            <a:spAutoFit/>
-          </a:bodyPr>
-          <a:lstStyle/>
-          <a:p>
-            <a:pPr algn="l">
-              <a:lnSpc>
-                <a:spcPct val="115000"/>
-              </a:lnSpc>
-            </a:pPr>
-            <a:r>
-              <a:rPr sz="2400" b="1" i="0">
-                <a:solidFill>
-                  <a:srgbClr val="1F2A28"/>
-                </a:solidFill>
-                <a:latin typeface="Calibri"/>
-              </a:rPr>
-              <a:t>Both universes kept the same leader from Round 5.</a:t>
-            </a:r>
-          </a:p>
-        </p:txBody>
-      </p:sp>
-      <p:sp>
-        <p:nvSpPr>
-          <p:cNvPr id="4" name="TextBox 3"/>
-          <p:cNvSpPr txBox="1"/>
-          <p:nvPr/>
-        </p:nvSpPr>
-        <p:spPr>
-          <a:xfrm>
-            <a:off x="548640" y="1828800"/>
-            <a:ext cx="10789920" cy="2377440"/>
-          </a:xfrm>
-          <a:prstGeom prst="rect">
-            <a:avLst/>
-          </a:prstGeom>
-          <a:noFill/>
-        </p:spPr>
-        <p:txBody>
-          <a:bodyPr wrap="square">
-            <a:spAutoFit/>
-          </a:bodyPr>
-          <a:lstStyle/>
-          <a:p>
-            <a:pPr>
-              <a:lnSpc>
-                <a:spcPct val="112000"/>
-              </a:lnSpc>
-              <a:spcAft>
-                <a:spcPts val="864"/>
-              </a:spcAft>
-            </a:pPr>
-            <a:r>
-              <a:rPr sz="1500" b="0" i="0">
-                <a:solidFill>
-                  <a:srgbClr val="1F2A28"/>
-                </a:solidFill>
-                <a:latin typeface="Calibri"/>
-              </a:rPr>
-              <a:t>•  Universe 1: Orange holds the lead it already had in Round 5.</a:t>
-            </a:r>
-          </a:p>
-          <a:p>
-            <a:pPr>
-              <a:lnSpc>
-                <a:spcPct val="112000"/>
-              </a:lnSpc>
-              <a:spcAft>
-                <a:spcPts val="864"/>
-              </a:spcAft>
-            </a:pPr>
-            <a:r>
-              <a:rPr sz="1500" b="0" i="0">
-                <a:solidFill>
-                  <a:srgbClr val="1F2A28"/>
-                </a:solidFill>
-                <a:latin typeface="Calibri"/>
-              </a:rPr>
-              <a:t>•  Universe 2: Grey holds the lead it already had in Round 5.</a:t>
-            </a:r>
-          </a:p>
-          <a:p>
-            <a:pPr>
-              <a:lnSpc>
-                <a:spcPct val="112000"/>
-              </a:lnSpc>
-              <a:spcAft>
-                <a:spcPts val="864"/>
-              </a:spcAft>
-            </a:pPr>
-            <a:r>
-              <a:rPr sz="1500" b="0" i="0">
-                <a:solidFill>
-                  <a:srgbClr val="1F2A28"/>
-                </a:solidFill>
-                <a:latin typeface="Calibri"/>
-              </a:rPr>
-              <a:t>•  Universe 1 closed the round with +4.1% average TSR against Universe 2's +2.5%.</a:t>
-            </a:r>
-          </a:p>
-          <a:p>
-            <a:pPr>
-              <a:lnSpc>
-                <a:spcPct val="112000"/>
-              </a:lnSpc>
-              <a:spcAft>
-                <a:spcPts val="864"/>
-              </a:spcAft>
-            </a:pPr>
-            <a:r>
-              <a:rPr sz="1500" b="0" i="0">
-                <a:solidFill>
-                  <a:srgbClr val="1F2A28"/>
-                </a:solidFill>
-                <a:latin typeface="Calibri"/>
-              </a:rPr>
-              <a:t>•  Universe 1's aggregate profit this round was $2.06bn, versus Universe 2's $593m.</a:t>
-            </a:r>
-          </a:p>
-        </p:txBody>
-      </p:sp>
-      <p:sp>
-        <p:nvSpPr>
-          <p:cNvPr id="5" name="Rectangle 4"/>
+          <p:cNvPr id="2" name="Rectangle 1"/>
           <p:cNvSpPr/>
           <p:nvPr/>
         </p:nvSpPr>
         <p:spPr>
           <a:xfrm>
-            <a:off x="0" y="6812280"/>
-            <a:ext cx="12191695" cy="45720"/>
+            <a:off x="502920" y="384048"/>
+            <a:ext cx="320040" cy="54864"/>
           </a:xfrm>
           <a:prstGeom prst="rect">
             <a:avLst/>
@@ -4688,14 +5558,14 @@
       </p:sp>
       <p:sp>
         <p:nvSpPr>
-          <p:cNvPr id="6" name="TextBox 5"/>
+          <p:cNvPr id="3" name="TextBox 2"/>
           <p:cNvSpPr txBox="1"/>
           <p:nvPr/>
         </p:nvSpPr>
         <p:spPr>
           <a:xfrm>
-            <a:off x="365760" y="6473952"/>
-            <a:ext cx="7315200" cy="274320"/>
+            <a:off x="502920" y="475488"/>
+            <a:ext cx="10058400" cy="292608"/>
           </a:xfrm>
           <a:prstGeom prst="rect">
             <a:avLst/>
@@ -4714,9 +5584,1063 @@
               </a:lnSpc>
             </a:pPr>
             <a:r>
+              <a:rPr sz="1100" b="1" i="0">
+                <a:solidFill>
+                  <a:srgbClr val="78A79B"/>
+                </a:solidFill>
+                <a:latin typeface="Calibri"/>
+              </a:rPr>
+              <a:t>02 / LEADERSHIP PATTERNS</a:t>
+            </a:r>
+          </a:p>
+        </p:txBody>
+      </p:sp>
+      <p:sp>
+        <p:nvSpPr>
+          <p:cNvPr id="4" name="TextBox 3"/>
+          <p:cNvSpPr txBox="1"/>
+          <p:nvPr/>
+        </p:nvSpPr>
+        <p:spPr>
+          <a:xfrm>
+            <a:off x="502920" y="758952"/>
+            <a:ext cx="11155680" cy="658368"/>
+          </a:xfrm>
+          <a:prstGeom prst="rect">
+            <a:avLst/>
+          </a:prstGeom>
+          <a:noFill/>
+        </p:spPr>
+        <p:txBody>
+          <a:bodyPr wrap="square">
+            <a:spAutoFit/>
+          </a:bodyPr>
+          <a:lstStyle/>
+          <a:p>
+            <a:pPr algn="l">
+              <a:lnSpc>
+                <a:spcPct val="115000"/>
+              </a:lnSpc>
+            </a:pPr>
+            <a:r>
+              <a:rPr sz="2500" b="1" i="0">
+                <a:solidFill>
+                  <a:srgbClr val="1F2A28"/>
+                </a:solidFill>
+                <a:latin typeface="Calibri"/>
+              </a:rPr>
+              <a:t>Both universes kept the same leader from Round 5.</a:t>
+            </a:r>
+          </a:p>
+        </p:txBody>
+      </p:sp>
+      <p:sp>
+        <p:nvSpPr>
+          <p:cNvPr id="5" name="Rounded Rectangle 4"/>
+          <p:cNvSpPr/>
+          <p:nvPr/>
+        </p:nvSpPr>
+        <p:spPr>
+          <a:xfrm>
+            <a:off x="548640" y="1920240"/>
+            <a:ext cx="5394960" cy="1828800"/>
+          </a:xfrm>
+          <a:prstGeom prst="roundRect">
+            <a:avLst>
+              <a:gd name="adj" fmla="val 8000"/>
+            </a:avLst>
+          </a:prstGeom>
+          <a:solidFill>
+            <a:srgbClr val="FCFBF8"/>
+          </a:solidFill>
+          <a:ln w="9525">
+            <a:solidFill>
+              <a:srgbClr val="C3D8C5"/>
+            </a:solidFill>
+          </a:ln>
+          <a:effectLst/>
+        </p:spPr>
+        <p:style>
+          <a:lnRef idx="1">
+            <a:schemeClr val="accent1"/>
+          </a:lnRef>
+          <a:fillRef idx="3">
+            <a:schemeClr val="accent1"/>
+          </a:fillRef>
+          <a:effectRef idx="2">
+            <a:schemeClr val="accent1"/>
+          </a:effectRef>
+          <a:fontRef idx="minor">
+            <a:schemeClr val="lt1"/>
+          </a:fontRef>
+        </p:style>
+        <p:txBody>
+          <a:bodyPr rtlCol="0" anchor="ctr"/>
+          <a:lstStyle/>
+          <a:p>
+            <a:pPr algn="ctr"/>
+          </a:p>
+        </p:txBody>
+      </p:sp>
+      <p:sp>
+        <p:nvSpPr>
+          <p:cNvPr id="6" name="TextBox 5"/>
+          <p:cNvSpPr txBox="1"/>
+          <p:nvPr/>
+        </p:nvSpPr>
+        <p:spPr>
+          <a:xfrm>
+            <a:off x="777240" y="2103120"/>
+            <a:ext cx="4937760" cy="320040"/>
+          </a:xfrm>
+          <a:prstGeom prst="rect">
+            <a:avLst/>
+          </a:prstGeom>
+          <a:noFill/>
+        </p:spPr>
+        <p:txBody>
+          <a:bodyPr wrap="square">
+            <a:spAutoFit/>
+          </a:bodyPr>
+          <a:lstStyle/>
+          <a:p>
+            <a:pPr algn="l">
+              <a:lnSpc>
+                <a:spcPct val="115000"/>
+              </a:lnSpc>
+            </a:pPr>
+            <a:r>
+              <a:rPr sz="1100" b="1" i="0">
+                <a:solidFill>
+                  <a:srgbClr val="78A79B"/>
+                </a:solidFill>
+                <a:latin typeface="Calibri"/>
+              </a:rPr>
+              <a:t>UNIVERSE 1</a:t>
+            </a:r>
+          </a:p>
+        </p:txBody>
+      </p:sp>
+      <p:sp>
+        <p:nvSpPr>
+          <p:cNvPr id="7" name="TextBox 6"/>
+          <p:cNvSpPr txBox="1"/>
+          <p:nvPr/>
+        </p:nvSpPr>
+        <p:spPr>
+          <a:xfrm>
+            <a:off x="777240" y="2468880"/>
+            <a:ext cx="4937760" cy="1188720"/>
+          </a:xfrm>
+          <a:prstGeom prst="rect">
+            <a:avLst/>
+          </a:prstGeom>
+          <a:noFill/>
+        </p:spPr>
+        <p:txBody>
+          <a:bodyPr wrap="square">
+            <a:spAutoFit/>
+          </a:bodyPr>
+          <a:lstStyle/>
+          <a:p>
+            <a:pPr algn="l">
+              <a:lnSpc>
+                <a:spcPct val="125000"/>
+              </a:lnSpc>
+            </a:pPr>
+            <a:r>
+              <a:rPr sz="1400" b="0" i="0">
+                <a:solidFill>
+                  <a:srgbClr val="1F2A28"/>
+                </a:solidFill>
+                <a:latin typeface="Calibri"/>
+              </a:rPr>
+              <a:t>Orange holds the lead it already had in Round 5.</a:t>
+            </a:r>
+          </a:p>
+        </p:txBody>
+      </p:sp>
+      <p:sp>
+        <p:nvSpPr>
+          <p:cNvPr id="8" name="Rounded Rectangle 7"/>
+          <p:cNvSpPr/>
+          <p:nvPr/>
+        </p:nvSpPr>
+        <p:spPr>
+          <a:xfrm>
+            <a:off x="6217920" y="1920240"/>
+            <a:ext cx="5394960" cy="1828800"/>
+          </a:xfrm>
+          <a:prstGeom prst="roundRect">
+            <a:avLst>
+              <a:gd name="adj" fmla="val 8000"/>
+            </a:avLst>
+          </a:prstGeom>
+          <a:solidFill>
+            <a:srgbClr val="FCFBF8"/>
+          </a:solidFill>
+          <a:ln w="9525">
+            <a:solidFill>
+              <a:srgbClr val="C3D8C5"/>
+            </a:solidFill>
+          </a:ln>
+          <a:effectLst/>
+        </p:spPr>
+        <p:style>
+          <a:lnRef idx="1">
+            <a:schemeClr val="accent1"/>
+          </a:lnRef>
+          <a:fillRef idx="3">
+            <a:schemeClr val="accent1"/>
+          </a:fillRef>
+          <a:effectRef idx="2">
+            <a:schemeClr val="accent1"/>
+          </a:effectRef>
+          <a:fontRef idx="minor">
+            <a:schemeClr val="lt1"/>
+          </a:fontRef>
+        </p:style>
+        <p:txBody>
+          <a:bodyPr rtlCol="0" anchor="ctr"/>
+          <a:lstStyle/>
+          <a:p>
+            <a:pPr algn="ctr"/>
+          </a:p>
+        </p:txBody>
+      </p:sp>
+      <p:sp>
+        <p:nvSpPr>
+          <p:cNvPr id="9" name="TextBox 8"/>
+          <p:cNvSpPr txBox="1"/>
+          <p:nvPr/>
+        </p:nvSpPr>
+        <p:spPr>
+          <a:xfrm>
+            <a:off x="6446520" y="2103120"/>
+            <a:ext cx="4937760" cy="320040"/>
+          </a:xfrm>
+          <a:prstGeom prst="rect">
+            <a:avLst/>
+          </a:prstGeom>
+          <a:noFill/>
+        </p:spPr>
+        <p:txBody>
+          <a:bodyPr wrap="square">
+            <a:spAutoFit/>
+          </a:bodyPr>
+          <a:lstStyle/>
+          <a:p>
+            <a:pPr algn="l">
+              <a:lnSpc>
+                <a:spcPct val="115000"/>
+              </a:lnSpc>
+            </a:pPr>
+            <a:r>
+              <a:rPr sz="1100" b="1" i="0">
+                <a:solidFill>
+                  <a:srgbClr val="78A79B"/>
+                </a:solidFill>
+                <a:latin typeface="Calibri"/>
+              </a:rPr>
+              <a:t>UNIVERSE 2</a:t>
+            </a:r>
+          </a:p>
+        </p:txBody>
+      </p:sp>
+      <p:sp>
+        <p:nvSpPr>
+          <p:cNvPr id="10" name="TextBox 9"/>
+          <p:cNvSpPr txBox="1"/>
+          <p:nvPr/>
+        </p:nvSpPr>
+        <p:spPr>
+          <a:xfrm>
+            <a:off x="6446520" y="2468880"/>
+            <a:ext cx="4937760" cy="1188720"/>
+          </a:xfrm>
+          <a:prstGeom prst="rect">
+            <a:avLst/>
+          </a:prstGeom>
+          <a:noFill/>
+        </p:spPr>
+        <p:txBody>
+          <a:bodyPr wrap="square">
+            <a:spAutoFit/>
+          </a:bodyPr>
+          <a:lstStyle/>
+          <a:p>
+            <a:pPr algn="l">
+              <a:lnSpc>
+                <a:spcPct val="125000"/>
+              </a:lnSpc>
+            </a:pPr>
+            <a:r>
+              <a:rPr sz="1400" b="0" i="0">
+                <a:solidFill>
+                  <a:srgbClr val="1F2A28"/>
+                </a:solidFill>
+                <a:latin typeface="Calibri"/>
+              </a:rPr>
+              <a:t>Grey holds the lead it already had in Round 5.</a:t>
+            </a:r>
+          </a:p>
+        </p:txBody>
+      </p:sp>
+      <p:sp>
+        <p:nvSpPr>
+          <p:cNvPr id="11" name="Rounded Rectangle 10"/>
+          <p:cNvSpPr/>
+          <p:nvPr/>
+        </p:nvSpPr>
+        <p:spPr>
+          <a:xfrm>
+            <a:off x="548640" y="3977639"/>
+            <a:ext cx="2615184" cy="1234440"/>
+          </a:xfrm>
+          <a:prstGeom prst="roundRect">
+            <a:avLst>
+              <a:gd name="adj" fmla="val 10000"/>
+            </a:avLst>
+          </a:prstGeom>
+          <a:solidFill>
+            <a:srgbClr val="FCFBF8"/>
+          </a:solidFill>
+          <a:ln w="9525">
+            <a:solidFill>
+              <a:srgbClr val="C3D8C5"/>
+            </a:solidFill>
+          </a:ln>
+          <a:effectLst/>
+        </p:spPr>
+        <p:style>
+          <a:lnRef idx="1">
+            <a:schemeClr val="accent1"/>
+          </a:lnRef>
+          <a:fillRef idx="3">
+            <a:schemeClr val="accent1"/>
+          </a:fillRef>
+          <a:effectRef idx="2">
+            <a:schemeClr val="accent1"/>
+          </a:effectRef>
+          <a:fontRef idx="minor">
+            <a:schemeClr val="lt1"/>
+          </a:fontRef>
+        </p:style>
+        <p:txBody>
+          <a:bodyPr rtlCol="0" anchor="ctr"/>
+          <a:lstStyle/>
+          <a:p>
+            <a:pPr algn="ctr"/>
+          </a:p>
+        </p:txBody>
+      </p:sp>
+      <p:sp>
+        <p:nvSpPr>
+          <p:cNvPr id="12" name="Rectangle 11"/>
+          <p:cNvSpPr/>
+          <p:nvPr/>
+        </p:nvSpPr>
+        <p:spPr>
+          <a:xfrm>
+            <a:off x="548640" y="3977639"/>
+            <a:ext cx="64008" cy="1234440"/>
+          </a:xfrm>
+          <a:prstGeom prst="rect">
+            <a:avLst/>
+          </a:prstGeom>
+          <a:solidFill>
+            <a:srgbClr val="78A79B"/>
+          </a:solidFill>
+          <a:ln>
+            <a:noFill/>
+          </a:ln>
+          <a:effectLst/>
+        </p:spPr>
+        <p:style>
+          <a:lnRef idx="1">
+            <a:schemeClr val="accent1"/>
+          </a:lnRef>
+          <a:fillRef idx="3">
+            <a:schemeClr val="accent1"/>
+          </a:fillRef>
+          <a:effectRef idx="2">
+            <a:schemeClr val="accent1"/>
+          </a:effectRef>
+          <a:fontRef idx="minor">
+            <a:schemeClr val="lt1"/>
+          </a:fontRef>
+        </p:style>
+        <p:txBody>
+          <a:bodyPr rtlCol="0" anchor="ctr"/>
+          <a:lstStyle/>
+          <a:p>
+            <a:pPr algn="ctr"/>
+          </a:p>
+        </p:txBody>
+      </p:sp>
+      <p:sp>
+        <p:nvSpPr>
+          <p:cNvPr id="13" name="TextBox 12"/>
+          <p:cNvSpPr txBox="1"/>
+          <p:nvPr/>
+        </p:nvSpPr>
+        <p:spPr>
+          <a:xfrm>
+            <a:off x="804672" y="4123943"/>
+            <a:ext cx="2203704" cy="292608"/>
+          </a:xfrm>
+          <a:prstGeom prst="rect">
+            <a:avLst/>
+          </a:prstGeom>
+          <a:noFill/>
+        </p:spPr>
+        <p:txBody>
+          <a:bodyPr wrap="square">
+            <a:spAutoFit/>
+          </a:bodyPr>
+          <a:lstStyle/>
+          <a:p>
+            <a:pPr algn="l">
+              <a:lnSpc>
+                <a:spcPct val="115000"/>
+              </a:lnSpc>
+            </a:pPr>
+            <a:r>
+              <a:rPr sz="1000" b="1" i="0">
+                <a:solidFill>
+                  <a:srgbClr val="55605D"/>
+                </a:solidFill>
+                <a:latin typeface="Calibri"/>
+              </a:rPr>
+              <a:t>UNIVERSE 1 AVG TSR</a:t>
+            </a:r>
+          </a:p>
+        </p:txBody>
+      </p:sp>
+      <p:sp>
+        <p:nvSpPr>
+          <p:cNvPr id="14" name="TextBox 13"/>
+          <p:cNvSpPr txBox="1"/>
+          <p:nvPr/>
+        </p:nvSpPr>
+        <p:spPr>
+          <a:xfrm>
+            <a:off x="804672" y="4416551"/>
+            <a:ext cx="2203704" cy="548640"/>
+          </a:xfrm>
+          <a:prstGeom prst="rect">
+            <a:avLst/>
+          </a:prstGeom>
+          <a:noFill/>
+        </p:spPr>
+        <p:txBody>
+          <a:bodyPr wrap="square">
+            <a:spAutoFit/>
+          </a:bodyPr>
+          <a:lstStyle/>
+          <a:p>
+            <a:pPr algn="l">
+              <a:lnSpc>
+                <a:spcPct val="115000"/>
+              </a:lnSpc>
+            </a:pPr>
+            <a:r>
+              <a:rPr sz="2500" b="1" i="0">
+                <a:solidFill>
+                  <a:srgbClr val="1F2A28"/>
+                </a:solidFill>
+                <a:latin typeface="Calibri"/>
+              </a:rPr>
+              <a:t>+4.1%</a:t>
+            </a:r>
+          </a:p>
+        </p:txBody>
+      </p:sp>
+      <p:sp>
+        <p:nvSpPr>
+          <p:cNvPr id="15" name="Rounded Rectangle 14"/>
+          <p:cNvSpPr/>
+          <p:nvPr/>
+        </p:nvSpPr>
+        <p:spPr>
+          <a:xfrm>
+            <a:off x="3364992" y="3977639"/>
+            <a:ext cx="2615184" cy="1234440"/>
+          </a:xfrm>
+          <a:prstGeom prst="roundRect">
+            <a:avLst>
+              <a:gd name="adj" fmla="val 10000"/>
+            </a:avLst>
+          </a:prstGeom>
+          <a:solidFill>
+            <a:srgbClr val="FCFBF8"/>
+          </a:solidFill>
+          <a:ln w="9525">
+            <a:solidFill>
+              <a:srgbClr val="C3D8C5"/>
+            </a:solidFill>
+          </a:ln>
+          <a:effectLst/>
+        </p:spPr>
+        <p:style>
+          <a:lnRef idx="1">
+            <a:schemeClr val="accent1"/>
+          </a:lnRef>
+          <a:fillRef idx="3">
+            <a:schemeClr val="accent1"/>
+          </a:fillRef>
+          <a:effectRef idx="2">
+            <a:schemeClr val="accent1"/>
+          </a:effectRef>
+          <a:fontRef idx="minor">
+            <a:schemeClr val="lt1"/>
+          </a:fontRef>
+        </p:style>
+        <p:txBody>
+          <a:bodyPr rtlCol="0" anchor="ctr"/>
+          <a:lstStyle/>
+          <a:p>
+            <a:pPr algn="ctr"/>
+          </a:p>
+        </p:txBody>
+      </p:sp>
+      <p:sp>
+        <p:nvSpPr>
+          <p:cNvPr id="16" name="Rectangle 15"/>
+          <p:cNvSpPr/>
+          <p:nvPr/>
+        </p:nvSpPr>
+        <p:spPr>
+          <a:xfrm>
+            <a:off x="3364992" y="3977639"/>
+            <a:ext cx="64008" cy="1234440"/>
+          </a:xfrm>
+          <a:prstGeom prst="rect">
+            <a:avLst/>
+          </a:prstGeom>
+          <a:solidFill>
+            <a:srgbClr val="E3CFA4"/>
+          </a:solidFill>
+          <a:ln>
+            <a:noFill/>
+          </a:ln>
+          <a:effectLst/>
+        </p:spPr>
+        <p:style>
+          <a:lnRef idx="1">
+            <a:schemeClr val="accent1"/>
+          </a:lnRef>
+          <a:fillRef idx="3">
+            <a:schemeClr val="accent1"/>
+          </a:fillRef>
+          <a:effectRef idx="2">
+            <a:schemeClr val="accent1"/>
+          </a:effectRef>
+          <a:fontRef idx="minor">
+            <a:schemeClr val="lt1"/>
+          </a:fontRef>
+        </p:style>
+        <p:txBody>
+          <a:bodyPr rtlCol="0" anchor="ctr"/>
+          <a:lstStyle/>
+          <a:p>
+            <a:pPr algn="ctr"/>
+          </a:p>
+        </p:txBody>
+      </p:sp>
+      <p:sp>
+        <p:nvSpPr>
+          <p:cNvPr id="17" name="TextBox 16"/>
+          <p:cNvSpPr txBox="1"/>
+          <p:nvPr/>
+        </p:nvSpPr>
+        <p:spPr>
+          <a:xfrm>
+            <a:off x="3621024" y="4123943"/>
+            <a:ext cx="2203704" cy="292608"/>
+          </a:xfrm>
+          <a:prstGeom prst="rect">
+            <a:avLst/>
+          </a:prstGeom>
+          <a:noFill/>
+        </p:spPr>
+        <p:txBody>
+          <a:bodyPr wrap="square">
+            <a:spAutoFit/>
+          </a:bodyPr>
+          <a:lstStyle/>
+          <a:p>
+            <a:pPr algn="l">
+              <a:lnSpc>
+                <a:spcPct val="115000"/>
+              </a:lnSpc>
+            </a:pPr>
+            <a:r>
+              <a:rPr sz="1000" b="1" i="0">
+                <a:solidFill>
+                  <a:srgbClr val="55605D"/>
+                </a:solidFill>
+                <a:latin typeface="Calibri"/>
+              </a:rPr>
+              <a:t>UNIVERSE 2 AVG TSR</a:t>
+            </a:r>
+          </a:p>
+        </p:txBody>
+      </p:sp>
+      <p:sp>
+        <p:nvSpPr>
+          <p:cNvPr id="18" name="TextBox 17"/>
+          <p:cNvSpPr txBox="1"/>
+          <p:nvPr/>
+        </p:nvSpPr>
+        <p:spPr>
+          <a:xfrm>
+            <a:off x="3621024" y="4416551"/>
+            <a:ext cx="2203704" cy="548640"/>
+          </a:xfrm>
+          <a:prstGeom prst="rect">
+            <a:avLst/>
+          </a:prstGeom>
+          <a:noFill/>
+        </p:spPr>
+        <p:txBody>
+          <a:bodyPr wrap="square">
+            <a:spAutoFit/>
+          </a:bodyPr>
+          <a:lstStyle/>
+          <a:p>
+            <a:pPr algn="l">
+              <a:lnSpc>
+                <a:spcPct val="115000"/>
+              </a:lnSpc>
+            </a:pPr>
+            <a:r>
+              <a:rPr sz="2500" b="1" i="0">
+                <a:solidFill>
+                  <a:srgbClr val="1F2A28"/>
+                </a:solidFill>
+                <a:latin typeface="Calibri"/>
+              </a:rPr>
+              <a:t>+2.5%</a:t>
+            </a:r>
+          </a:p>
+        </p:txBody>
+      </p:sp>
+      <p:sp>
+        <p:nvSpPr>
+          <p:cNvPr id="19" name="Rounded Rectangle 18"/>
+          <p:cNvSpPr/>
+          <p:nvPr/>
+        </p:nvSpPr>
+        <p:spPr>
+          <a:xfrm>
+            <a:off x="6181344" y="3977639"/>
+            <a:ext cx="2615184" cy="1234440"/>
+          </a:xfrm>
+          <a:prstGeom prst="roundRect">
+            <a:avLst>
+              <a:gd name="adj" fmla="val 10000"/>
+            </a:avLst>
+          </a:prstGeom>
+          <a:solidFill>
+            <a:srgbClr val="FCFBF8"/>
+          </a:solidFill>
+          <a:ln w="9525">
+            <a:solidFill>
+              <a:srgbClr val="C3D8C5"/>
+            </a:solidFill>
+          </a:ln>
+          <a:effectLst/>
+        </p:spPr>
+        <p:style>
+          <a:lnRef idx="1">
+            <a:schemeClr val="accent1"/>
+          </a:lnRef>
+          <a:fillRef idx="3">
+            <a:schemeClr val="accent1"/>
+          </a:fillRef>
+          <a:effectRef idx="2">
+            <a:schemeClr val="accent1"/>
+          </a:effectRef>
+          <a:fontRef idx="minor">
+            <a:schemeClr val="lt1"/>
+          </a:fontRef>
+        </p:style>
+        <p:txBody>
+          <a:bodyPr rtlCol="0" anchor="ctr"/>
+          <a:lstStyle/>
+          <a:p>
+            <a:pPr algn="ctr"/>
+          </a:p>
+        </p:txBody>
+      </p:sp>
+      <p:sp>
+        <p:nvSpPr>
+          <p:cNvPr id="20" name="Rectangle 19"/>
+          <p:cNvSpPr/>
+          <p:nvPr/>
+        </p:nvSpPr>
+        <p:spPr>
+          <a:xfrm>
+            <a:off x="6181344" y="3977639"/>
+            <a:ext cx="64008" cy="1234440"/>
+          </a:xfrm>
+          <a:prstGeom prst="rect">
+            <a:avLst/>
+          </a:prstGeom>
+          <a:solidFill>
+            <a:srgbClr val="4E7D72"/>
+          </a:solidFill>
+          <a:ln>
+            <a:noFill/>
+          </a:ln>
+          <a:effectLst/>
+        </p:spPr>
+        <p:style>
+          <a:lnRef idx="1">
+            <a:schemeClr val="accent1"/>
+          </a:lnRef>
+          <a:fillRef idx="3">
+            <a:schemeClr val="accent1"/>
+          </a:fillRef>
+          <a:effectRef idx="2">
+            <a:schemeClr val="accent1"/>
+          </a:effectRef>
+          <a:fontRef idx="minor">
+            <a:schemeClr val="lt1"/>
+          </a:fontRef>
+        </p:style>
+        <p:txBody>
+          <a:bodyPr rtlCol="0" anchor="ctr"/>
+          <a:lstStyle/>
+          <a:p>
+            <a:pPr algn="ctr"/>
+          </a:p>
+        </p:txBody>
+      </p:sp>
+      <p:sp>
+        <p:nvSpPr>
+          <p:cNvPr id="21" name="TextBox 20"/>
+          <p:cNvSpPr txBox="1"/>
+          <p:nvPr/>
+        </p:nvSpPr>
+        <p:spPr>
+          <a:xfrm>
+            <a:off x="6437376" y="4123943"/>
+            <a:ext cx="2203704" cy="292608"/>
+          </a:xfrm>
+          <a:prstGeom prst="rect">
+            <a:avLst/>
+          </a:prstGeom>
+          <a:noFill/>
+        </p:spPr>
+        <p:txBody>
+          <a:bodyPr wrap="square">
+            <a:spAutoFit/>
+          </a:bodyPr>
+          <a:lstStyle/>
+          <a:p>
+            <a:pPr algn="l">
+              <a:lnSpc>
+                <a:spcPct val="115000"/>
+              </a:lnSpc>
+            </a:pPr>
+            <a:r>
+              <a:rPr sz="1000" b="1" i="0">
+                <a:solidFill>
+                  <a:srgbClr val="55605D"/>
+                </a:solidFill>
+                <a:latin typeface="Calibri"/>
+              </a:rPr>
+              <a:t>UNIVERSE 1 AGGREGATE PROFIT</a:t>
+            </a:r>
+          </a:p>
+        </p:txBody>
+      </p:sp>
+      <p:sp>
+        <p:nvSpPr>
+          <p:cNvPr id="22" name="TextBox 21"/>
+          <p:cNvSpPr txBox="1"/>
+          <p:nvPr/>
+        </p:nvSpPr>
+        <p:spPr>
+          <a:xfrm>
+            <a:off x="6437376" y="4416551"/>
+            <a:ext cx="2203704" cy="548640"/>
+          </a:xfrm>
+          <a:prstGeom prst="rect">
+            <a:avLst/>
+          </a:prstGeom>
+          <a:noFill/>
+        </p:spPr>
+        <p:txBody>
+          <a:bodyPr wrap="square">
+            <a:spAutoFit/>
+          </a:bodyPr>
+          <a:lstStyle/>
+          <a:p>
+            <a:pPr algn="l">
+              <a:lnSpc>
+                <a:spcPct val="115000"/>
+              </a:lnSpc>
+            </a:pPr>
+            <a:r>
+              <a:rPr sz="2500" b="1" i="0">
+                <a:solidFill>
+                  <a:srgbClr val="1F2A28"/>
+                </a:solidFill>
+                <a:latin typeface="Calibri"/>
+              </a:rPr>
+              <a:t>$2.06bn</a:t>
+            </a:r>
+          </a:p>
+        </p:txBody>
+      </p:sp>
+      <p:sp>
+        <p:nvSpPr>
+          <p:cNvPr id="23" name="Rounded Rectangle 22"/>
+          <p:cNvSpPr/>
+          <p:nvPr/>
+        </p:nvSpPr>
+        <p:spPr>
+          <a:xfrm>
+            <a:off x="8997696" y="3977639"/>
+            <a:ext cx="2615184" cy="1234440"/>
+          </a:xfrm>
+          <a:prstGeom prst="roundRect">
+            <a:avLst>
+              <a:gd name="adj" fmla="val 10000"/>
+            </a:avLst>
+          </a:prstGeom>
+          <a:solidFill>
+            <a:srgbClr val="FCFBF8"/>
+          </a:solidFill>
+          <a:ln w="9525">
+            <a:solidFill>
+              <a:srgbClr val="C3D8C5"/>
+            </a:solidFill>
+          </a:ln>
+          <a:effectLst/>
+        </p:spPr>
+        <p:style>
+          <a:lnRef idx="1">
+            <a:schemeClr val="accent1"/>
+          </a:lnRef>
+          <a:fillRef idx="3">
+            <a:schemeClr val="accent1"/>
+          </a:fillRef>
+          <a:effectRef idx="2">
+            <a:schemeClr val="accent1"/>
+          </a:effectRef>
+          <a:fontRef idx="minor">
+            <a:schemeClr val="lt1"/>
+          </a:fontRef>
+        </p:style>
+        <p:txBody>
+          <a:bodyPr rtlCol="0" anchor="ctr"/>
+          <a:lstStyle/>
+          <a:p>
+            <a:pPr algn="ctr"/>
+          </a:p>
+        </p:txBody>
+      </p:sp>
+      <p:sp>
+        <p:nvSpPr>
+          <p:cNvPr id="24" name="Rectangle 23"/>
+          <p:cNvSpPr/>
+          <p:nvPr/>
+        </p:nvSpPr>
+        <p:spPr>
+          <a:xfrm>
+            <a:off x="8997696" y="3977639"/>
+            <a:ext cx="64008" cy="1234440"/>
+          </a:xfrm>
+          <a:prstGeom prst="rect">
+            <a:avLst/>
+          </a:prstGeom>
+          <a:solidFill>
+            <a:srgbClr val="8A6D2A"/>
+          </a:solidFill>
+          <a:ln>
+            <a:noFill/>
+          </a:ln>
+          <a:effectLst/>
+        </p:spPr>
+        <p:style>
+          <a:lnRef idx="1">
+            <a:schemeClr val="accent1"/>
+          </a:lnRef>
+          <a:fillRef idx="3">
+            <a:schemeClr val="accent1"/>
+          </a:fillRef>
+          <a:effectRef idx="2">
+            <a:schemeClr val="accent1"/>
+          </a:effectRef>
+          <a:fontRef idx="minor">
+            <a:schemeClr val="lt1"/>
+          </a:fontRef>
+        </p:style>
+        <p:txBody>
+          <a:bodyPr rtlCol="0" anchor="ctr"/>
+          <a:lstStyle/>
+          <a:p>
+            <a:pPr algn="ctr"/>
+          </a:p>
+        </p:txBody>
+      </p:sp>
+      <p:sp>
+        <p:nvSpPr>
+          <p:cNvPr id="25" name="TextBox 24"/>
+          <p:cNvSpPr txBox="1"/>
+          <p:nvPr/>
+        </p:nvSpPr>
+        <p:spPr>
+          <a:xfrm>
+            <a:off x="9253728" y="4123943"/>
+            <a:ext cx="2203704" cy="292608"/>
+          </a:xfrm>
+          <a:prstGeom prst="rect">
+            <a:avLst/>
+          </a:prstGeom>
+          <a:noFill/>
+        </p:spPr>
+        <p:txBody>
+          <a:bodyPr wrap="square">
+            <a:spAutoFit/>
+          </a:bodyPr>
+          <a:lstStyle/>
+          <a:p>
+            <a:pPr algn="l">
+              <a:lnSpc>
+                <a:spcPct val="115000"/>
+              </a:lnSpc>
+            </a:pPr>
+            <a:r>
+              <a:rPr sz="1000" b="1" i="0">
+                <a:solidFill>
+                  <a:srgbClr val="55605D"/>
+                </a:solidFill>
+                <a:latin typeface="Calibri"/>
+              </a:rPr>
+              <a:t>UNIVERSE 2 AGGREGATE PROFIT</a:t>
+            </a:r>
+          </a:p>
+        </p:txBody>
+      </p:sp>
+      <p:sp>
+        <p:nvSpPr>
+          <p:cNvPr id="26" name="TextBox 25"/>
+          <p:cNvSpPr txBox="1"/>
+          <p:nvPr/>
+        </p:nvSpPr>
+        <p:spPr>
+          <a:xfrm>
+            <a:off x="9253728" y="4416551"/>
+            <a:ext cx="2203704" cy="548640"/>
+          </a:xfrm>
+          <a:prstGeom prst="rect">
+            <a:avLst/>
+          </a:prstGeom>
+          <a:noFill/>
+        </p:spPr>
+        <p:txBody>
+          <a:bodyPr wrap="square">
+            <a:spAutoFit/>
+          </a:bodyPr>
+          <a:lstStyle/>
+          <a:p>
+            <a:pPr algn="l">
+              <a:lnSpc>
+                <a:spcPct val="115000"/>
+              </a:lnSpc>
+            </a:pPr>
+            <a:r>
+              <a:rPr sz="2500" b="1" i="0">
+                <a:solidFill>
+                  <a:srgbClr val="1F2A28"/>
+                </a:solidFill>
+                <a:latin typeface="Calibri"/>
+              </a:rPr>
+              <a:t>$593m</a:t>
+            </a:r>
+          </a:p>
+        </p:txBody>
+      </p:sp>
+      <p:sp>
+        <p:nvSpPr>
+          <p:cNvPr id="27" name="Rectangle 26"/>
+          <p:cNvSpPr/>
+          <p:nvPr/>
+        </p:nvSpPr>
+        <p:spPr>
+          <a:xfrm>
+            <a:off x="0" y="6812280"/>
+            <a:ext cx="12191695" cy="45720"/>
+          </a:xfrm>
+          <a:prstGeom prst="rect">
+            <a:avLst/>
+          </a:prstGeom>
+          <a:solidFill>
+            <a:srgbClr val="78A79B"/>
+          </a:solidFill>
+          <a:ln>
+            <a:noFill/>
+          </a:ln>
+          <a:effectLst/>
+        </p:spPr>
+        <p:style>
+          <a:lnRef idx="1">
+            <a:schemeClr val="accent1"/>
+          </a:lnRef>
+          <a:fillRef idx="3">
+            <a:schemeClr val="accent1"/>
+          </a:fillRef>
+          <a:effectRef idx="2">
+            <a:schemeClr val="accent1"/>
+          </a:effectRef>
+          <a:fontRef idx="minor">
+            <a:schemeClr val="lt1"/>
+          </a:fontRef>
+        </p:style>
+        <p:txBody>
+          <a:bodyPr rtlCol="0" anchor="ctr"/>
+          <a:lstStyle/>
+          <a:p>
+            <a:pPr algn="ctr"/>
+          </a:p>
+        </p:txBody>
+      </p:sp>
+      <p:sp>
+        <p:nvSpPr>
+          <p:cNvPr id="28" name="TextBox 27"/>
+          <p:cNvSpPr txBox="1"/>
+          <p:nvPr/>
+        </p:nvSpPr>
+        <p:spPr>
+          <a:xfrm>
+            <a:off x="365760" y="6473952"/>
+            <a:ext cx="7315200" cy="274320"/>
+          </a:xfrm>
+          <a:prstGeom prst="rect">
+            <a:avLst/>
+          </a:prstGeom>
+          <a:noFill/>
+        </p:spPr>
+        <p:txBody>
+          <a:bodyPr wrap="square">
+            <a:spAutoFit/>
+          </a:bodyPr>
+          <a:lstStyle/>
+          <a:p>
+            <a:pPr algn="l">
+              <a:lnSpc>
+                <a:spcPct val="115000"/>
+              </a:lnSpc>
+            </a:pPr>
+            <a:r>
               <a:rPr sz="1000" b="0" i="0">
                 <a:solidFill>
-                  <a:srgbClr val="4A5552"/>
+                  <a:srgbClr val="55605D"/>
                 </a:solidFill>
                 <a:latin typeface="Calibri"/>
               </a:rPr>
@@ -4727,7 +6651,7 @@
       </p:sp>
       <p:sp>
         <p:nvSpPr>
-          <p:cNvPr id="7" name="TextBox 6"/>
+          <p:cNvPr id="29" name="TextBox 28"/>
           <p:cNvSpPr txBox="1"/>
           <p:nvPr/>
         </p:nvSpPr>
@@ -4755,7 +6679,7 @@
             <a:r>
               <a:rPr sz="1000" b="0" i="0">
                 <a:solidFill>
-                  <a:srgbClr val="4A5552"/>
+                  <a:srgbClr val="55605D"/>
                 </a:solidFill>
                 <a:latin typeface="Calibri"/>
               </a:rPr>
@@ -4775,6 +6699,14 @@
 <file path=ppt/slides/slide4.xml><?xml version="1.0" encoding="utf-8"?>
 <p:sld xmlns:a="http://schemas.openxmlformats.org/drawingml/2006/main" xmlns:p="http://schemas.openxmlformats.org/presentationml/2006/main" xmlns:r="http://schemas.openxmlformats.org/officeDocument/2006/relationships">
   <p:cSld>
+    <p:bg>
+      <p:bgPr>
+        <a:solidFill>
+          <a:srgbClr val="FFFFFF"/>
+        </a:solidFill>
+        <a:effectLst/>
+      </p:bgPr>
+    </p:bg>
     <p:spTree>
       <p:nvGrpSpPr>
         <p:cNvPr id="1" name=""/>
@@ -4784,172 +6716,14 @@
       <p:grpSpPr/>
       <p:sp>
         <p:nvSpPr>
-          <p:cNvPr id="2" name="TextBox 1"/>
-          <p:cNvSpPr txBox="1"/>
-          <p:nvPr/>
-        </p:nvSpPr>
-        <p:spPr>
-          <a:xfrm>
-            <a:off x="502920" y="320040"/>
-            <a:ext cx="10058400" cy="320040"/>
-          </a:xfrm>
-          <a:prstGeom prst="rect">
-            <a:avLst/>
-          </a:prstGeom>
-          <a:noFill/>
-        </p:spPr>
-        <p:txBody>
-          <a:bodyPr wrap="square">
-            <a:spAutoFit/>
-          </a:bodyPr>
-          <a:lstStyle/>
-          <a:p>
-            <a:pPr algn="l">
-              <a:lnSpc>
-                <a:spcPct val="115000"/>
-              </a:lnSpc>
-            </a:pPr>
-            <a:r>
-              <a:rPr sz="1100" b="1" i="0">
-                <a:solidFill>
-                  <a:srgbClr val="78A79B"/>
-                </a:solidFill>
-                <a:latin typeface="Calibri"/>
-              </a:rPr>
-              <a:t>03 / PROFIT LEADER ≠ TSR LEADER</a:t>
-            </a:r>
-          </a:p>
-        </p:txBody>
-      </p:sp>
-      <p:sp>
-        <p:nvSpPr>
-          <p:cNvPr id="3" name="TextBox 2"/>
-          <p:cNvSpPr txBox="1"/>
-          <p:nvPr/>
-        </p:nvSpPr>
-        <p:spPr>
-          <a:xfrm>
-            <a:off x="502920" y="621792"/>
-            <a:ext cx="11155680" cy="685800"/>
-          </a:xfrm>
-          <a:prstGeom prst="rect">
-            <a:avLst/>
-          </a:prstGeom>
-          <a:noFill/>
-        </p:spPr>
-        <p:txBody>
-          <a:bodyPr wrap="square">
-            <a:spAutoFit/>
-          </a:bodyPr>
-          <a:lstStyle/>
-          <a:p>
-            <a:pPr algn="l">
-              <a:lnSpc>
-                <a:spcPct val="115000"/>
-              </a:lnSpc>
-            </a:pPr>
-            <a:r>
-              <a:rPr sz="2400" b="1" i="0">
-                <a:solidFill>
-                  <a:srgbClr val="1F2A28"/>
-                </a:solidFill>
-                <a:latin typeface="Calibri"/>
-              </a:rPr>
-              <a:t>Profit leadership did not settle valuation in either universe.</a:t>
-            </a:r>
-          </a:p>
-        </p:txBody>
-      </p:sp>
-      <p:sp>
-        <p:nvSpPr>
-          <p:cNvPr id="4" name="TextBox 3"/>
-          <p:cNvSpPr txBox="1"/>
-          <p:nvPr/>
-        </p:nvSpPr>
-        <p:spPr>
-          <a:xfrm>
-            <a:off x="548640" y="1828800"/>
-            <a:ext cx="10789920" cy="2377440"/>
-          </a:xfrm>
-          <a:prstGeom prst="rect">
-            <a:avLst/>
-          </a:prstGeom>
-          <a:noFill/>
-        </p:spPr>
-        <p:txBody>
-          <a:bodyPr wrap="square">
-            <a:spAutoFit/>
-          </a:bodyPr>
-          <a:lstStyle/>
-          <a:p>
-            <a:pPr>
-              <a:lnSpc>
-                <a:spcPct val="112000"/>
-              </a:lnSpc>
-              <a:spcAft>
-                <a:spcPts val="864"/>
-              </a:spcAft>
-            </a:pPr>
-            <a:r>
-              <a:rPr sz="1550" b="0" i="0">
-                <a:solidFill>
-                  <a:srgbClr val="1F2A28"/>
-                </a:solidFill>
-                <a:latin typeface="Calibri"/>
-              </a:rPr>
-              <a:t>•  Universe 1: Ochre posted the highest single-round profit ($543m) but ranks 3 on cumulative TSR.</a:t>
-            </a:r>
-          </a:p>
-          <a:p>
-            <a:pPr>
-              <a:lnSpc>
-                <a:spcPct val="112000"/>
-              </a:lnSpc>
-              <a:spcAft>
-                <a:spcPts val="864"/>
-              </a:spcAft>
-            </a:pPr>
-            <a:r>
-              <a:rPr sz="1550" b="0" i="0">
-                <a:solidFill>
-                  <a:srgbClr val="1F2A28"/>
-                </a:solidFill>
-                <a:latin typeface="Calibri"/>
-              </a:rPr>
-              <a:t>•  Universe 2: HallaBol posted the highest single-round profit ($692m) but ranks 2 on cumulative TSR.</a:t>
-            </a:r>
-          </a:p>
-          <a:p>
-            <a:pPr>
-              <a:lnSpc>
-                <a:spcPct val="112000"/>
-              </a:lnSpc>
-              <a:spcAft>
-                <a:spcPts val="864"/>
-              </a:spcAft>
-            </a:pPr>
-            <a:r>
-              <a:rPr sz="1550" b="0" i="0">
-                <a:solidFill>
-                  <a:srgbClr val="1F2A28"/>
-                </a:solidFill>
-                <a:latin typeface="Calibri"/>
-              </a:rPr>
-              <a:t>•  Cumulative TSR reflects every round played so far; a single strong round of profit does not erase a weaker history.</a:t>
-            </a:r>
-          </a:p>
-        </p:txBody>
-      </p:sp>
-      <p:sp>
-        <p:nvSpPr>
-          <p:cNvPr id="5" name="Rectangle 4"/>
+          <p:cNvPr id="2" name="Rectangle 1"/>
           <p:cNvSpPr/>
           <p:nvPr/>
         </p:nvSpPr>
         <p:spPr>
           <a:xfrm>
-            <a:off x="0" y="6812280"/>
-            <a:ext cx="12191695" cy="45720"/>
+            <a:off x="502920" y="384048"/>
+            <a:ext cx="320040" cy="54864"/>
           </a:xfrm>
           <a:prstGeom prst="rect">
             <a:avLst/>
@@ -4986,14 +6760,14 @@
       </p:sp>
       <p:sp>
         <p:nvSpPr>
-          <p:cNvPr id="6" name="TextBox 5"/>
+          <p:cNvPr id="3" name="TextBox 2"/>
           <p:cNvSpPr txBox="1"/>
           <p:nvPr/>
         </p:nvSpPr>
         <p:spPr>
           <a:xfrm>
-            <a:off x="365760" y="6473952"/>
-            <a:ext cx="7315200" cy="274320"/>
+            <a:off x="502920" y="475488"/>
+            <a:ext cx="10058400" cy="292608"/>
           </a:xfrm>
           <a:prstGeom prst="rect">
             <a:avLst/>
@@ -5012,9 +6786,634 @@
               </a:lnSpc>
             </a:pPr>
             <a:r>
+              <a:rPr sz="1100" b="1" i="0">
+                <a:solidFill>
+                  <a:srgbClr val="78A79B"/>
+                </a:solidFill>
+                <a:latin typeface="Calibri"/>
+              </a:rPr>
+              <a:t>03 / PROFIT LEADER ≠ TSR LEADER</a:t>
+            </a:r>
+          </a:p>
+        </p:txBody>
+      </p:sp>
+      <p:sp>
+        <p:nvSpPr>
+          <p:cNvPr id="4" name="TextBox 3"/>
+          <p:cNvSpPr txBox="1"/>
+          <p:nvPr/>
+        </p:nvSpPr>
+        <p:spPr>
+          <a:xfrm>
+            <a:off x="502920" y="758952"/>
+            <a:ext cx="11155680" cy="658368"/>
+          </a:xfrm>
+          <a:prstGeom prst="rect">
+            <a:avLst/>
+          </a:prstGeom>
+          <a:noFill/>
+        </p:spPr>
+        <p:txBody>
+          <a:bodyPr wrap="square">
+            <a:spAutoFit/>
+          </a:bodyPr>
+          <a:lstStyle/>
+          <a:p>
+            <a:pPr algn="l">
+              <a:lnSpc>
+                <a:spcPct val="115000"/>
+              </a:lnSpc>
+            </a:pPr>
+            <a:r>
+              <a:rPr sz="2500" b="1" i="0">
+                <a:solidFill>
+                  <a:srgbClr val="1F2A28"/>
+                </a:solidFill>
+                <a:latin typeface="Calibri"/>
+              </a:rPr>
+              <a:t>Profit leadership did not settle valuation in either universe.</a:t>
+            </a:r>
+          </a:p>
+        </p:txBody>
+      </p:sp>
+      <p:sp>
+        <p:nvSpPr>
+          <p:cNvPr id="5" name="Rounded Rectangle 4"/>
+          <p:cNvSpPr/>
+          <p:nvPr/>
+        </p:nvSpPr>
+        <p:spPr>
+          <a:xfrm>
+            <a:off x="548640" y="1874519"/>
+            <a:ext cx="5394960" cy="2103120"/>
+          </a:xfrm>
+          <a:prstGeom prst="roundRect">
+            <a:avLst>
+              <a:gd name="adj" fmla="val 8000"/>
+            </a:avLst>
+          </a:prstGeom>
+          <a:solidFill>
+            <a:srgbClr val="FCFBF8"/>
+          </a:solidFill>
+          <a:ln w="9525">
+            <a:solidFill>
+              <a:srgbClr val="C3D8C5"/>
+            </a:solidFill>
+          </a:ln>
+          <a:effectLst/>
+        </p:spPr>
+        <p:style>
+          <a:lnRef idx="1">
+            <a:schemeClr val="accent1"/>
+          </a:lnRef>
+          <a:fillRef idx="3">
+            <a:schemeClr val="accent1"/>
+          </a:fillRef>
+          <a:effectRef idx="2">
+            <a:schemeClr val="accent1"/>
+          </a:effectRef>
+          <a:fontRef idx="minor">
+            <a:schemeClr val="lt1"/>
+          </a:fontRef>
+        </p:style>
+        <p:txBody>
+          <a:bodyPr rtlCol="0" anchor="ctr"/>
+          <a:lstStyle/>
+          <a:p>
+            <a:pPr algn="ctr"/>
+          </a:p>
+        </p:txBody>
+      </p:sp>
+      <p:sp>
+        <p:nvSpPr>
+          <p:cNvPr id="6" name="Rectangle 5"/>
+          <p:cNvSpPr/>
+          <p:nvPr/>
+        </p:nvSpPr>
+        <p:spPr>
+          <a:xfrm>
+            <a:off x="548640" y="1874519"/>
+            <a:ext cx="5394960" cy="54864"/>
+          </a:xfrm>
+          <a:prstGeom prst="rect">
+            <a:avLst/>
+          </a:prstGeom>
+          <a:solidFill>
+            <a:srgbClr val="B33A3A"/>
+          </a:solidFill>
+          <a:ln>
+            <a:noFill/>
+          </a:ln>
+          <a:effectLst/>
+        </p:spPr>
+        <p:style>
+          <a:lnRef idx="1">
+            <a:schemeClr val="accent1"/>
+          </a:lnRef>
+          <a:fillRef idx="3">
+            <a:schemeClr val="accent1"/>
+          </a:fillRef>
+          <a:effectRef idx="2">
+            <a:schemeClr val="accent1"/>
+          </a:effectRef>
+          <a:fontRef idx="minor">
+            <a:schemeClr val="lt1"/>
+          </a:fontRef>
+        </p:style>
+        <p:txBody>
+          <a:bodyPr rtlCol="0" anchor="ctr"/>
+          <a:lstStyle/>
+          <a:p>
+            <a:pPr algn="ctr"/>
+          </a:p>
+        </p:txBody>
+      </p:sp>
+      <p:sp>
+        <p:nvSpPr>
+          <p:cNvPr id="7" name="TextBox 6"/>
+          <p:cNvSpPr txBox="1"/>
+          <p:nvPr/>
+        </p:nvSpPr>
+        <p:spPr>
+          <a:xfrm>
+            <a:off x="777240" y="2057400"/>
+            <a:ext cx="4937760" cy="274320"/>
+          </a:xfrm>
+          <a:prstGeom prst="rect">
+            <a:avLst/>
+          </a:prstGeom>
+          <a:noFill/>
+        </p:spPr>
+        <p:txBody>
+          <a:bodyPr wrap="square">
+            <a:spAutoFit/>
+          </a:bodyPr>
+          <a:lstStyle/>
+          <a:p>
+            <a:pPr algn="l">
+              <a:lnSpc>
+                <a:spcPct val="115000"/>
+              </a:lnSpc>
+            </a:pPr>
+            <a:r>
+              <a:rPr sz="1100" b="1" i="0">
+                <a:solidFill>
+                  <a:srgbClr val="78A79B"/>
+                </a:solidFill>
+                <a:latin typeface="Calibri"/>
+              </a:rPr>
+              <a:t>UNIVERSE 1</a:t>
+            </a:r>
+          </a:p>
+        </p:txBody>
+      </p:sp>
+      <p:sp>
+        <p:nvSpPr>
+          <p:cNvPr id="8" name="TextBox 7"/>
+          <p:cNvSpPr txBox="1"/>
+          <p:nvPr/>
+        </p:nvSpPr>
+        <p:spPr>
+          <a:xfrm>
+            <a:off x="777240" y="2377440"/>
+            <a:ext cx="4937760" cy="457200"/>
+          </a:xfrm>
+          <a:prstGeom prst="rect">
+            <a:avLst/>
+          </a:prstGeom>
+          <a:noFill/>
+        </p:spPr>
+        <p:txBody>
+          <a:bodyPr wrap="square">
+            <a:spAutoFit/>
+          </a:bodyPr>
+          <a:lstStyle/>
+          <a:p>
+            <a:pPr algn="l">
+              <a:lnSpc>
+                <a:spcPct val="115000"/>
+              </a:lnSpc>
+            </a:pPr>
+            <a:r>
+              <a:rPr sz="1900" b="1" i="0">
+                <a:solidFill>
+                  <a:srgbClr val="1F2A28"/>
+                </a:solidFill>
+                <a:latin typeface="Calibri"/>
+              </a:rPr>
+              <a:t>Ochre</a:t>
+            </a:r>
+          </a:p>
+        </p:txBody>
+      </p:sp>
+      <p:sp>
+        <p:nvSpPr>
+          <p:cNvPr id="9" name="TextBox 8"/>
+          <p:cNvSpPr txBox="1"/>
+          <p:nvPr/>
+        </p:nvSpPr>
+        <p:spPr>
+          <a:xfrm>
+            <a:off x="777240" y="2926080"/>
+            <a:ext cx="4937760" cy="914400"/>
+          </a:xfrm>
+          <a:prstGeom prst="rect">
+            <a:avLst/>
+          </a:prstGeom>
+          <a:noFill/>
+        </p:spPr>
+        <p:txBody>
+          <a:bodyPr wrap="square">
+            <a:spAutoFit/>
+          </a:bodyPr>
+          <a:lstStyle/>
+          <a:p>
+            <a:pPr algn="l">
+              <a:lnSpc>
+                <a:spcPct val="120000"/>
+              </a:lnSpc>
+            </a:pPr>
+            <a:r>
+              <a:rPr sz="1300" b="0" i="0">
+                <a:solidFill>
+                  <a:srgbClr val="55605D"/>
+                </a:solidFill>
+                <a:latin typeface="Calibri"/>
+              </a:rPr>
+              <a:t>highest profit ($543m) but rank 3 on TSR</a:t>
+            </a:r>
+          </a:p>
+        </p:txBody>
+      </p:sp>
+      <p:sp>
+        <p:nvSpPr>
+          <p:cNvPr id="10" name="Rounded Rectangle 9"/>
+          <p:cNvSpPr/>
+          <p:nvPr/>
+        </p:nvSpPr>
+        <p:spPr>
+          <a:xfrm>
+            <a:off x="6217920" y="1874519"/>
+            <a:ext cx="5394960" cy="2103120"/>
+          </a:xfrm>
+          <a:prstGeom prst="roundRect">
+            <a:avLst>
+              <a:gd name="adj" fmla="val 8000"/>
+            </a:avLst>
+          </a:prstGeom>
+          <a:solidFill>
+            <a:srgbClr val="FCFBF8"/>
+          </a:solidFill>
+          <a:ln w="9525">
+            <a:solidFill>
+              <a:srgbClr val="C3D8C5"/>
+            </a:solidFill>
+          </a:ln>
+          <a:effectLst/>
+        </p:spPr>
+        <p:style>
+          <a:lnRef idx="1">
+            <a:schemeClr val="accent1"/>
+          </a:lnRef>
+          <a:fillRef idx="3">
+            <a:schemeClr val="accent1"/>
+          </a:fillRef>
+          <a:effectRef idx="2">
+            <a:schemeClr val="accent1"/>
+          </a:effectRef>
+          <a:fontRef idx="minor">
+            <a:schemeClr val="lt1"/>
+          </a:fontRef>
+        </p:style>
+        <p:txBody>
+          <a:bodyPr rtlCol="0" anchor="ctr"/>
+          <a:lstStyle/>
+          <a:p>
+            <a:pPr algn="ctr"/>
+          </a:p>
+        </p:txBody>
+      </p:sp>
+      <p:sp>
+        <p:nvSpPr>
+          <p:cNvPr id="11" name="Rectangle 10"/>
+          <p:cNvSpPr/>
+          <p:nvPr/>
+        </p:nvSpPr>
+        <p:spPr>
+          <a:xfrm>
+            <a:off x="6217920" y="1874519"/>
+            <a:ext cx="5394960" cy="54864"/>
+          </a:xfrm>
+          <a:prstGeom prst="rect">
+            <a:avLst/>
+          </a:prstGeom>
+          <a:solidFill>
+            <a:srgbClr val="B33A3A"/>
+          </a:solidFill>
+          <a:ln>
+            <a:noFill/>
+          </a:ln>
+          <a:effectLst/>
+        </p:spPr>
+        <p:style>
+          <a:lnRef idx="1">
+            <a:schemeClr val="accent1"/>
+          </a:lnRef>
+          <a:fillRef idx="3">
+            <a:schemeClr val="accent1"/>
+          </a:fillRef>
+          <a:effectRef idx="2">
+            <a:schemeClr val="accent1"/>
+          </a:effectRef>
+          <a:fontRef idx="minor">
+            <a:schemeClr val="lt1"/>
+          </a:fontRef>
+        </p:style>
+        <p:txBody>
+          <a:bodyPr rtlCol="0" anchor="ctr"/>
+          <a:lstStyle/>
+          <a:p>
+            <a:pPr algn="ctr"/>
+          </a:p>
+        </p:txBody>
+      </p:sp>
+      <p:sp>
+        <p:nvSpPr>
+          <p:cNvPr id="12" name="TextBox 11"/>
+          <p:cNvSpPr txBox="1"/>
+          <p:nvPr/>
+        </p:nvSpPr>
+        <p:spPr>
+          <a:xfrm>
+            <a:off x="6446520" y="2057400"/>
+            <a:ext cx="4937760" cy="274320"/>
+          </a:xfrm>
+          <a:prstGeom prst="rect">
+            <a:avLst/>
+          </a:prstGeom>
+          <a:noFill/>
+        </p:spPr>
+        <p:txBody>
+          <a:bodyPr wrap="square">
+            <a:spAutoFit/>
+          </a:bodyPr>
+          <a:lstStyle/>
+          <a:p>
+            <a:pPr algn="l">
+              <a:lnSpc>
+                <a:spcPct val="115000"/>
+              </a:lnSpc>
+            </a:pPr>
+            <a:r>
+              <a:rPr sz="1100" b="1" i="0">
+                <a:solidFill>
+                  <a:srgbClr val="78A79B"/>
+                </a:solidFill>
+                <a:latin typeface="Calibri"/>
+              </a:rPr>
+              <a:t>UNIVERSE 2</a:t>
+            </a:r>
+          </a:p>
+        </p:txBody>
+      </p:sp>
+      <p:sp>
+        <p:nvSpPr>
+          <p:cNvPr id="13" name="TextBox 12"/>
+          <p:cNvSpPr txBox="1"/>
+          <p:nvPr/>
+        </p:nvSpPr>
+        <p:spPr>
+          <a:xfrm>
+            <a:off x="6446520" y="2377440"/>
+            <a:ext cx="4937760" cy="457200"/>
+          </a:xfrm>
+          <a:prstGeom prst="rect">
+            <a:avLst/>
+          </a:prstGeom>
+          <a:noFill/>
+        </p:spPr>
+        <p:txBody>
+          <a:bodyPr wrap="square">
+            <a:spAutoFit/>
+          </a:bodyPr>
+          <a:lstStyle/>
+          <a:p>
+            <a:pPr algn="l">
+              <a:lnSpc>
+                <a:spcPct val="115000"/>
+              </a:lnSpc>
+            </a:pPr>
+            <a:r>
+              <a:rPr sz="1900" b="1" i="0">
+                <a:solidFill>
+                  <a:srgbClr val="1F2A28"/>
+                </a:solidFill>
+                <a:latin typeface="Calibri"/>
+              </a:rPr>
+              <a:t>HallaBol</a:t>
+            </a:r>
+          </a:p>
+        </p:txBody>
+      </p:sp>
+      <p:sp>
+        <p:nvSpPr>
+          <p:cNvPr id="14" name="TextBox 13"/>
+          <p:cNvSpPr txBox="1"/>
+          <p:nvPr/>
+        </p:nvSpPr>
+        <p:spPr>
+          <a:xfrm>
+            <a:off x="6446520" y="2926080"/>
+            <a:ext cx="4937760" cy="914400"/>
+          </a:xfrm>
+          <a:prstGeom prst="rect">
+            <a:avLst/>
+          </a:prstGeom>
+          <a:noFill/>
+        </p:spPr>
+        <p:txBody>
+          <a:bodyPr wrap="square">
+            <a:spAutoFit/>
+          </a:bodyPr>
+          <a:lstStyle/>
+          <a:p>
+            <a:pPr algn="l">
+              <a:lnSpc>
+                <a:spcPct val="120000"/>
+              </a:lnSpc>
+            </a:pPr>
+            <a:r>
+              <a:rPr sz="1300" b="0" i="0">
+                <a:solidFill>
+                  <a:srgbClr val="55605D"/>
+                </a:solidFill>
+                <a:latin typeface="Calibri"/>
+              </a:rPr>
+              <a:t>highest profit ($692m) but rank 2 on TSR</a:t>
+            </a:r>
+          </a:p>
+        </p:txBody>
+      </p:sp>
+      <p:sp>
+        <p:nvSpPr>
+          <p:cNvPr id="15" name="Rounded Rectangle 14"/>
+          <p:cNvSpPr/>
+          <p:nvPr/>
+        </p:nvSpPr>
+        <p:spPr>
+          <a:xfrm>
+            <a:off x="548640" y="4251960"/>
+            <a:ext cx="11064240" cy="868680"/>
+          </a:xfrm>
+          <a:prstGeom prst="roundRect">
+            <a:avLst>
+              <a:gd name="adj" fmla="val 8000"/>
+            </a:avLst>
+          </a:prstGeom>
+          <a:solidFill>
+            <a:srgbClr val="DDE8DE"/>
+          </a:solidFill>
+          <a:ln>
+            <a:noFill/>
+          </a:ln>
+          <a:effectLst/>
+        </p:spPr>
+        <p:style>
+          <a:lnRef idx="1">
+            <a:schemeClr val="accent1"/>
+          </a:lnRef>
+          <a:fillRef idx="3">
+            <a:schemeClr val="accent1"/>
+          </a:fillRef>
+          <a:effectRef idx="2">
+            <a:schemeClr val="accent1"/>
+          </a:effectRef>
+          <a:fontRef idx="minor">
+            <a:schemeClr val="lt1"/>
+          </a:fontRef>
+        </p:style>
+        <p:txBody>
+          <a:bodyPr rtlCol="0" anchor="ctr"/>
+          <a:lstStyle/>
+          <a:p>
+            <a:pPr algn="ctr"/>
+          </a:p>
+        </p:txBody>
+      </p:sp>
+      <p:sp>
+        <p:nvSpPr>
+          <p:cNvPr id="16" name="TextBox 15"/>
+          <p:cNvSpPr txBox="1"/>
+          <p:nvPr/>
+        </p:nvSpPr>
+        <p:spPr>
+          <a:xfrm>
+            <a:off x="822960" y="4434840"/>
+            <a:ext cx="10515600" cy="548640"/>
+          </a:xfrm>
+          <a:prstGeom prst="rect">
+            <a:avLst/>
+          </a:prstGeom>
+          <a:noFill/>
+        </p:spPr>
+        <p:txBody>
+          <a:bodyPr wrap="square">
+            <a:spAutoFit/>
+          </a:bodyPr>
+          <a:lstStyle/>
+          <a:p>
+            <a:pPr algn="l">
+              <a:lnSpc>
+                <a:spcPct val="115000"/>
+              </a:lnSpc>
+            </a:pPr>
+            <a:r>
+              <a:rPr sz="1300" b="0" i="0">
+                <a:solidFill>
+                  <a:srgbClr val="1F2A28"/>
+                </a:solidFill>
+                <a:latin typeface="Calibri"/>
+              </a:rPr>
+              <a:t>Cumulative TSR reflects every round played so far; a single strong round of profit does not erase a weaker history.</a:t>
+            </a:r>
+          </a:p>
+        </p:txBody>
+      </p:sp>
+      <p:sp>
+        <p:nvSpPr>
+          <p:cNvPr id="17" name="Rectangle 16"/>
+          <p:cNvSpPr/>
+          <p:nvPr/>
+        </p:nvSpPr>
+        <p:spPr>
+          <a:xfrm>
+            <a:off x="0" y="6812280"/>
+            <a:ext cx="12191695" cy="45720"/>
+          </a:xfrm>
+          <a:prstGeom prst="rect">
+            <a:avLst/>
+          </a:prstGeom>
+          <a:solidFill>
+            <a:srgbClr val="78A79B"/>
+          </a:solidFill>
+          <a:ln>
+            <a:noFill/>
+          </a:ln>
+          <a:effectLst/>
+        </p:spPr>
+        <p:style>
+          <a:lnRef idx="1">
+            <a:schemeClr val="accent1"/>
+          </a:lnRef>
+          <a:fillRef idx="3">
+            <a:schemeClr val="accent1"/>
+          </a:fillRef>
+          <a:effectRef idx="2">
+            <a:schemeClr val="accent1"/>
+          </a:effectRef>
+          <a:fontRef idx="minor">
+            <a:schemeClr val="lt1"/>
+          </a:fontRef>
+        </p:style>
+        <p:txBody>
+          <a:bodyPr rtlCol="0" anchor="ctr"/>
+          <a:lstStyle/>
+          <a:p>
+            <a:pPr algn="ctr"/>
+          </a:p>
+        </p:txBody>
+      </p:sp>
+      <p:sp>
+        <p:nvSpPr>
+          <p:cNvPr id="18" name="TextBox 17"/>
+          <p:cNvSpPr txBox="1"/>
+          <p:nvPr/>
+        </p:nvSpPr>
+        <p:spPr>
+          <a:xfrm>
+            <a:off x="365760" y="6473952"/>
+            <a:ext cx="7315200" cy="274320"/>
+          </a:xfrm>
+          <a:prstGeom prst="rect">
+            <a:avLst/>
+          </a:prstGeom>
+          <a:noFill/>
+        </p:spPr>
+        <p:txBody>
+          <a:bodyPr wrap="square">
+            <a:spAutoFit/>
+          </a:bodyPr>
+          <a:lstStyle/>
+          <a:p>
+            <a:pPr algn="l">
+              <a:lnSpc>
+                <a:spcPct val="115000"/>
+              </a:lnSpc>
+            </a:pPr>
+            <a:r>
               <a:rPr sz="1000" b="0" i="0">
                 <a:solidFill>
-                  <a:srgbClr val="4A5552"/>
+                  <a:srgbClr val="55605D"/>
                 </a:solidFill>
                 <a:latin typeface="Calibri"/>
               </a:rPr>
@@ -5025,7 +7424,7 @@
       </p:sp>
       <p:sp>
         <p:nvSpPr>
-          <p:cNvPr id="7" name="TextBox 6"/>
+          <p:cNvPr id="19" name="TextBox 18"/>
           <p:cNvSpPr txBox="1"/>
           <p:nvPr/>
         </p:nvSpPr>
@@ -5053,7 +7452,7 @@
             <a:r>
               <a:rPr sz="1000" b="0" i="0">
                 <a:solidFill>
-                  <a:srgbClr val="4A5552"/>
+                  <a:srgbClr val="55605D"/>
                 </a:solidFill>
                 <a:latin typeface="Calibri"/>
               </a:rPr>
@@ -5073,6 +7472,14 @@
 <file path=ppt/slides/slide5.xml><?xml version="1.0" encoding="utf-8"?>
 <p:sld xmlns:a="http://schemas.openxmlformats.org/drawingml/2006/main" xmlns:p="http://schemas.openxmlformats.org/presentationml/2006/main" xmlns:r="http://schemas.openxmlformats.org/officeDocument/2006/relationships">
   <p:cSld>
+    <p:bg>
+      <p:bgPr>
+        <a:solidFill>
+          <a:srgbClr val="F7F5F0"/>
+        </a:solidFill>
+        <a:effectLst/>
+      </p:bgPr>
+    </p:bg>
     <p:spTree>
       <p:nvGrpSpPr>
         <p:cNvPr id="1" name=""/>
@@ -5082,14 +7489,58 @@
       <p:grpSpPr/>
       <p:sp>
         <p:nvSpPr>
-          <p:cNvPr id="2" name="TextBox 1"/>
+          <p:cNvPr id="2" name="Rectangle 1"/>
+          <p:cNvSpPr/>
+          <p:nvPr/>
+        </p:nvSpPr>
+        <p:spPr>
+          <a:xfrm>
+            <a:off x="502920" y="384048"/>
+            <a:ext cx="320040" cy="54864"/>
+          </a:xfrm>
+          <a:prstGeom prst="rect">
+            <a:avLst/>
+          </a:prstGeom>
+          <a:solidFill>
+            <a:srgbClr val="78A79B"/>
+          </a:solidFill>
+          <a:ln>
+            <a:noFill/>
+          </a:ln>
+          <a:effectLst/>
+        </p:spPr>
+        <p:style>
+          <a:lnRef idx="1">
+            <a:schemeClr val="accent1"/>
+          </a:lnRef>
+          <a:fillRef idx="3">
+            <a:schemeClr val="accent1"/>
+          </a:fillRef>
+          <a:effectRef idx="2">
+            <a:schemeClr val="accent1"/>
+          </a:effectRef>
+          <a:fontRef idx="minor">
+            <a:schemeClr val="lt1"/>
+          </a:fontRef>
+        </p:style>
+        <p:txBody>
+          <a:bodyPr rtlCol="0" anchor="ctr"/>
+          <a:lstStyle/>
+          <a:p>
+            <a:pPr algn="ctr"/>
+          </a:p>
+        </p:txBody>
+      </p:sp>
+      <p:sp>
+        <p:nvSpPr>
+          <p:cNvPr id="3" name="TextBox 2"/>
           <p:cNvSpPr txBox="1"/>
           <p:nvPr/>
         </p:nvSpPr>
         <p:spPr>
           <a:xfrm>
-            <a:off x="502920" y="320040"/>
-            <a:ext cx="10058400" cy="320040"/>
+            <a:off x="502920" y="475488"/>
+            <a:ext cx="10058400" cy="292608"/>
           </a:xfrm>
           <a:prstGeom prst="rect">
             <a:avLst/>
@@ -5121,14 +7572,14 @@
       </p:sp>
       <p:sp>
         <p:nvSpPr>
-          <p:cNvPr id="3" name="TextBox 2"/>
+          <p:cNvPr id="4" name="TextBox 3"/>
           <p:cNvSpPr txBox="1"/>
           <p:nvPr/>
         </p:nvSpPr>
         <p:spPr>
           <a:xfrm>
-            <a:off x="502920" y="621792"/>
-            <a:ext cx="11155680" cy="685800"/>
+            <a:off x="502920" y="758952"/>
+            <a:ext cx="11155680" cy="658368"/>
           </a:xfrm>
           <a:prstGeom prst="rect">
             <a:avLst/>
@@ -5147,7 +7598,7 @@
               </a:lnSpc>
             </a:pPr>
             <a:r>
-              <a:rPr sz="2400" b="1" i="0">
+              <a:rPr sz="2500" b="1" i="0">
                 <a:solidFill>
                   <a:srgbClr val="1F2A28"/>
                 </a:solidFill>
@@ -5160,14 +7611,62 @@
       </p:sp>
       <p:sp>
         <p:nvSpPr>
-          <p:cNvPr id="4" name="TextBox 3"/>
+          <p:cNvPr id="5" name="Rounded Rectangle 4"/>
+          <p:cNvSpPr/>
+          <p:nvPr/>
+        </p:nvSpPr>
+        <p:spPr>
+          <a:xfrm>
+            <a:off x="548640" y="1874519"/>
+            <a:ext cx="5394960" cy="2103120"/>
+          </a:xfrm>
+          <a:prstGeom prst="roundRect">
+            <a:avLst>
+              <a:gd name="adj" fmla="val 8000"/>
+            </a:avLst>
+          </a:prstGeom>
+          <a:solidFill>
+            <a:srgbClr val="FCFBF8"/>
+          </a:solidFill>
+          <a:ln w="9525">
+            <a:solidFill>
+              <a:srgbClr val="C3D8C5"/>
+            </a:solidFill>
+          </a:ln>
+          <a:effectLst/>
+        </p:spPr>
+        <p:style>
+          <a:lnRef idx="1">
+            <a:schemeClr val="accent1"/>
+          </a:lnRef>
+          <a:fillRef idx="3">
+            <a:schemeClr val="accent1"/>
+          </a:fillRef>
+          <a:effectRef idx="2">
+            <a:schemeClr val="accent1"/>
+          </a:effectRef>
+          <a:fontRef idx="minor">
+            <a:schemeClr val="lt1"/>
+          </a:fontRef>
+        </p:style>
+        <p:txBody>
+          <a:bodyPr rtlCol="0" anchor="ctr"/>
+          <a:lstStyle/>
+          <a:p>
+            <a:pPr algn="ctr"/>
+          </a:p>
+        </p:txBody>
+      </p:sp>
+      <p:sp>
+        <p:nvSpPr>
+          <p:cNvPr id="6" name="TextBox 5"/>
           <p:cNvSpPr txBox="1"/>
           <p:nvPr/>
         </p:nvSpPr>
         <p:spPr>
           <a:xfrm>
-            <a:off x="548640" y="1828800"/>
-            <a:ext cx="5394960" cy="2743200"/>
+            <a:off x="777240" y="2057400"/>
+            <a:ext cx="4937760" cy="274320"/>
           </a:xfrm>
           <a:prstGeom prst="rect">
             <a:avLst/>
@@ -5180,55 +7679,33 @@
           </a:bodyPr>
           <a:lstStyle/>
           <a:p>
-            <a:pPr>
+            <a:pPr algn="l">
               <a:lnSpc>
-                <a:spcPct val="112000"/>
+                <a:spcPct val="115000"/>
               </a:lnSpc>
-              <a:spcAft>
-                <a:spcPts val="864"/>
-              </a:spcAft>
             </a:pPr>
             <a:r>
-              <a:rPr sz="1400" b="0" i="0">
-                <a:solidFill>
-                  <a:srgbClr val="1F2A28"/>
-                </a:solidFill>
-                <a:latin typeface="Calibri"/>
-              </a:rPr>
-              <a:t>•  Universe 1's biggest R&amp;D swing:</a:t>
-            </a:r>
-          </a:p>
-          <a:p>
-            <a:pPr>
-              <a:lnSpc>
-                <a:spcPct val="112000"/>
-              </a:lnSpc>
-              <a:spcAft>
-                <a:spcPts val="864"/>
-              </a:spcAft>
-            </a:pPr>
-            <a:r>
-              <a:rPr sz="1400" b="0" i="0">
-                <a:solidFill>
-                  <a:srgbClr val="1F2A28"/>
-                </a:solidFill>
-                <a:latin typeface="Calibri"/>
-              </a:rPr>
-              <a:t>•  Grey: R&amp;D $661m → $9m (down sharply), finishing at -4.12% TSR.</a:t>
-            </a:r>
-          </a:p>
-        </p:txBody>
-      </p:sp>
-      <p:sp>
-        <p:nvSpPr>
-          <p:cNvPr id="5" name="TextBox 4"/>
+              <a:rPr sz="1100" b="1" i="0">
+                <a:solidFill>
+                  <a:srgbClr val="78A79B"/>
+                </a:solidFill>
+                <a:latin typeface="Calibri"/>
+              </a:rPr>
+              <a:t>UNIVERSE 1</a:t>
+            </a:r>
+          </a:p>
+        </p:txBody>
+      </p:sp>
+      <p:sp>
+        <p:nvSpPr>
+          <p:cNvPr id="7" name="TextBox 6"/>
           <p:cNvSpPr txBox="1"/>
           <p:nvPr/>
         </p:nvSpPr>
         <p:spPr>
           <a:xfrm>
-            <a:off x="6217920" y="1828800"/>
-            <a:ext cx="5394960" cy="2743200"/>
+            <a:off x="777240" y="2377440"/>
+            <a:ext cx="4937760" cy="457200"/>
           </a:xfrm>
           <a:prstGeom prst="rect">
             <a:avLst/>
@@ -5241,54 +7718,268 @@
           </a:bodyPr>
           <a:lstStyle/>
           <a:p>
-            <a:pPr>
+            <a:pPr algn="l">
               <a:lnSpc>
-                <a:spcPct val="112000"/>
+                <a:spcPct val="115000"/>
               </a:lnSpc>
-              <a:spcAft>
-                <a:spcPts val="864"/>
-              </a:spcAft>
             </a:pPr>
             <a:r>
-              <a:rPr sz="1400" b="0" i="0">
+              <a:rPr sz="1900" b="1" i="0">
                 <a:solidFill>
                   <a:srgbClr val="1F2A28"/>
                 </a:solidFill>
                 <a:latin typeface="Calibri"/>
               </a:rPr>
-              <a:t>•  Universe 2's biggest R&amp;D swing:</a:t>
-            </a:r>
-          </a:p>
-          <a:p>
-            <a:pPr>
+              <a:t>Grey</a:t>
+            </a:r>
+          </a:p>
+        </p:txBody>
+      </p:sp>
+      <p:sp>
+        <p:nvSpPr>
+          <p:cNvPr id="8" name="TextBox 7"/>
+          <p:cNvSpPr txBox="1"/>
+          <p:nvPr/>
+        </p:nvSpPr>
+        <p:spPr>
+          <a:xfrm>
+            <a:off x="777240" y="2880360"/>
+            <a:ext cx="4937760" cy="822960"/>
+          </a:xfrm>
+          <a:prstGeom prst="rect">
+            <a:avLst/>
+          </a:prstGeom>
+          <a:noFill/>
+        </p:spPr>
+        <p:txBody>
+          <a:bodyPr wrap="square">
+            <a:spAutoFit/>
+          </a:bodyPr>
+          <a:lstStyle/>
+          <a:p>
+            <a:pPr algn="l">
               <a:lnSpc>
-                <a:spcPct val="112000"/>
+                <a:spcPct val="130000"/>
               </a:lnSpc>
-              <a:spcAft>
-                <a:spcPts val="864"/>
-              </a:spcAft>
             </a:pPr>
             <a:r>
-              <a:rPr sz="1400" b="0" i="0">
+              <a:rPr sz="1350" b="0" i="0">
+                <a:solidFill>
+                  <a:srgbClr val="55605D"/>
+                </a:solidFill>
+                <a:latin typeface="Calibri"/>
+              </a:rPr>
+              <a:t>R&amp;D $661m → $9m (down sharply)</a:t>
+            </a:r>
+          </a:p>
+          <a:p>
+            <a:pPr algn="l">
+              <a:lnSpc>
+                <a:spcPct val="130000"/>
+              </a:lnSpc>
+            </a:pPr>
+            <a:r>
+              <a:rPr sz="1350" b="0" i="0">
+                <a:solidFill>
+                  <a:srgbClr val="55605D"/>
+                </a:solidFill>
+                <a:latin typeface="Calibri"/>
+              </a:rPr>
+              <a:t>Finished at -4.12% TSR</a:t>
+            </a:r>
+          </a:p>
+        </p:txBody>
+      </p:sp>
+      <p:sp>
+        <p:nvSpPr>
+          <p:cNvPr id="9" name="Rounded Rectangle 8"/>
+          <p:cNvSpPr/>
+          <p:nvPr/>
+        </p:nvSpPr>
+        <p:spPr>
+          <a:xfrm>
+            <a:off x="6217920" y="1874519"/>
+            <a:ext cx="5394960" cy="2103120"/>
+          </a:xfrm>
+          <a:prstGeom prst="roundRect">
+            <a:avLst>
+              <a:gd name="adj" fmla="val 8000"/>
+            </a:avLst>
+          </a:prstGeom>
+          <a:solidFill>
+            <a:srgbClr val="FCFBF8"/>
+          </a:solidFill>
+          <a:ln w="9525">
+            <a:solidFill>
+              <a:srgbClr val="C3D8C5"/>
+            </a:solidFill>
+          </a:ln>
+          <a:effectLst/>
+        </p:spPr>
+        <p:style>
+          <a:lnRef idx="1">
+            <a:schemeClr val="accent1"/>
+          </a:lnRef>
+          <a:fillRef idx="3">
+            <a:schemeClr val="accent1"/>
+          </a:fillRef>
+          <a:effectRef idx="2">
+            <a:schemeClr val="accent1"/>
+          </a:effectRef>
+          <a:fontRef idx="minor">
+            <a:schemeClr val="lt1"/>
+          </a:fontRef>
+        </p:style>
+        <p:txBody>
+          <a:bodyPr rtlCol="0" anchor="ctr"/>
+          <a:lstStyle/>
+          <a:p>
+            <a:pPr algn="ctr"/>
+          </a:p>
+        </p:txBody>
+      </p:sp>
+      <p:sp>
+        <p:nvSpPr>
+          <p:cNvPr id="10" name="TextBox 9"/>
+          <p:cNvSpPr txBox="1"/>
+          <p:nvPr/>
+        </p:nvSpPr>
+        <p:spPr>
+          <a:xfrm>
+            <a:off x="6446520" y="2057400"/>
+            <a:ext cx="4937760" cy="274320"/>
+          </a:xfrm>
+          <a:prstGeom prst="rect">
+            <a:avLst/>
+          </a:prstGeom>
+          <a:noFill/>
+        </p:spPr>
+        <p:txBody>
+          <a:bodyPr wrap="square">
+            <a:spAutoFit/>
+          </a:bodyPr>
+          <a:lstStyle/>
+          <a:p>
+            <a:pPr algn="l">
+              <a:lnSpc>
+                <a:spcPct val="115000"/>
+              </a:lnSpc>
+            </a:pPr>
+            <a:r>
+              <a:rPr sz="1100" b="1" i="0">
+                <a:solidFill>
+                  <a:srgbClr val="78A79B"/>
+                </a:solidFill>
+                <a:latin typeface="Calibri"/>
+              </a:rPr>
+              <a:t>UNIVERSE 2</a:t>
+            </a:r>
+          </a:p>
+        </p:txBody>
+      </p:sp>
+      <p:sp>
+        <p:nvSpPr>
+          <p:cNvPr id="11" name="TextBox 10"/>
+          <p:cNvSpPr txBox="1"/>
+          <p:nvPr/>
+        </p:nvSpPr>
+        <p:spPr>
+          <a:xfrm>
+            <a:off x="6446520" y="2377440"/>
+            <a:ext cx="4937760" cy="457200"/>
+          </a:xfrm>
+          <a:prstGeom prst="rect">
+            <a:avLst/>
+          </a:prstGeom>
+          <a:noFill/>
+        </p:spPr>
+        <p:txBody>
+          <a:bodyPr wrap="square">
+            <a:spAutoFit/>
+          </a:bodyPr>
+          <a:lstStyle/>
+          <a:p>
+            <a:pPr algn="l">
+              <a:lnSpc>
+                <a:spcPct val="115000"/>
+              </a:lnSpc>
+            </a:pPr>
+            <a:r>
+              <a:rPr sz="1900" b="1" i="0">
                 <a:solidFill>
                   <a:srgbClr val="1F2A28"/>
                 </a:solidFill>
                 <a:latin typeface="Calibri"/>
               </a:rPr>
-              <a:t>•  Red: R&amp;D $16m → $611m (up sharply), finishing at -15.74% TSR.</a:t>
-            </a:r>
-          </a:p>
-        </p:txBody>
-      </p:sp>
-      <p:sp>
-        <p:nvSpPr>
-          <p:cNvPr id="6" name="Rounded Rectangle 5"/>
+              <a:t>Red</a:t>
+            </a:r>
+          </a:p>
+        </p:txBody>
+      </p:sp>
+      <p:sp>
+        <p:nvSpPr>
+          <p:cNvPr id="12" name="TextBox 11"/>
+          <p:cNvSpPr txBox="1"/>
+          <p:nvPr/>
+        </p:nvSpPr>
+        <p:spPr>
+          <a:xfrm>
+            <a:off x="6446520" y="2880360"/>
+            <a:ext cx="4937760" cy="822960"/>
+          </a:xfrm>
+          <a:prstGeom prst="rect">
+            <a:avLst/>
+          </a:prstGeom>
+          <a:noFill/>
+        </p:spPr>
+        <p:txBody>
+          <a:bodyPr wrap="square">
+            <a:spAutoFit/>
+          </a:bodyPr>
+          <a:lstStyle/>
+          <a:p>
+            <a:pPr algn="l">
+              <a:lnSpc>
+                <a:spcPct val="130000"/>
+              </a:lnSpc>
+            </a:pPr>
+            <a:r>
+              <a:rPr sz="1350" b="0" i="0">
+                <a:solidFill>
+                  <a:srgbClr val="55605D"/>
+                </a:solidFill>
+                <a:latin typeface="Calibri"/>
+              </a:rPr>
+              <a:t>R&amp;D $16m → $611m (up sharply)</a:t>
+            </a:r>
+          </a:p>
+          <a:p>
+            <a:pPr algn="l">
+              <a:lnSpc>
+                <a:spcPct val="130000"/>
+              </a:lnSpc>
+            </a:pPr>
+            <a:r>
+              <a:rPr sz="1350" b="0" i="0">
+                <a:solidFill>
+                  <a:srgbClr val="55605D"/>
+                </a:solidFill>
+                <a:latin typeface="Calibri"/>
+              </a:rPr>
+              <a:t>Finished at -15.74% TSR</a:t>
+            </a:r>
+          </a:p>
+        </p:txBody>
+      </p:sp>
+      <p:sp>
+        <p:nvSpPr>
+          <p:cNvPr id="13" name="Rounded Rectangle 12"/>
           <p:cNvSpPr/>
           <p:nvPr/>
         </p:nvSpPr>
         <p:spPr>
           <a:xfrm>
-            <a:off x="548640" y="4572000"/>
+            <a:off x="548640" y="4251960"/>
             <a:ext cx="11064240" cy="868680"/>
           </a:xfrm>
           <a:prstGeom prst="roundRect">
@@ -5328,14 +8019,14 @@
       </p:sp>
       <p:sp>
         <p:nvSpPr>
-          <p:cNvPr id="7" name="TextBox 6"/>
+          <p:cNvPr id="14" name="TextBox 13"/>
           <p:cNvSpPr txBox="1"/>
           <p:nvPr/>
         </p:nvSpPr>
         <p:spPr>
           <a:xfrm>
-            <a:off x="777240" y="4754880"/>
-            <a:ext cx="10607040" cy="502920"/>
+            <a:off x="822960" y="4434840"/>
+            <a:ext cx="10515600" cy="548640"/>
           </a:xfrm>
           <a:prstGeom prst="rect">
             <a:avLst/>
@@ -5360,14 +8051,14 @@
                 </a:solidFill>
                 <a:latin typeface="Calibri"/>
               </a:rPr>
-              <a:t>A large R&amp;D swing is a hypothesis about future demand — it only pays off if the market actually rewards it in share and margin.</a:t>
-            </a:r>
-          </a:p>
-        </p:txBody>
-      </p:sp>
-      <p:sp>
-        <p:nvSpPr>
-          <p:cNvPr id="8" name="Rectangle 7"/>
+              <a:t>A large R&amp;D swing is a hypothesis about future demand — it only pays off if the market rewards it in share and margin.</a:t>
+            </a:r>
+          </a:p>
+        </p:txBody>
+      </p:sp>
+      <p:sp>
+        <p:nvSpPr>
+          <p:cNvPr id="15" name="Rectangle 14"/>
           <p:cNvSpPr/>
           <p:nvPr/>
         </p:nvSpPr>
@@ -5411,7 +8102,7 @@
       </p:sp>
       <p:sp>
         <p:nvSpPr>
-          <p:cNvPr id="9" name="TextBox 8"/>
+          <p:cNvPr id="16" name="TextBox 15"/>
           <p:cNvSpPr txBox="1"/>
           <p:nvPr/>
         </p:nvSpPr>
@@ -5439,7 +8130,7 @@
             <a:r>
               <a:rPr sz="1000" b="0" i="0">
                 <a:solidFill>
-                  <a:srgbClr val="4A5552"/>
+                  <a:srgbClr val="55605D"/>
                 </a:solidFill>
                 <a:latin typeface="Calibri"/>
               </a:rPr>
@@ -5450,7 +8141,7 @@
       </p:sp>
       <p:sp>
         <p:nvSpPr>
-          <p:cNvPr id="10" name="TextBox 9"/>
+          <p:cNvPr id="17" name="TextBox 16"/>
           <p:cNvSpPr txBox="1"/>
           <p:nvPr/>
         </p:nvSpPr>
@@ -5478,7 +8169,7 @@
             <a:r>
               <a:rPr sz="1000" b="0" i="0">
                 <a:solidFill>
-                  <a:srgbClr val="4A5552"/>
+                  <a:srgbClr val="55605D"/>
                 </a:solidFill>
                 <a:latin typeface="Calibri"/>
               </a:rPr>
@@ -5498,6 +8189,14 @@
 <file path=ppt/slides/slide6.xml><?xml version="1.0" encoding="utf-8"?>
 <p:sld xmlns:a="http://schemas.openxmlformats.org/drawingml/2006/main" xmlns:p="http://schemas.openxmlformats.org/presentationml/2006/main" xmlns:r="http://schemas.openxmlformats.org/officeDocument/2006/relationships">
   <p:cSld>
+    <p:bg>
+      <p:bgPr>
+        <a:solidFill>
+          <a:srgbClr val="FFFFFF"/>
+        </a:solidFill>
+        <a:effectLst/>
+      </p:bgPr>
+    </p:bg>
     <p:spTree>
       <p:nvGrpSpPr>
         <p:cNvPr id="1" name=""/>
@@ -5507,191 +8206,14 @@
       <p:grpSpPr/>
       <p:sp>
         <p:nvSpPr>
-          <p:cNvPr id="2" name="TextBox 1"/>
-          <p:cNvSpPr txBox="1"/>
-          <p:nvPr/>
-        </p:nvSpPr>
-        <p:spPr>
-          <a:xfrm>
-            <a:off x="502920" y="320040"/>
-            <a:ext cx="10058400" cy="320040"/>
-          </a:xfrm>
-          <a:prstGeom prst="rect">
-            <a:avLst/>
-          </a:prstGeom>
-          <a:noFill/>
-        </p:spPr>
-        <p:txBody>
-          <a:bodyPr wrap="square">
-            <a:spAutoFit/>
-          </a:bodyPr>
-          <a:lstStyle/>
-          <a:p>
-            <a:pPr algn="l">
-              <a:lnSpc>
-                <a:spcPct val="115000"/>
-              </a:lnSpc>
-            </a:pPr>
-            <a:r>
-              <a:rPr sz="1100" b="1" i="0">
-                <a:solidFill>
-                  <a:srgbClr val="78A79B"/>
-                </a:solidFill>
-                <a:latin typeface="Calibri"/>
-              </a:rPr>
-              <a:t>05 / CREDIT QUALITY</a:t>
-            </a:r>
-          </a:p>
-        </p:txBody>
-      </p:sp>
-      <p:sp>
-        <p:nvSpPr>
-          <p:cNvPr id="3" name="TextBox 2"/>
-          <p:cNvSpPr txBox="1"/>
-          <p:nvPr/>
-        </p:nvSpPr>
-        <p:spPr>
-          <a:xfrm>
-            <a:off x="502920" y="621792"/>
-            <a:ext cx="11155680" cy="685800"/>
-          </a:xfrm>
-          <a:prstGeom prst="rect">
-            <a:avLst/>
-          </a:prstGeom>
-          <a:noFill/>
-        </p:spPr>
-        <p:txBody>
-          <a:bodyPr wrap="square">
-            <a:spAutoFit/>
-          </a:bodyPr>
-          <a:lstStyle/>
-          <a:p>
-            <a:pPr algn="l">
-              <a:lnSpc>
-                <a:spcPct val="115000"/>
-              </a:lnSpc>
-            </a:pPr>
-            <a:r>
-              <a:rPr sz="2400" b="1" i="0">
-                <a:solidFill>
-                  <a:srgbClr val="1F2A28"/>
-                </a:solidFill>
-                <a:latin typeface="Calibri"/>
-              </a:rPr>
-              <a:t>Where credit quality is strongest and weakest across both universes.</a:t>
-            </a:r>
-          </a:p>
-        </p:txBody>
-      </p:sp>
-      <p:sp>
-        <p:nvSpPr>
-          <p:cNvPr id="4" name="TextBox 3"/>
-          <p:cNvSpPr txBox="1"/>
-          <p:nvPr/>
-        </p:nvSpPr>
-        <p:spPr>
-          <a:xfrm>
-            <a:off x="548640" y="1828800"/>
-            <a:ext cx="10789920" cy="2377440"/>
-          </a:xfrm>
-          <a:prstGeom prst="rect">
-            <a:avLst/>
-          </a:prstGeom>
-          <a:noFill/>
-        </p:spPr>
-        <p:txBody>
-          <a:bodyPr wrap="square">
-            <a:spAutoFit/>
-          </a:bodyPr>
-          <a:lstStyle/>
-          <a:p>
-            <a:pPr>
-              <a:lnSpc>
-                <a:spcPct val="112000"/>
-              </a:lnSpc>
-              <a:spcAft>
-                <a:spcPts val="864"/>
-              </a:spcAft>
-            </a:pPr>
-            <a:r>
-              <a:rPr sz="1500" b="0" i="0">
-                <a:solidFill>
-                  <a:srgbClr val="1F2A28"/>
-                </a:solidFill>
-                <a:latin typeface="Calibri"/>
-              </a:rPr>
-              <a:t>•  Strongest credit quality: Ochre (Universe 1) at AAA.</a:t>
-            </a:r>
-          </a:p>
-          <a:p>
-            <a:pPr>
-              <a:lnSpc>
-                <a:spcPct val="112000"/>
-              </a:lnSpc>
-              <a:spcAft>
-                <a:spcPts val="864"/>
-              </a:spcAft>
-            </a:pPr>
-            <a:r>
-              <a:rPr sz="1500" b="0" i="0">
-                <a:solidFill>
-                  <a:srgbClr val="1F2A28"/>
-                </a:solidFill>
-                <a:latin typeface="Calibri"/>
-              </a:rPr>
-              <a:t>•  Weakest credit quality: Red (Universe 2) at C.</a:t>
-            </a:r>
-          </a:p>
-          <a:p>
-            <a:pPr>
-              <a:lnSpc>
-                <a:spcPct val="112000"/>
-              </a:lnSpc>
-              <a:spcAft>
-                <a:spcPts val="864"/>
-              </a:spcAft>
-            </a:pPr>
-            <a:r>
-              <a:rPr sz="1500" b="0" i="0">
-                <a:solidFill>
-                  <a:srgbClr val="1F2A28"/>
-                </a:solidFill>
-                <a:latin typeface="Calibri"/>
-              </a:rPr>
-              <a:t>•  Universe 1 saw 5 teams change credit rating this round; Universe 2 saw 5.</a:t>
-            </a:r>
-          </a:p>
-          <a:p>
-            <a:pPr>
-              <a:lnSpc>
-                <a:spcPct val="112000"/>
-              </a:lnSpc>
-              <a:spcAft>
-                <a:spcPts val="864"/>
-              </a:spcAft>
-            </a:pPr>
-            <a:r>
-              <a:rPr sz="1500" b="0" i="0">
-                <a:solidFill>
-                  <a:srgbClr val="1F2A28"/>
-                </a:solidFill>
-                <a:latin typeface="Calibri"/>
-              </a:rPr>
-              <a:t>•  A credit downgrade compounds: it raises the cost of the next round's financing choices, not just this round's.</a:t>
-            </a:r>
-          </a:p>
-        </p:txBody>
-      </p:sp>
-      <p:sp>
-        <p:nvSpPr>
-          <p:cNvPr id="5" name="Rectangle 4"/>
+          <p:cNvPr id="2" name="Rectangle 1"/>
           <p:cNvSpPr/>
           <p:nvPr/>
         </p:nvSpPr>
         <p:spPr>
           <a:xfrm>
-            <a:off x="0" y="6812280"/>
-            <a:ext cx="12191695" cy="45720"/>
+            <a:off x="502920" y="384048"/>
+            <a:ext cx="320040" cy="54864"/>
           </a:xfrm>
           <a:prstGeom prst="rect">
             <a:avLst/>
@@ -5728,14 +8250,14 @@
       </p:sp>
       <p:sp>
         <p:nvSpPr>
-          <p:cNvPr id="6" name="TextBox 5"/>
+          <p:cNvPr id="3" name="TextBox 2"/>
           <p:cNvSpPr txBox="1"/>
           <p:nvPr/>
         </p:nvSpPr>
         <p:spPr>
           <a:xfrm>
-            <a:off x="365760" y="6473952"/>
-            <a:ext cx="7315200" cy="274320"/>
+            <a:off x="502920" y="475488"/>
+            <a:ext cx="10058400" cy="292608"/>
           </a:xfrm>
           <a:prstGeom prst="rect">
             <a:avLst/>
@@ -5754,9 +8276,1052 @@
               </a:lnSpc>
             </a:pPr>
             <a:r>
+              <a:rPr sz="1100" b="1" i="0">
+                <a:solidFill>
+                  <a:srgbClr val="78A79B"/>
+                </a:solidFill>
+                <a:latin typeface="Calibri"/>
+              </a:rPr>
+              <a:t>05 / CREDIT QUALITY</a:t>
+            </a:r>
+          </a:p>
+        </p:txBody>
+      </p:sp>
+      <p:sp>
+        <p:nvSpPr>
+          <p:cNvPr id="4" name="TextBox 3"/>
+          <p:cNvSpPr txBox="1"/>
+          <p:nvPr/>
+        </p:nvSpPr>
+        <p:spPr>
+          <a:xfrm>
+            <a:off x="502920" y="758952"/>
+            <a:ext cx="11155680" cy="658368"/>
+          </a:xfrm>
+          <a:prstGeom prst="rect">
+            <a:avLst/>
+          </a:prstGeom>
+          <a:noFill/>
+        </p:spPr>
+        <p:txBody>
+          <a:bodyPr wrap="square">
+            <a:spAutoFit/>
+          </a:bodyPr>
+          <a:lstStyle/>
+          <a:p>
+            <a:pPr algn="l">
+              <a:lnSpc>
+                <a:spcPct val="115000"/>
+              </a:lnSpc>
+            </a:pPr>
+            <a:r>
+              <a:rPr sz="2500" b="1" i="0">
+                <a:solidFill>
+                  <a:srgbClr val="1F2A28"/>
+                </a:solidFill>
+                <a:latin typeface="Calibri"/>
+              </a:rPr>
+              <a:t>Where credit quality is strongest and weakest across both universes.</a:t>
+            </a:r>
+          </a:p>
+        </p:txBody>
+      </p:sp>
+      <p:sp>
+        <p:nvSpPr>
+          <p:cNvPr id="5" name="Rounded Rectangle 4"/>
+          <p:cNvSpPr/>
+          <p:nvPr/>
+        </p:nvSpPr>
+        <p:spPr>
+          <a:xfrm>
+            <a:off x="548640" y="1920240"/>
+            <a:ext cx="2615184" cy="1417320"/>
+          </a:xfrm>
+          <a:prstGeom prst="roundRect">
+            <a:avLst>
+              <a:gd name="adj" fmla="val 10000"/>
+            </a:avLst>
+          </a:prstGeom>
+          <a:solidFill>
+            <a:srgbClr val="FCFBF8"/>
+          </a:solidFill>
+          <a:ln w="9525">
+            <a:solidFill>
+              <a:srgbClr val="C3D8C5"/>
+            </a:solidFill>
+          </a:ln>
+          <a:effectLst/>
+        </p:spPr>
+        <p:style>
+          <a:lnRef idx="1">
+            <a:schemeClr val="accent1"/>
+          </a:lnRef>
+          <a:fillRef idx="3">
+            <a:schemeClr val="accent1"/>
+          </a:fillRef>
+          <a:effectRef idx="2">
+            <a:schemeClr val="accent1"/>
+          </a:effectRef>
+          <a:fontRef idx="minor">
+            <a:schemeClr val="lt1"/>
+          </a:fontRef>
+        </p:style>
+        <p:txBody>
+          <a:bodyPr rtlCol="0" anchor="ctr"/>
+          <a:lstStyle/>
+          <a:p>
+            <a:pPr algn="ctr"/>
+          </a:p>
+        </p:txBody>
+      </p:sp>
+      <p:sp>
+        <p:nvSpPr>
+          <p:cNvPr id="6" name="Rectangle 5"/>
+          <p:cNvSpPr/>
+          <p:nvPr/>
+        </p:nvSpPr>
+        <p:spPr>
+          <a:xfrm>
+            <a:off x="548640" y="1920240"/>
+            <a:ext cx="64008" cy="1417320"/>
+          </a:xfrm>
+          <a:prstGeom prst="rect">
+            <a:avLst/>
+          </a:prstGeom>
+          <a:solidFill>
+            <a:srgbClr val="1F7A5C"/>
+          </a:solidFill>
+          <a:ln>
+            <a:noFill/>
+          </a:ln>
+          <a:effectLst/>
+        </p:spPr>
+        <p:style>
+          <a:lnRef idx="1">
+            <a:schemeClr val="accent1"/>
+          </a:lnRef>
+          <a:fillRef idx="3">
+            <a:schemeClr val="accent1"/>
+          </a:fillRef>
+          <a:effectRef idx="2">
+            <a:schemeClr val="accent1"/>
+          </a:effectRef>
+          <a:fontRef idx="minor">
+            <a:schemeClr val="lt1"/>
+          </a:fontRef>
+        </p:style>
+        <p:txBody>
+          <a:bodyPr rtlCol="0" anchor="ctr"/>
+          <a:lstStyle/>
+          <a:p>
+            <a:pPr algn="ctr"/>
+          </a:p>
+        </p:txBody>
+      </p:sp>
+      <p:sp>
+        <p:nvSpPr>
+          <p:cNvPr id="7" name="TextBox 6"/>
+          <p:cNvSpPr txBox="1"/>
+          <p:nvPr/>
+        </p:nvSpPr>
+        <p:spPr>
+          <a:xfrm>
+            <a:off x="804672" y="2066544"/>
+            <a:ext cx="2203704" cy="292608"/>
+          </a:xfrm>
+          <a:prstGeom prst="rect">
+            <a:avLst/>
+          </a:prstGeom>
+          <a:noFill/>
+        </p:spPr>
+        <p:txBody>
+          <a:bodyPr wrap="square">
+            <a:spAutoFit/>
+          </a:bodyPr>
+          <a:lstStyle/>
+          <a:p>
+            <a:pPr algn="l">
+              <a:lnSpc>
+                <a:spcPct val="115000"/>
+              </a:lnSpc>
+            </a:pPr>
+            <a:r>
+              <a:rPr sz="1000" b="1" i="0">
+                <a:solidFill>
+                  <a:srgbClr val="55605D"/>
+                </a:solidFill>
+                <a:latin typeface="Calibri"/>
+              </a:rPr>
+              <a:t>STRONGEST CREDIT (UNIVERSE 1)</a:t>
+            </a:r>
+          </a:p>
+        </p:txBody>
+      </p:sp>
+      <p:sp>
+        <p:nvSpPr>
+          <p:cNvPr id="8" name="TextBox 7"/>
+          <p:cNvSpPr txBox="1"/>
+          <p:nvPr/>
+        </p:nvSpPr>
+        <p:spPr>
+          <a:xfrm>
+            <a:off x="804672" y="2359152"/>
+            <a:ext cx="2203704" cy="731520"/>
+          </a:xfrm>
+          <a:prstGeom prst="rect">
+            <a:avLst/>
+          </a:prstGeom>
+          <a:noFill/>
+        </p:spPr>
+        <p:txBody>
+          <a:bodyPr wrap="square">
+            <a:spAutoFit/>
+          </a:bodyPr>
+          <a:lstStyle/>
+          <a:p>
+            <a:pPr algn="l">
+              <a:lnSpc>
+                <a:spcPct val="115000"/>
+              </a:lnSpc>
+            </a:pPr>
+            <a:r>
+              <a:rPr sz="2500" b="1" i="0">
+                <a:solidFill>
+                  <a:srgbClr val="1F2A28"/>
+                </a:solidFill>
+                <a:latin typeface="Calibri"/>
+              </a:rPr>
+              <a:t>Ochre</a:t>
+            </a:r>
+          </a:p>
+        </p:txBody>
+      </p:sp>
+      <p:sp>
+        <p:nvSpPr>
+          <p:cNvPr id="9" name="TextBox 8"/>
+          <p:cNvSpPr txBox="1"/>
+          <p:nvPr/>
+        </p:nvSpPr>
+        <p:spPr>
+          <a:xfrm>
+            <a:off x="804672" y="3026664"/>
+            <a:ext cx="2203704" cy="274320"/>
+          </a:xfrm>
+          <a:prstGeom prst="rect">
+            <a:avLst/>
+          </a:prstGeom>
+          <a:noFill/>
+        </p:spPr>
+        <p:txBody>
+          <a:bodyPr wrap="square">
+            <a:spAutoFit/>
+          </a:bodyPr>
+          <a:lstStyle/>
+          <a:p>
+            <a:pPr algn="l">
+              <a:lnSpc>
+                <a:spcPct val="115000"/>
+              </a:lnSpc>
+            </a:pPr>
+            <a:r>
+              <a:rPr sz="1050" b="0" i="0">
+                <a:solidFill>
+                  <a:srgbClr val="55605D"/>
+                </a:solidFill>
+                <a:latin typeface="Calibri"/>
+              </a:rPr>
+              <a:t>AAA</a:t>
+            </a:r>
+          </a:p>
+        </p:txBody>
+      </p:sp>
+      <p:sp>
+        <p:nvSpPr>
+          <p:cNvPr id="10" name="Rounded Rectangle 9"/>
+          <p:cNvSpPr/>
+          <p:nvPr/>
+        </p:nvSpPr>
+        <p:spPr>
+          <a:xfrm>
+            <a:off x="3364992" y="1920240"/>
+            <a:ext cx="2615184" cy="1417320"/>
+          </a:xfrm>
+          <a:prstGeom prst="roundRect">
+            <a:avLst>
+              <a:gd name="adj" fmla="val 10000"/>
+            </a:avLst>
+          </a:prstGeom>
+          <a:solidFill>
+            <a:srgbClr val="FCFBF8"/>
+          </a:solidFill>
+          <a:ln w="9525">
+            <a:solidFill>
+              <a:srgbClr val="C3D8C5"/>
+            </a:solidFill>
+          </a:ln>
+          <a:effectLst/>
+        </p:spPr>
+        <p:style>
+          <a:lnRef idx="1">
+            <a:schemeClr val="accent1"/>
+          </a:lnRef>
+          <a:fillRef idx="3">
+            <a:schemeClr val="accent1"/>
+          </a:fillRef>
+          <a:effectRef idx="2">
+            <a:schemeClr val="accent1"/>
+          </a:effectRef>
+          <a:fontRef idx="minor">
+            <a:schemeClr val="lt1"/>
+          </a:fontRef>
+        </p:style>
+        <p:txBody>
+          <a:bodyPr rtlCol="0" anchor="ctr"/>
+          <a:lstStyle/>
+          <a:p>
+            <a:pPr algn="ctr"/>
+          </a:p>
+        </p:txBody>
+      </p:sp>
+      <p:sp>
+        <p:nvSpPr>
+          <p:cNvPr id="11" name="Rectangle 10"/>
+          <p:cNvSpPr/>
+          <p:nvPr/>
+        </p:nvSpPr>
+        <p:spPr>
+          <a:xfrm>
+            <a:off x="3364992" y="1920240"/>
+            <a:ext cx="64008" cy="1417320"/>
+          </a:xfrm>
+          <a:prstGeom prst="rect">
+            <a:avLst/>
+          </a:prstGeom>
+          <a:solidFill>
+            <a:srgbClr val="B33A3A"/>
+          </a:solidFill>
+          <a:ln>
+            <a:noFill/>
+          </a:ln>
+          <a:effectLst/>
+        </p:spPr>
+        <p:style>
+          <a:lnRef idx="1">
+            <a:schemeClr val="accent1"/>
+          </a:lnRef>
+          <a:fillRef idx="3">
+            <a:schemeClr val="accent1"/>
+          </a:fillRef>
+          <a:effectRef idx="2">
+            <a:schemeClr val="accent1"/>
+          </a:effectRef>
+          <a:fontRef idx="minor">
+            <a:schemeClr val="lt1"/>
+          </a:fontRef>
+        </p:style>
+        <p:txBody>
+          <a:bodyPr rtlCol="0" anchor="ctr"/>
+          <a:lstStyle/>
+          <a:p>
+            <a:pPr algn="ctr"/>
+          </a:p>
+        </p:txBody>
+      </p:sp>
+      <p:sp>
+        <p:nvSpPr>
+          <p:cNvPr id="12" name="TextBox 11"/>
+          <p:cNvSpPr txBox="1"/>
+          <p:nvPr/>
+        </p:nvSpPr>
+        <p:spPr>
+          <a:xfrm>
+            <a:off x="3621024" y="2066544"/>
+            <a:ext cx="2203704" cy="292608"/>
+          </a:xfrm>
+          <a:prstGeom prst="rect">
+            <a:avLst/>
+          </a:prstGeom>
+          <a:noFill/>
+        </p:spPr>
+        <p:txBody>
+          <a:bodyPr wrap="square">
+            <a:spAutoFit/>
+          </a:bodyPr>
+          <a:lstStyle/>
+          <a:p>
+            <a:pPr algn="l">
+              <a:lnSpc>
+                <a:spcPct val="115000"/>
+              </a:lnSpc>
+            </a:pPr>
+            <a:r>
+              <a:rPr sz="1000" b="1" i="0">
+                <a:solidFill>
+                  <a:srgbClr val="55605D"/>
+                </a:solidFill>
+                <a:latin typeface="Calibri"/>
+              </a:rPr>
+              <a:t>WEAKEST CREDIT (UNIVERSE 2)</a:t>
+            </a:r>
+          </a:p>
+        </p:txBody>
+      </p:sp>
+      <p:sp>
+        <p:nvSpPr>
+          <p:cNvPr id="13" name="TextBox 12"/>
+          <p:cNvSpPr txBox="1"/>
+          <p:nvPr/>
+        </p:nvSpPr>
+        <p:spPr>
+          <a:xfrm>
+            <a:off x="3621024" y="2359152"/>
+            <a:ext cx="2203704" cy="731520"/>
+          </a:xfrm>
+          <a:prstGeom prst="rect">
+            <a:avLst/>
+          </a:prstGeom>
+          <a:noFill/>
+        </p:spPr>
+        <p:txBody>
+          <a:bodyPr wrap="square">
+            <a:spAutoFit/>
+          </a:bodyPr>
+          <a:lstStyle/>
+          <a:p>
+            <a:pPr algn="l">
+              <a:lnSpc>
+                <a:spcPct val="115000"/>
+              </a:lnSpc>
+            </a:pPr>
+            <a:r>
+              <a:rPr sz="2500" b="1" i="0">
+                <a:solidFill>
+                  <a:srgbClr val="B33A3A"/>
+                </a:solidFill>
+                <a:latin typeface="Calibri"/>
+              </a:rPr>
+              <a:t>Red</a:t>
+            </a:r>
+          </a:p>
+        </p:txBody>
+      </p:sp>
+      <p:sp>
+        <p:nvSpPr>
+          <p:cNvPr id="14" name="TextBox 13"/>
+          <p:cNvSpPr txBox="1"/>
+          <p:nvPr/>
+        </p:nvSpPr>
+        <p:spPr>
+          <a:xfrm>
+            <a:off x="3621024" y="3026664"/>
+            <a:ext cx="2203704" cy="274320"/>
+          </a:xfrm>
+          <a:prstGeom prst="rect">
+            <a:avLst/>
+          </a:prstGeom>
+          <a:noFill/>
+        </p:spPr>
+        <p:txBody>
+          <a:bodyPr wrap="square">
+            <a:spAutoFit/>
+          </a:bodyPr>
+          <a:lstStyle/>
+          <a:p>
+            <a:pPr algn="l">
+              <a:lnSpc>
+                <a:spcPct val="115000"/>
+              </a:lnSpc>
+            </a:pPr>
+            <a:r>
+              <a:rPr sz="1050" b="0" i="0">
+                <a:solidFill>
+                  <a:srgbClr val="55605D"/>
+                </a:solidFill>
+                <a:latin typeface="Calibri"/>
+              </a:rPr>
+              <a:t>C</a:t>
+            </a:r>
+          </a:p>
+        </p:txBody>
+      </p:sp>
+      <p:sp>
+        <p:nvSpPr>
+          <p:cNvPr id="15" name="Rounded Rectangle 14"/>
+          <p:cNvSpPr/>
+          <p:nvPr/>
+        </p:nvSpPr>
+        <p:spPr>
+          <a:xfrm>
+            <a:off x="6181344" y="1920240"/>
+            <a:ext cx="2615184" cy="1417320"/>
+          </a:xfrm>
+          <a:prstGeom prst="roundRect">
+            <a:avLst>
+              <a:gd name="adj" fmla="val 10000"/>
+            </a:avLst>
+          </a:prstGeom>
+          <a:solidFill>
+            <a:srgbClr val="FCFBF8"/>
+          </a:solidFill>
+          <a:ln w="9525">
+            <a:solidFill>
+              <a:srgbClr val="C3D8C5"/>
+            </a:solidFill>
+          </a:ln>
+          <a:effectLst/>
+        </p:spPr>
+        <p:style>
+          <a:lnRef idx="1">
+            <a:schemeClr val="accent1"/>
+          </a:lnRef>
+          <a:fillRef idx="3">
+            <a:schemeClr val="accent1"/>
+          </a:fillRef>
+          <a:effectRef idx="2">
+            <a:schemeClr val="accent1"/>
+          </a:effectRef>
+          <a:fontRef idx="minor">
+            <a:schemeClr val="lt1"/>
+          </a:fontRef>
+        </p:style>
+        <p:txBody>
+          <a:bodyPr rtlCol="0" anchor="ctr"/>
+          <a:lstStyle/>
+          <a:p>
+            <a:pPr algn="ctr"/>
+          </a:p>
+        </p:txBody>
+      </p:sp>
+      <p:sp>
+        <p:nvSpPr>
+          <p:cNvPr id="16" name="Rectangle 15"/>
+          <p:cNvSpPr/>
+          <p:nvPr/>
+        </p:nvSpPr>
+        <p:spPr>
+          <a:xfrm>
+            <a:off x="6181344" y="1920240"/>
+            <a:ext cx="64008" cy="1417320"/>
+          </a:xfrm>
+          <a:prstGeom prst="rect">
+            <a:avLst/>
+          </a:prstGeom>
+          <a:solidFill>
+            <a:srgbClr val="78A79B"/>
+          </a:solidFill>
+          <a:ln>
+            <a:noFill/>
+          </a:ln>
+          <a:effectLst/>
+        </p:spPr>
+        <p:style>
+          <a:lnRef idx="1">
+            <a:schemeClr val="accent1"/>
+          </a:lnRef>
+          <a:fillRef idx="3">
+            <a:schemeClr val="accent1"/>
+          </a:fillRef>
+          <a:effectRef idx="2">
+            <a:schemeClr val="accent1"/>
+          </a:effectRef>
+          <a:fontRef idx="minor">
+            <a:schemeClr val="lt1"/>
+          </a:fontRef>
+        </p:style>
+        <p:txBody>
+          <a:bodyPr rtlCol="0" anchor="ctr"/>
+          <a:lstStyle/>
+          <a:p>
+            <a:pPr algn="ctr"/>
+          </a:p>
+        </p:txBody>
+      </p:sp>
+      <p:sp>
+        <p:nvSpPr>
+          <p:cNvPr id="17" name="TextBox 16"/>
+          <p:cNvSpPr txBox="1"/>
+          <p:nvPr/>
+        </p:nvSpPr>
+        <p:spPr>
+          <a:xfrm>
+            <a:off x="6437376" y="2066544"/>
+            <a:ext cx="2203704" cy="292608"/>
+          </a:xfrm>
+          <a:prstGeom prst="rect">
+            <a:avLst/>
+          </a:prstGeom>
+          <a:noFill/>
+        </p:spPr>
+        <p:txBody>
+          <a:bodyPr wrap="square">
+            <a:spAutoFit/>
+          </a:bodyPr>
+          <a:lstStyle/>
+          <a:p>
+            <a:pPr algn="l">
+              <a:lnSpc>
+                <a:spcPct val="115000"/>
+              </a:lnSpc>
+            </a:pPr>
+            <a:r>
+              <a:rPr sz="1000" b="1" i="0">
+                <a:solidFill>
+                  <a:srgbClr val="55605D"/>
+                </a:solidFill>
+                <a:latin typeface="Calibri"/>
+              </a:rPr>
+              <a:t>UNIVERSE 1 CREDIT CHANGES</a:t>
+            </a:r>
+          </a:p>
+        </p:txBody>
+      </p:sp>
+      <p:sp>
+        <p:nvSpPr>
+          <p:cNvPr id="18" name="TextBox 17"/>
+          <p:cNvSpPr txBox="1"/>
+          <p:nvPr/>
+        </p:nvSpPr>
+        <p:spPr>
+          <a:xfrm>
+            <a:off x="6437376" y="2359152"/>
+            <a:ext cx="2203704" cy="731520"/>
+          </a:xfrm>
+          <a:prstGeom prst="rect">
+            <a:avLst/>
+          </a:prstGeom>
+          <a:noFill/>
+        </p:spPr>
+        <p:txBody>
+          <a:bodyPr wrap="square">
+            <a:spAutoFit/>
+          </a:bodyPr>
+          <a:lstStyle/>
+          <a:p>
+            <a:pPr algn="l">
+              <a:lnSpc>
+                <a:spcPct val="115000"/>
+              </a:lnSpc>
+            </a:pPr>
+            <a:r>
+              <a:rPr sz="2500" b="1" i="0">
+                <a:solidFill>
+                  <a:srgbClr val="1F2A28"/>
+                </a:solidFill>
+                <a:latin typeface="Calibri"/>
+              </a:rPr>
+              <a:t>5</a:t>
+            </a:r>
+          </a:p>
+        </p:txBody>
+      </p:sp>
+      <p:sp>
+        <p:nvSpPr>
+          <p:cNvPr id="19" name="TextBox 18"/>
+          <p:cNvSpPr txBox="1"/>
+          <p:nvPr/>
+        </p:nvSpPr>
+        <p:spPr>
+          <a:xfrm>
+            <a:off x="6437376" y="3026664"/>
+            <a:ext cx="2203704" cy="274320"/>
+          </a:xfrm>
+          <a:prstGeom prst="rect">
+            <a:avLst/>
+          </a:prstGeom>
+          <a:noFill/>
+        </p:spPr>
+        <p:txBody>
+          <a:bodyPr wrap="square">
+            <a:spAutoFit/>
+          </a:bodyPr>
+          <a:lstStyle/>
+          <a:p>
+            <a:pPr algn="l">
+              <a:lnSpc>
+                <a:spcPct val="115000"/>
+              </a:lnSpc>
+            </a:pPr>
+            <a:r>
+              <a:rPr sz="1050" b="0" i="0">
+                <a:solidFill>
+                  <a:srgbClr val="55605D"/>
+                </a:solidFill>
+                <a:latin typeface="Calibri"/>
+              </a:rPr>
+              <a:t>teams re-rated this round</a:t>
+            </a:r>
+          </a:p>
+        </p:txBody>
+      </p:sp>
+      <p:sp>
+        <p:nvSpPr>
+          <p:cNvPr id="20" name="Rounded Rectangle 19"/>
+          <p:cNvSpPr/>
+          <p:nvPr/>
+        </p:nvSpPr>
+        <p:spPr>
+          <a:xfrm>
+            <a:off x="8997696" y="1920240"/>
+            <a:ext cx="2615184" cy="1417320"/>
+          </a:xfrm>
+          <a:prstGeom prst="roundRect">
+            <a:avLst>
+              <a:gd name="adj" fmla="val 10000"/>
+            </a:avLst>
+          </a:prstGeom>
+          <a:solidFill>
+            <a:srgbClr val="FCFBF8"/>
+          </a:solidFill>
+          <a:ln w="9525">
+            <a:solidFill>
+              <a:srgbClr val="C3D8C5"/>
+            </a:solidFill>
+          </a:ln>
+          <a:effectLst/>
+        </p:spPr>
+        <p:style>
+          <a:lnRef idx="1">
+            <a:schemeClr val="accent1"/>
+          </a:lnRef>
+          <a:fillRef idx="3">
+            <a:schemeClr val="accent1"/>
+          </a:fillRef>
+          <a:effectRef idx="2">
+            <a:schemeClr val="accent1"/>
+          </a:effectRef>
+          <a:fontRef idx="minor">
+            <a:schemeClr val="lt1"/>
+          </a:fontRef>
+        </p:style>
+        <p:txBody>
+          <a:bodyPr rtlCol="0" anchor="ctr"/>
+          <a:lstStyle/>
+          <a:p>
+            <a:pPr algn="ctr"/>
+          </a:p>
+        </p:txBody>
+      </p:sp>
+      <p:sp>
+        <p:nvSpPr>
+          <p:cNvPr id="21" name="Rectangle 20"/>
+          <p:cNvSpPr/>
+          <p:nvPr/>
+        </p:nvSpPr>
+        <p:spPr>
+          <a:xfrm>
+            <a:off x="8997696" y="1920240"/>
+            <a:ext cx="64008" cy="1417320"/>
+          </a:xfrm>
+          <a:prstGeom prst="rect">
+            <a:avLst/>
+          </a:prstGeom>
+          <a:solidFill>
+            <a:srgbClr val="E3CFA4"/>
+          </a:solidFill>
+          <a:ln>
+            <a:noFill/>
+          </a:ln>
+          <a:effectLst/>
+        </p:spPr>
+        <p:style>
+          <a:lnRef idx="1">
+            <a:schemeClr val="accent1"/>
+          </a:lnRef>
+          <a:fillRef idx="3">
+            <a:schemeClr val="accent1"/>
+          </a:fillRef>
+          <a:effectRef idx="2">
+            <a:schemeClr val="accent1"/>
+          </a:effectRef>
+          <a:fontRef idx="minor">
+            <a:schemeClr val="lt1"/>
+          </a:fontRef>
+        </p:style>
+        <p:txBody>
+          <a:bodyPr rtlCol="0" anchor="ctr"/>
+          <a:lstStyle/>
+          <a:p>
+            <a:pPr algn="ctr"/>
+          </a:p>
+        </p:txBody>
+      </p:sp>
+      <p:sp>
+        <p:nvSpPr>
+          <p:cNvPr id="22" name="TextBox 21"/>
+          <p:cNvSpPr txBox="1"/>
+          <p:nvPr/>
+        </p:nvSpPr>
+        <p:spPr>
+          <a:xfrm>
+            <a:off x="9253728" y="2066544"/>
+            <a:ext cx="2203704" cy="292608"/>
+          </a:xfrm>
+          <a:prstGeom prst="rect">
+            <a:avLst/>
+          </a:prstGeom>
+          <a:noFill/>
+        </p:spPr>
+        <p:txBody>
+          <a:bodyPr wrap="square">
+            <a:spAutoFit/>
+          </a:bodyPr>
+          <a:lstStyle/>
+          <a:p>
+            <a:pPr algn="l">
+              <a:lnSpc>
+                <a:spcPct val="115000"/>
+              </a:lnSpc>
+            </a:pPr>
+            <a:r>
+              <a:rPr sz="1000" b="1" i="0">
+                <a:solidFill>
+                  <a:srgbClr val="55605D"/>
+                </a:solidFill>
+                <a:latin typeface="Calibri"/>
+              </a:rPr>
+              <a:t>UNIVERSE 2 CREDIT CHANGES</a:t>
+            </a:r>
+          </a:p>
+        </p:txBody>
+      </p:sp>
+      <p:sp>
+        <p:nvSpPr>
+          <p:cNvPr id="23" name="TextBox 22"/>
+          <p:cNvSpPr txBox="1"/>
+          <p:nvPr/>
+        </p:nvSpPr>
+        <p:spPr>
+          <a:xfrm>
+            <a:off x="9253728" y="2359152"/>
+            <a:ext cx="2203704" cy="731520"/>
+          </a:xfrm>
+          <a:prstGeom prst="rect">
+            <a:avLst/>
+          </a:prstGeom>
+          <a:noFill/>
+        </p:spPr>
+        <p:txBody>
+          <a:bodyPr wrap="square">
+            <a:spAutoFit/>
+          </a:bodyPr>
+          <a:lstStyle/>
+          <a:p>
+            <a:pPr algn="l">
+              <a:lnSpc>
+                <a:spcPct val="115000"/>
+              </a:lnSpc>
+            </a:pPr>
+            <a:r>
+              <a:rPr sz="2500" b="1" i="0">
+                <a:solidFill>
+                  <a:srgbClr val="1F2A28"/>
+                </a:solidFill>
+                <a:latin typeface="Calibri"/>
+              </a:rPr>
+              <a:t>5</a:t>
+            </a:r>
+          </a:p>
+        </p:txBody>
+      </p:sp>
+      <p:sp>
+        <p:nvSpPr>
+          <p:cNvPr id="24" name="TextBox 23"/>
+          <p:cNvSpPr txBox="1"/>
+          <p:nvPr/>
+        </p:nvSpPr>
+        <p:spPr>
+          <a:xfrm>
+            <a:off x="9253728" y="3026664"/>
+            <a:ext cx="2203704" cy="274320"/>
+          </a:xfrm>
+          <a:prstGeom prst="rect">
+            <a:avLst/>
+          </a:prstGeom>
+          <a:noFill/>
+        </p:spPr>
+        <p:txBody>
+          <a:bodyPr wrap="square">
+            <a:spAutoFit/>
+          </a:bodyPr>
+          <a:lstStyle/>
+          <a:p>
+            <a:pPr algn="l">
+              <a:lnSpc>
+                <a:spcPct val="115000"/>
+              </a:lnSpc>
+            </a:pPr>
+            <a:r>
+              <a:rPr sz="1050" b="0" i="0">
+                <a:solidFill>
+                  <a:srgbClr val="55605D"/>
+                </a:solidFill>
+                <a:latin typeface="Calibri"/>
+              </a:rPr>
+              <a:t>teams re-rated this round</a:t>
+            </a:r>
+          </a:p>
+        </p:txBody>
+      </p:sp>
+      <p:sp>
+        <p:nvSpPr>
+          <p:cNvPr id="25" name="Rounded Rectangle 24"/>
+          <p:cNvSpPr/>
+          <p:nvPr/>
+        </p:nvSpPr>
+        <p:spPr>
+          <a:xfrm>
+            <a:off x="548640" y="3657600"/>
+            <a:ext cx="11064240" cy="1005840"/>
+          </a:xfrm>
+          <a:prstGeom prst="roundRect">
+            <a:avLst>
+              <a:gd name="adj" fmla="val 8000"/>
+            </a:avLst>
+          </a:prstGeom>
+          <a:solidFill>
+            <a:srgbClr val="F7F5F0"/>
+          </a:solidFill>
+          <a:ln>
+            <a:noFill/>
+          </a:ln>
+          <a:effectLst/>
+        </p:spPr>
+        <p:style>
+          <a:lnRef idx="1">
+            <a:schemeClr val="accent1"/>
+          </a:lnRef>
+          <a:fillRef idx="3">
+            <a:schemeClr val="accent1"/>
+          </a:fillRef>
+          <a:effectRef idx="2">
+            <a:schemeClr val="accent1"/>
+          </a:effectRef>
+          <a:fontRef idx="minor">
+            <a:schemeClr val="lt1"/>
+          </a:fontRef>
+        </p:style>
+        <p:txBody>
+          <a:bodyPr rtlCol="0" anchor="ctr"/>
+          <a:lstStyle/>
+          <a:p>
+            <a:pPr algn="ctr"/>
+          </a:p>
+        </p:txBody>
+      </p:sp>
+      <p:sp>
+        <p:nvSpPr>
+          <p:cNvPr id="26" name="TextBox 25"/>
+          <p:cNvSpPr txBox="1"/>
+          <p:nvPr/>
+        </p:nvSpPr>
+        <p:spPr>
+          <a:xfrm>
+            <a:off x="822960" y="3840480"/>
+            <a:ext cx="10515600" cy="685800"/>
+          </a:xfrm>
+          <a:prstGeom prst="rect">
+            <a:avLst/>
+          </a:prstGeom>
+          <a:noFill/>
+        </p:spPr>
+        <p:txBody>
+          <a:bodyPr wrap="square">
+            <a:spAutoFit/>
+          </a:bodyPr>
+          <a:lstStyle/>
+          <a:p>
+            <a:pPr algn="l">
+              <a:lnSpc>
+                <a:spcPct val="115000"/>
+              </a:lnSpc>
+            </a:pPr>
+            <a:r>
+              <a:rPr sz="1400" b="0" i="0">
+                <a:solidFill>
+                  <a:srgbClr val="1F2A28"/>
+                </a:solidFill>
+                <a:latin typeface="Calibri"/>
+              </a:rPr>
+              <a:t>A credit downgrade compounds: it raises the cost of the next round's financing choices, not just this round's.</a:t>
+            </a:r>
+          </a:p>
+        </p:txBody>
+      </p:sp>
+      <p:sp>
+        <p:nvSpPr>
+          <p:cNvPr id="27" name="Rectangle 26"/>
+          <p:cNvSpPr/>
+          <p:nvPr/>
+        </p:nvSpPr>
+        <p:spPr>
+          <a:xfrm>
+            <a:off x="0" y="6812280"/>
+            <a:ext cx="12191695" cy="45720"/>
+          </a:xfrm>
+          <a:prstGeom prst="rect">
+            <a:avLst/>
+          </a:prstGeom>
+          <a:solidFill>
+            <a:srgbClr val="78A79B"/>
+          </a:solidFill>
+          <a:ln>
+            <a:noFill/>
+          </a:ln>
+          <a:effectLst/>
+        </p:spPr>
+        <p:style>
+          <a:lnRef idx="1">
+            <a:schemeClr val="accent1"/>
+          </a:lnRef>
+          <a:fillRef idx="3">
+            <a:schemeClr val="accent1"/>
+          </a:fillRef>
+          <a:effectRef idx="2">
+            <a:schemeClr val="accent1"/>
+          </a:effectRef>
+          <a:fontRef idx="minor">
+            <a:schemeClr val="lt1"/>
+          </a:fontRef>
+        </p:style>
+        <p:txBody>
+          <a:bodyPr rtlCol="0" anchor="ctr"/>
+          <a:lstStyle/>
+          <a:p>
+            <a:pPr algn="ctr"/>
+          </a:p>
+        </p:txBody>
+      </p:sp>
+      <p:sp>
+        <p:nvSpPr>
+          <p:cNvPr id="28" name="TextBox 27"/>
+          <p:cNvSpPr txBox="1"/>
+          <p:nvPr/>
+        </p:nvSpPr>
+        <p:spPr>
+          <a:xfrm>
+            <a:off x="365760" y="6473952"/>
+            <a:ext cx="7315200" cy="274320"/>
+          </a:xfrm>
+          <a:prstGeom prst="rect">
+            <a:avLst/>
+          </a:prstGeom>
+          <a:noFill/>
+        </p:spPr>
+        <p:txBody>
+          <a:bodyPr wrap="square">
+            <a:spAutoFit/>
+          </a:bodyPr>
+          <a:lstStyle/>
+          <a:p>
+            <a:pPr algn="l">
+              <a:lnSpc>
+                <a:spcPct val="115000"/>
+              </a:lnSpc>
+            </a:pPr>
+            <a:r>
               <a:rPr sz="1000" b="0" i="0">
                 <a:solidFill>
-                  <a:srgbClr val="4A5552"/>
+                  <a:srgbClr val="55605D"/>
                 </a:solidFill>
                 <a:latin typeface="Calibri"/>
               </a:rPr>
@@ -5767,7 +9332,7 @@
       </p:sp>
       <p:sp>
         <p:nvSpPr>
-          <p:cNvPr id="7" name="TextBox 6"/>
+          <p:cNvPr id="29" name="TextBox 28"/>
           <p:cNvSpPr txBox="1"/>
           <p:nvPr/>
         </p:nvSpPr>
@@ -5795,7 +9360,7 @@
             <a:r>
               <a:rPr sz="1000" b="0" i="0">
                 <a:solidFill>
-                  <a:srgbClr val="4A5552"/>
+                  <a:srgbClr val="55605D"/>
                 </a:solidFill>
                 <a:latin typeface="Calibri"/>
               </a:rPr>
@@ -5815,6 +9380,14 @@
 <file path=ppt/slides/slide7.xml><?xml version="1.0" encoding="utf-8"?>
 <p:sld xmlns:a="http://schemas.openxmlformats.org/drawingml/2006/main" xmlns:p="http://schemas.openxmlformats.org/presentationml/2006/main" xmlns:r="http://schemas.openxmlformats.org/officeDocument/2006/relationships">
   <p:cSld>
+    <p:bg>
+      <p:bgPr>
+        <a:solidFill>
+          <a:srgbClr val="FFFFFF"/>
+        </a:solidFill>
+        <a:effectLst/>
+      </p:bgPr>
+    </p:bg>
     <p:spTree>
       <p:nvGrpSpPr>
         <p:cNvPr id="1" name=""/>
@@ -5824,210 +9397,60 @@
       <p:grpSpPr/>
       <p:sp>
         <p:nvSpPr>
-          <p:cNvPr id="2" name="TextBox 1"/>
-          <p:cNvSpPr txBox="1"/>
-          <p:nvPr/>
-        </p:nvSpPr>
-        <p:spPr>
-          <a:xfrm>
-            <a:off x="502920" y="320040"/>
-            <a:ext cx="10058400" cy="320040"/>
-          </a:xfrm>
-          <a:prstGeom prst="rect">
-            <a:avLst/>
-          </a:prstGeom>
-          <a:noFill/>
-        </p:spPr>
-        <p:txBody>
-          <a:bodyPr wrap="square">
-            <a:spAutoFit/>
-          </a:bodyPr>
-          <a:lstStyle/>
-          <a:p>
-            <a:pPr algn="l">
-              <a:lnSpc>
-                <a:spcPct val="115000"/>
-              </a:lnSpc>
-            </a:pPr>
-            <a:r>
-              <a:rPr sz="1100" b="1" i="0">
-                <a:solidFill>
-                  <a:srgbClr val="78A79B"/>
-                </a:solidFill>
-                <a:latin typeface="Calibri"/>
-              </a:rPr>
-              <a:t>06 / DISCUSS</a:t>
-            </a:r>
-          </a:p>
-        </p:txBody>
-      </p:sp>
-      <p:sp>
-        <p:nvSpPr>
-          <p:cNvPr id="3" name="TextBox 2"/>
-          <p:cNvSpPr txBox="1"/>
-          <p:nvPr/>
-        </p:nvSpPr>
-        <p:spPr>
-          <a:xfrm>
-            <a:off x="502920" y="621792"/>
-            <a:ext cx="11155680" cy="685800"/>
-          </a:xfrm>
-          <a:prstGeom prst="rect">
-            <a:avLst/>
-          </a:prstGeom>
-          <a:noFill/>
-        </p:spPr>
-        <p:txBody>
-          <a:bodyPr wrap="square">
-            <a:spAutoFit/>
-          </a:bodyPr>
-          <a:lstStyle/>
-          <a:p>
-            <a:pPr algn="l">
-              <a:lnSpc>
-                <a:spcPct val="115000"/>
-              </a:lnSpc>
-            </a:pPr>
-            <a:r>
-              <a:rPr sz="2400" b="1" i="0">
-                <a:solidFill>
-                  <a:srgbClr val="1F2A28"/>
-                </a:solidFill>
-                <a:latin typeface="Calibri"/>
-              </a:rPr>
-              <a:t>Five cross-universe questions.</a:t>
-            </a:r>
-          </a:p>
-        </p:txBody>
-      </p:sp>
-      <p:sp>
-        <p:nvSpPr>
-          <p:cNvPr id="4" name="TextBox 3"/>
-          <p:cNvSpPr txBox="1"/>
-          <p:nvPr/>
-        </p:nvSpPr>
-        <p:spPr>
-          <a:xfrm>
-            <a:off x="548640" y="1828800"/>
-            <a:ext cx="10789920" cy="3108960"/>
-          </a:xfrm>
-          <a:prstGeom prst="rect">
-            <a:avLst/>
-          </a:prstGeom>
-          <a:noFill/>
-        </p:spPr>
-        <p:txBody>
-          <a:bodyPr wrap="square">
-            <a:spAutoFit/>
-          </a:bodyPr>
-          <a:lstStyle/>
-          <a:p>
-            <a:pPr>
-              <a:lnSpc>
-                <a:spcPct val="112000"/>
-              </a:lnSpc>
-              <a:spcAft>
-                <a:spcPts val="1584"/>
-              </a:spcAft>
-            </a:pPr>
-            <a:r>
-              <a:rPr sz="1500" b="0" i="0">
-                <a:solidFill>
-                  <a:srgbClr val="1F2A28"/>
-                </a:solidFill>
-                <a:latin typeface="Calibri"/>
-              </a:rPr>
-              <a:t>•  If you had to invest in one leader, Orange or Grey, what would you ask before buying?</a:t>
-            </a:r>
-          </a:p>
-          <a:p>
-            <a:pPr>
-              <a:lnSpc>
-                <a:spcPct val="112000"/>
-              </a:lnSpc>
-              <a:spcAft>
-                <a:spcPts val="1584"/>
-              </a:spcAft>
-            </a:pPr>
-            <a:r>
-              <a:rPr sz="1500" b="0" i="0">
-                <a:solidFill>
-                  <a:srgbClr val="1F2A28"/>
-                </a:solidFill>
-                <a:latin typeface="Calibri"/>
-              </a:rPr>
-              <a:t>•  Which universe's leader is more vulnerable heading into Round 7 — and why?</a:t>
-            </a:r>
-          </a:p>
-          <a:p>
-            <a:pPr>
-              <a:lnSpc>
-                <a:spcPct val="112000"/>
-              </a:lnSpc>
-              <a:spcAft>
-                <a:spcPts val="1584"/>
-              </a:spcAft>
-            </a:pPr>
-            <a:r>
-              <a:rPr sz="1500" b="0" i="0">
-                <a:solidFill>
-                  <a:srgbClr val="1F2A28"/>
-                </a:solidFill>
-                <a:latin typeface="Calibri"/>
-              </a:rPr>
-              <a:t>•  What does Red's credit position tell you about the limits of an R&amp;D-heavy strategy?</a:t>
-            </a:r>
-          </a:p>
-          <a:p>
-            <a:pPr>
-              <a:lnSpc>
-                <a:spcPct val="112000"/>
-              </a:lnSpc>
-              <a:spcAft>
-                <a:spcPts val="1584"/>
-              </a:spcAft>
-            </a:pPr>
-            <a:r>
-              <a:rPr sz="1500" b="0" i="0">
-                <a:solidFill>
-                  <a:srgbClr val="1F2A28"/>
-                </a:solidFill>
-                <a:latin typeface="Calibri"/>
-              </a:rPr>
-              <a:t>•  Is a universe with more rank movement necessarily more competitive, or just noisier?</a:t>
-            </a:r>
-          </a:p>
-          <a:p>
-            <a:pPr>
-              <a:lnSpc>
-                <a:spcPct val="112000"/>
-              </a:lnSpc>
-              <a:spcAft>
-                <a:spcPts val="1584"/>
-              </a:spcAft>
-            </a:pPr>
-            <a:r>
-              <a:rPr sz="1500" b="0" i="0">
-                <a:solidFill>
-                  <a:srgbClr val="1F2A28"/>
-                </a:solidFill>
-                <a:latin typeface="Calibri"/>
-              </a:rPr>
-              <a:t>•  Which single decision, copied from the other universe, would most help your own team?</a:t>
-            </a:r>
-          </a:p>
-        </p:txBody>
-      </p:sp>
-      <p:sp>
-        <p:nvSpPr>
-          <p:cNvPr id="5" name="Rectangle 4"/>
+          <p:cNvPr id="2" name="Oval 1"/>
           <p:cNvSpPr/>
           <p:nvPr/>
         </p:nvSpPr>
         <p:spPr>
           <a:xfrm>
-            <a:off x="0" y="6812280"/>
-            <a:ext cx="12191695" cy="45720"/>
+            <a:off x="10607040" y="-1188720"/>
+            <a:ext cx="2926080" cy="2560320"/>
+          </a:xfrm>
+          <a:prstGeom prst="ellipse">
+            <a:avLst/>
+          </a:prstGeom>
+          <a:solidFill>
+            <a:srgbClr val="DDE8DE">
+              <a:alpha val="55000"/>
+            </a:srgbClr>
+          </a:solidFill>
+          <a:ln>
+            <a:noFill/>
+          </a:ln>
+          <a:effectLst/>
+        </p:spPr>
+        <p:style>
+          <a:lnRef idx="1">
+            <a:schemeClr val="accent1"/>
+          </a:lnRef>
+          <a:fillRef idx="3">
+            <a:schemeClr val="accent1"/>
+          </a:fillRef>
+          <a:effectRef idx="2">
+            <a:schemeClr val="accent1"/>
+          </a:effectRef>
+          <a:fontRef idx="minor">
+            <a:schemeClr val="lt1"/>
+          </a:fontRef>
+        </p:style>
+        <p:txBody>
+          <a:bodyPr rtlCol="0" anchor="ctr"/>
+          <a:lstStyle/>
+          <a:p>
+            <a:pPr algn="ctr"/>
+          </a:p>
+        </p:txBody>
+      </p:sp>
+      <p:sp>
+        <p:nvSpPr>
+          <p:cNvPr id="3" name="Rectangle 2"/>
+          <p:cNvSpPr/>
+          <p:nvPr/>
+        </p:nvSpPr>
+        <p:spPr>
+          <a:xfrm>
+            <a:off x="502920" y="384048"/>
+            <a:ext cx="320040" cy="54864"/>
           </a:xfrm>
           <a:prstGeom prst="rect">
             <a:avLst/>
@@ -6064,14 +9487,14 @@
       </p:sp>
       <p:sp>
         <p:nvSpPr>
-          <p:cNvPr id="6" name="TextBox 5"/>
+          <p:cNvPr id="4" name="TextBox 3"/>
           <p:cNvSpPr txBox="1"/>
           <p:nvPr/>
         </p:nvSpPr>
         <p:spPr>
           <a:xfrm>
-            <a:off x="365760" y="6473952"/>
-            <a:ext cx="7315200" cy="274320"/>
+            <a:off x="502920" y="475488"/>
+            <a:ext cx="10058400" cy="292608"/>
           </a:xfrm>
           <a:prstGeom prst="rect">
             <a:avLst/>
@@ -6090,9 +9513,831 @@
               </a:lnSpc>
             </a:pPr>
             <a:r>
+              <a:rPr sz="1100" b="1" i="0">
+                <a:solidFill>
+                  <a:srgbClr val="78A79B"/>
+                </a:solidFill>
+                <a:latin typeface="Calibri"/>
+              </a:rPr>
+              <a:t>06 / DISCUSS</a:t>
+            </a:r>
+          </a:p>
+        </p:txBody>
+      </p:sp>
+      <p:sp>
+        <p:nvSpPr>
+          <p:cNvPr id="5" name="TextBox 4"/>
+          <p:cNvSpPr txBox="1"/>
+          <p:nvPr/>
+        </p:nvSpPr>
+        <p:spPr>
+          <a:xfrm>
+            <a:off x="502920" y="758952"/>
+            <a:ext cx="11155680" cy="658368"/>
+          </a:xfrm>
+          <a:prstGeom prst="rect">
+            <a:avLst/>
+          </a:prstGeom>
+          <a:noFill/>
+        </p:spPr>
+        <p:txBody>
+          <a:bodyPr wrap="square">
+            <a:spAutoFit/>
+          </a:bodyPr>
+          <a:lstStyle/>
+          <a:p>
+            <a:pPr algn="l">
+              <a:lnSpc>
+                <a:spcPct val="115000"/>
+              </a:lnSpc>
+            </a:pPr>
+            <a:r>
+              <a:rPr sz="2500" b="1" i="0">
+                <a:solidFill>
+                  <a:srgbClr val="1F2A28"/>
+                </a:solidFill>
+                <a:latin typeface="Calibri"/>
+              </a:rPr>
+              <a:t>Five cross-universe questions.</a:t>
+            </a:r>
+          </a:p>
+        </p:txBody>
+      </p:sp>
+      <p:sp>
+        <p:nvSpPr>
+          <p:cNvPr id="6" name="Rounded Rectangle 5"/>
+          <p:cNvSpPr/>
+          <p:nvPr/>
+        </p:nvSpPr>
+        <p:spPr>
+          <a:xfrm>
+            <a:off x="548640" y="1965960"/>
+            <a:ext cx="10881360" cy="713232"/>
+          </a:xfrm>
+          <a:prstGeom prst="roundRect">
+            <a:avLst>
+              <a:gd name="adj" fmla="val 28000"/>
+            </a:avLst>
+          </a:prstGeom>
+          <a:solidFill>
+            <a:srgbClr val="FCFBF8"/>
+          </a:solidFill>
+          <a:ln w="9525">
+            <a:solidFill>
+              <a:srgbClr val="C3D8C5"/>
+            </a:solidFill>
+          </a:ln>
+          <a:effectLst/>
+        </p:spPr>
+        <p:style>
+          <a:lnRef idx="1">
+            <a:schemeClr val="accent1"/>
+          </a:lnRef>
+          <a:fillRef idx="3">
+            <a:schemeClr val="accent1"/>
+          </a:fillRef>
+          <a:effectRef idx="2">
+            <a:schemeClr val="accent1"/>
+          </a:effectRef>
+          <a:fontRef idx="minor">
+            <a:schemeClr val="lt1"/>
+          </a:fontRef>
+        </p:style>
+        <p:txBody>
+          <a:bodyPr rtlCol="0" anchor="ctr"/>
+          <a:lstStyle/>
+          <a:p>
+            <a:pPr algn="ctr"/>
+          </a:p>
+        </p:txBody>
+      </p:sp>
+      <p:sp>
+        <p:nvSpPr>
+          <p:cNvPr id="7" name="Oval 6"/>
+          <p:cNvSpPr/>
+          <p:nvPr/>
+        </p:nvSpPr>
+        <p:spPr>
+          <a:xfrm>
+            <a:off x="713232" y="2130552"/>
+            <a:ext cx="384048" cy="384048"/>
+          </a:xfrm>
+          <a:prstGeom prst="ellipse">
+            <a:avLst/>
+          </a:prstGeom>
+          <a:solidFill>
+            <a:srgbClr val="78A79B"/>
+          </a:solidFill>
+          <a:ln>
+            <a:noFill/>
+          </a:ln>
+          <a:effectLst/>
+        </p:spPr>
+        <p:style>
+          <a:lnRef idx="1">
+            <a:schemeClr val="accent1"/>
+          </a:lnRef>
+          <a:fillRef idx="3">
+            <a:schemeClr val="accent1"/>
+          </a:fillRef>
+          <a:effectRef idx="2">
+            <a:schemeClr val="accent1"/>
+          </a:effectRef>
+          <a:fontRef idx="minor">
+            <a:schemeClr val="lt1"/>
+          </a:fontRef>
+        </p:style>
+        <p:txBody>
+          <a:bodyPr rtlCol="0" anchor="ctr" wrap="none" lIns="0" rIns="0" tIns="0" bIns="0"/>
+          <a:lstStyle/>
+          <a:p>
+            <a:pPr algn="ctr"/>
+            <a:r>
+              <a:rPr sz="1300" b="1" i="0">
+                <a:solidFill>
+                  <a:srgbClr val="FFFFFF"/>
+                </a:solidFill>
+                <a:latin typeface="Calibri"/>
+              </a:rPr>
+              <a:t>1</a:t>
+            </a:r>
+          </a:p>
+        </p:txBody>
+      </p:sp>
+      <p:sp>
+        <p:nvSpPr>
+          <p:cNvPr id="8" name="TextBox 7"/>
+          <p:cNvSpPr txBox="1"/>
+          <p:nvPr/>
+        </p:nvSpPr>
+        <p:spPr>
+          <a:xfrm>
+            <a:off x="1261872" y="1965960"/>
+            <a:ext cx="9966960" cy="713232"/>
+          </a:xfrm>
+          <a:prstGeom prst="rect">
+            <a:avLst/>
+          </a:prstGeom>
+          <a:noFill/>
+        </p:spPr>
+        <p:txBody>
+          <a:bodyPr wrap="square" anchor="ctr">
+            <a:spAutoFit/>
+          </a:bodyPr>
+          <a:lstStyle/>
+          <a:p>
+            <a:pPr algn="l">
+              <a:lnSpc>
+                <a:spcPct val="115000"/>
+              </a:lnSpc>
+            </a:pPr>
+            <a:r>
+              <a:rPr sz="1400" b="0" i="0">
+                <a:solidFill>
+                  <a:srgbClr val="1F2A28"/>
+                </a:solidFill>
+                <a:latin typeface="Calibri"/>
+              </a:rPr>
+              <a:t>If you had to invest in one leader, Orange or Grey, what would you ask before buying?</a:t>
+            </a:r>
+          </a:p>
+        </p:txBody>
+      </p:sp>
+      <p:sp>
+        <p:nvSpPr>
+          <p:cNvPr id="9" name="Rounded Rectangle 8"/>
+          <p:cNvSpPr/>
+          <p:nvPr/>
+        </p:nvSpPr>
+        <p:spPr>
+          <a:xfrm>
+            <a:off x="548640" y="2807208"/>
+            <a:ext cx="10881360" cy="713232"/>
+          </a:xfrm>
+          <a:prstGeom prst="roundRect">
+            <a:avLst>
+              <a:gd name="adj" fmla="val 28000"/>
+            </a:avLst>
+          </a:prstGeom>
+          <a:solidFill>
+            <a:srgbClr val="FCFBF8"/>
+          </a:solidFill>
+          <a:ln w="9525">
+            <a:solidFill>
+              <a:srgbClr val="C3D8C5"/>
+            </a:solidFill>
+          </a:ln>
+          <a:effectLst/>
+        </p:spPr>
+        <p:style>
+          <a:lnRef idx="1">
+            <a:schemeClr val="accent1"/>
+          </a:lnRef>
+          <a:fillRef idx="3">
+            <a:schemeClr val="accent1"/>
+          </a:fillRef>
+          <a:effectRef idx="2">
+            <a:schemeClr val="accent1"/>
+          </a:effectRef>
+          <a:fontRef idx="minor">
+            <a:schemeClr val="lt1"/>
+          </a:fontRef>
+        </p:style>
+        <p:txBody>
+          <a:bodyPr rtlCol="0" anchor="ctr"/>
+          <a:lstStyle/>
+          <a:p>
+            <a:pPr algn="ctr"/>
+          </a:p>
+        </p:txBody>
+      </p:sp>
+      <p:sp>
+        <p:nvSpPr>
+          <p:cNvPr id="10" name="Oval 9"/>
+          <p:cNvSpPr/>
+          <p:nvPr/>
+        </p:nvSpPr>
+        <p:spPr>
+          <a:xfrm>
+            <a:off x="713232" y="2971800"/>
+            <a:ext cx="384048" cy="384048"/>
+          </a:xfrm>
+          <a:prstGeom prst="ellipse">
+            <a:avLst/>
+          </a:prstGeom>
+          <a:solidFill>
+            <a:srgbClr val="78A79B"/>
+          </a:solidFill>
+          <a:ln>
+            <a:noFill/>
+          </a:ln>
+          <a:effectLst/>
+        </p:spPr>
+        <p:style>
+          <a:lnRef idx="1">
+            <a:schemeClr val="accent1"/>
+          </a:lnRef>
+          <a:fillRef idx="3">
+            <a:schemeClr val="accent1"/>
+          </a:fillRef>
+          <a:effectRef idx="2">
+            <a:schemeClr val="accent1"/>
+          </a:effectRef>
+          <a:fontRef idx="minor">
+            <a:schemeClr val="lt1"/>
+          </a:fontRef>
+        </p:style>
+        <p:txBody>
+          <a:bodyPr rtlCol="0" anchor="ctr" wrap="none" lIns="0" rIns="0" tIns="0" bIns="0"/>
+          <a:lstStyle/>
+          <a:p>
+            <a:pPr algn="ctr"/>
+            <a:r>
+              <a:rPr sz="1300" b="1" i="0">
+                <a:solidFill>
+                  <a:srgbClr val="FFFFFF"/>
+                </a:solidFill>
+                <a:latin typeface="Calibri"/>
+              </a:rPr>
+              <a:t>2</a:t>
+            </a:r>
+          </a:p>
+        </p:txBody>
+      </p:sp>
+      <p:sp>
+        <p:nvSpPr>
+          <p:cNvPr id="11" name="TextBox 10"/>
+          <p:cNvSpPr txBox="1"/>
+          <p:nvPr/>
+        </p:nvSpPr>
+        <p:spPr>
+          <a:xfrm>
+            <a:off x="1261872" y="2807208"/>
+            <a:ext cx="9966960" cy="713232"/>
+          </a:xfrm>
+          <a:prstGeom prst="rect">
+            <a:avLst/>
+          </a:prstGeom>
+          <a:noFill/>
+        </p:spPr>
+        <p:txBody>
+          <a:bodyPr wrap="square" anchor="ctr">
+            <a:spAutoFit/>
+          </a:bodyPr>
+          <a:lstStyle/>
+          <a:p>
+            <a:pPr algn="l">
+              <a:lnSpc>
+                <a:spcPct val="115000"/>
+              </a:lnSpc>
+            </a:pPr>
+            <a:r>
+              <a:rPr sz="1400" b="0" i="0">
+                <a:solidFill>
+                  <a:srgbClr val="1F2A28"/>
+                </a:solidFill>
+                <a:latin typeface="Calibri"/>
+              </a:rPr>
+              <a:t>Which universe's leader is more vulnerable heading into Round 7 — and why?</a:t>
+            </a:r>
+          </a:p>
+        </p:txBody>
+      </p:sp>
+      <p:sp>
+        <p:nvSpPr>
+          <p:cNvPr id="12" name="Rounded Rectangle 11"/>
+          <p:cNvSpPr/>
+          <p:nvPr/>
+        </p:nvSpPr>
+        <p:spPr>
+          <a:xfrm>
+            <a:off x="548640" y="3648456"/>
+            <a:ext cx="10881360" cy="713232"/>
+          </a:xfrm>
+          <a:prstGeom prst="roundRect">
+            <a:avLst>
+              <a:gd name="adj" fmla="val 28000"/>
+            </a:avLst>
+          </a:prstGeom>
+          <a:solidFill>
+            <a:srgbClr val="FCFBF8"/>
+          </a:solidFill>
+          <a:ln w="9525">
+            <a:solidFill>
+              <a:srgbClr val="C3D8C5"/>
+            </a:solidFill>
+          </a:ln>
+          <a:effectLst/>
+        </p:spPr>
+        <p:style>
+          <a:lnRef idx="1">
+            <a:schemeClr val="accent1"/>
+          </a:lnRef>
+          <a:fillRef idx="3">
+            <a:schemeClr val="accent1"/>
+          </a:fillRef>
+          <a:effectRef idx="2">
+            <a:schemeClr val="accent1"/>
+          </a:effectRef>
+          <a:fontRef idx="minor">
+            <a:schemeClr val="lt1"/>
+          </a:fontRef>
+        </p:style>
+        <p:txBody>
+          <a:bodyPr rtlCol="0" anchor="ctr"/>
+          <a:lstStyle/>
+          <a:p>
+            <a:pPr algn="ctr"/>
+          </a:p>
+        </p:txBody>
+      </p:sp>
+      <p:sp>
+        <p:nvSpPr>
+          <p:cNvPr id="13" name="Oval 12"/>
+          <p:cNvSpPr/>
+          <p:nvPr/>
+        </p:nvSpPr>
+        <p:spPr>
+          <a:xfrm>
+            <a:off x="713232" y="3813048"/>
+            <a:ext cx="384048" cy="384048"/>
+          </a:xfrm>
+          <a:prstGeom prst="ellipse">
+            <a:avLst/>
+          </a:prstGeom>
+          <a:solidFill>
+            <a:srgbClr val="78A79B"/>
+          </a:solidFill>
+          <a:ln>
+            <a:noFill/>
+          </a:ln>
+          <a:effectLst/>
+        </p:spPr>
+        <p:style>
+          <a:lnRef idx="1">
+            <a:schemeClr val="accent1"/>
+          </a:lnRef>
+          <a:fillRef idx="3">
+            <a:schemeClr val="accent1"/>
+          </a:fillRef>
+          <a:effectRef idx="2">
+            <a:schemeClr val="accent1"/>
+          </a:effectRef>
+          <a:fontRef idx="minor">
+            <a:schemeClr val="lt1"/>
+          </a:fontRef>
+        </p:style>
+        <p:txBody>
+          <a:bodyPr rtlCol="0" anchor="ctr" wrap="none" lIns="0" rIns="0" tIns="0" bIns="0"/>
+          <a:lstStyle/>
+          <a:p>
+            <a:pPr algn="ctr"/>
+            <a:r>
+              <a:rPr sz="1300" b="1" i="0">
+                <a:solidFill>
+                  <a:srgbClr val="FFFFFF"/>
+                </a:solidFill>
+                <a:latin typeface="Calibri"/>
+              </a:rPr>
+              <a:t>3</a:t>
+            </a:r>
+          </a:p>
+        </p:txBody>
+      </p:sp>
+      <p:sp>
+        <p:nvSpPr>
+          <p:cNvPr id="14" name="TextBox 13"/>
+          <p:cNvSpPr txBox="1"/>
+          <p:nvPr/>
+        </p:nvSpPr>
+        <p:spPr>
+          <a:xfrm>
+            <a:off x="1261872" y="3648456"/>
+            <a:ext cx="9966960" cy="713232"/>
+          </a:xfrm>
+          <a:prstGeom prst="rect">
+            <a:avLst/>
+          </a:prstGeom>
+          <a:noFill/>
+        </p:spPr>
+        <p:txBody>
+          <a:bodyPr wrap="square" anchor="ctr">
+            <a:spAutoFit/>
+          </a:bodyPr>
+          <a:lstStyle/>
+          <a:p>
+            <a:pPr algn="l">
+              <a:lnSpc>
+                <a:spcPct val="115000"/>
+              </a:lnSpc>
+            </a:pPr>
+            <a:r>
+              <a:rPr sz="1400" b="0" i="0">
+                <a:solidFill>
+                  <a:srgbClr val="1F2A28"/>
+                </a:solidFill>
+                <a:latin typeface="Calibri"/>
+              </a:rPr>
+              <a:t>What does Red's credit position tell you about the limits of an R&amp;D-heavy strategy?</a:t>
+            </a:r>
+          </a:p>
+        </p:txBody>
+      </p:sp>
+      <p:sp>
+        <p:nvSpPr>
+          <p:cNvPr id="15" name="Rounded Rectangle 14"/>
+          <p:cNvSpPr/>
+          <p:nvPr/>
+        </p:nvSpPr>
+        <p:spPr>
+          <a:xfrm>
+            <a:off x="548640" y="4489704"/>
+            <a:ext cx="10881360" cy="713232"/>
+          </a:xfrm>
+          <a:prstGeom prst="roundRect">
+            <a:avLst>
+              <a:gd name="adj" fmla="val 28000"/>
+            </a:avLst>
+          </a:prstGeom>
+          <a:solidFill>
+            <a:srgbClr val="FCFBF8"/>
+          </a:solidFill>
+          <a:ln w="9525">
+            <a:solidFill>
+              <a:srgbClr val="C3D8C5"/>
+            </a:solidFill>
+          </a:ln>
+          <a:effectLst/>
+        </p:spPr>
+        <p:style>
+          <a:lnRef idx="1">
+            <a:schemeClr val="accent1"/>
+          </a:lnRef>
+          <a:fillRef idx="3">
+            <a:schemeClr val="accent1"/>
+          </a:fillRef>
+          <a:effectRef idx="2">
+            <a:schemeClr val="accent1"/>
+          </a:effectRef>
+          <a:fontRef idx="minor">
+            <a:schemeClr val="lt1"/>
+          </a:fontRef>
+        </p:style>
+        <p:txBody>
+          <a:bodyPr rtlCol="0" anchor="ctr"/>
+          <a:lstStyle/>
+          <a:p>
+            <a:pPr algn="ctr"/>
+          </a:p>
+        </p:txBody>
+      </p:sp>
+      <p:sp>
+        <p:nvSpPr>
+          <p:cNvPr id="16" name="Oval 15"/>
+          <p:cNvSpPr/>
+          <p:nvPr/>
+        </p:nvSpPr>
+        <p:spPr>
+          <a:xfrm>
+            <a:off x="713232" y="4654296"/>
+            <a:ext cx="384048" cy="384048"/>
+          </a:xfrm>
+          <a:prstGeom prst="ellipse">
+            <a:avLst/>
+          </a:prstGeom>
+          <a:solidFill>
+            <a:srgbClr val="78A79B"/>
+          </a:solidFill>
+          <a:ln>
+            <a:noFill/>
+          </a:ln>
+          <a:effectLst/>
+        </p:spPr>
+        <p:style>
+          <a:lnRef idx="1">
+            <a:schemeClr val="accent1"/>
+          </a:lnRef>
+          <a:fillRef idx="3">
+            <a:schemeClr val="accent1"/>
+          </a:fillRef>
+          <a:effectRef idx="2">
+            <a:schemeClr val="accent1"/>
+          </a:effectRef>
+          <a:fontRef idx="minor">
+            <a:schemeClr val="lt1"/>
+          </a:fontRef>
+        </p:style>
+        <p:txBody>
+          <a:bodyPr rtlCol="0" anchor="ctr" wrap="none" lIns="0" rIns="0" tIns="0" bIns="0"/>
+          <a:lstStyle/>
+          <a:p>
+            <a:pPr algn="ctr"/>
+            <a:r>
+              <a:rPr sz="1300" b="1" i="0">
+                <a:solidFill>
+                  <a:srgbClr val="FFFFFF"/>
+                </a:solidFill>
+                <a:latin typeface="Calibri"/>
+              </a:rPr>
+              <a:t>4</a:t>
+            </a:r>
+          </a:p>
+        </p:txBody>
+      </p:sp>
+      <p:sp>
+        <p:nvSpPr>
+          <p:cNvPr id="17" name="TextBox 16"/>
+          <p:cNvSpPr txBox="1"/>
+          <p:nvPr/>
+        </p:nvSpPr>
+        <p:spPr>
+          <a:xfrm>
+            <a:off x="1261872" y="4489704"/>
+            <a:ext cx="9966960" cy="713232"/>
+          </a:xfrm>
+          <a:prstGeom prst="rect">
+            <a:avLst/>
+          </a:prstGeom>
+          <a:noFill/>
+        </p:spPr>
+        <p:txBody>
+          <a:bodyPr wrap="square" anchor="ctr">
+            <a:spAutoFit/>
+          </a:bodyPr>
+          <a:lstStyle/>
+          <a:p>
+            <a:pPr algn="l">
+              <a:lnSpc>
+                <a:spcPct val="115000"/>
+              </a:lnSpc>
+            </a:pPr>
+            <a:r>
+              <a:rPr sz="1400" b="0" i="0">
+                <a:solidFill>
+                  <a:srgbClr val="1F2A28"/>
+                </a:solidFill>
+                <a:latin typeface="Calibri"/>
+              </a:rPr>
+              <a:t>Is a universe with more rank movement necessarily more competitive, or just noisier?</a:t>
+            </a:r>
+          </a:p>
+        </p:txBody>
+      </p:sp>
+      <p:sp>
+        <p:nvSpPr>
+          <p:cNvPr id="18" name="Rounded Rectangle 17"/>
+          <p:cNvSpPr/>
+          <p:nvPr/>
+        </p:nvSpPr>
+        <p:spPr>
+          <a:xfrm>
+            <a:off x="548640" y="5330952"/>
+            <a:ext cx="10881360" cy="713232"/>
+          </a:xfrm>
+          <a:prstGeom prst="roundRect">
+            <a:avLst>
+              <a:gd name="adj" fmla="val 28000"/>
+            </a:avLst>
+          </a:prstGeom>
+          <a:solidFill>
+            <a:srgbClr val="FCFBF8"/>
+          </a:solidFill>
+          <a:ln w="9525">
+            <a:solidFill>
+              <a:srgbClr val="C3D8C5"/>
+            </a:solidFill>
+          </a:ln>
+          <a:effectLst/>
+        </p:spPr>
+        <p:style>
+          <a:lnRef idx="1">
+            <a:schemeClr val="accent1"/>
+          </a:lnRef>
+          <a:fillRef idx="3">
+            <a:schemeClr val="accent1"/>
+          </a:fillRef>
+          <a:effectRef idx="2">
+            <a:schemeClr val="accent1"/>
+          </a:effectRef>
+          <a:fontRef idx="minor">
+            <a:schemeClr val="lt1"/>
+          </a:fontRef>
+        </p:style>
+        <p:txBody>
+          <a:bodyPr rtlCol="0" anchor="ctr"/>
+          <a:lstStyle/>
+          <a:p>
+            <a:pPr algn="ctr"/>
+          </a:p>
+        </p:txBody>
+      </p:sp>
+      <p:sp>
+        <p:nvSpPr>
+          <p:cNvPr id="19" name="Oval 18"/>
+          <p:cNvSpPr/>
+          <p:nvPr/>
+        </p:nvSpPr>
+        <p:spPr>
+          <a:xfrm>
+            <a:off x="713232" y="5495544"/>
+            <a:ext cx="384048" cy="384048"/>
+          </a:xfrm>
+          <a:prstGeom prst="ellipse">
+            <a:avLst/>
+          </a:prstGeom>
+          <a:solidFill>
+            <a:srgbClr val="78A79B"/>
+          </a:solidFill>
+          <a:ln>
+            <a:noFill/>
+          </a:ln>
+          <a:effectLst/>
+        </p:spPr>
+        <p:style>
+          <a:lnRef idx="1">
+            <a:schemeClr val="accent1"/>
+          </a:lnRef>
+          <a:fillRef idx="3">
+            <a:schemeClr val="accent1"/>
+          </a:fillRef>
+          <a:effectRef idx="2">
+            <a:schemeClr val="accent1"/>
+          </a:effectRef>
+          <a:fontRef idx="minor">
+            <a:schemeClr val="lt1"/>
+          </a:fontRef>
+        </p:style>
+        <p:txBody>
+          <a:bodyPr rtlCol="0" anchor="ctr" wrap="none" lIns="0" rIns="0" tIns="0" bIns="0"/>
+          <a:lstStyle/>
+          <a:p>
+            <a:pPr algn="ctr"/>
+            <a:r>
+              <a:rPr sz="1300" b="1" i="0">
+                <a:solidFill>
+                  <a:srgbClr val="FFFFFF"/>
+                </a:solidFill>
+                <a:latin typeface="Calibri"/>
+              </a:rPr>
+              <a:t>5</a:t>
+            </a:r>
+          </a:p>
+        </p:txBody>
+      </p:sp>
+      <p:sp>
+        <p:nvSpPr>
+          <p:cNvPr id="20" name="TextBox 19"/>
+          <p:cNvSpPr txBox="1"/>
+          <p:nvPr/>
+        </p:nvSpPr>
+        <p:spPr>
+          <a:xfrm>
+            <a:off x="1261872" y="5330952"/>
+            <a:ext cx="9966960" cy="713232"/>
+          </a:xfrm>
+          <a:prstGeom prst="rect">
+            <a:avLst/>
+          </a:prstGeom>
+          <a:noFill/>
+        </p:spPr>
+        <p:txBody>
+          <a:bodyPr wrap="square" anchor="ctr">
+            <a:spAutoFit/>
+          </a:bodyPr>
+          <a:lstStyle/>
+          <a:p>
+            <a:pPr algn="l">
+              <a:lnSpc>
+                <a:spcPct val="115000"/>
+              </a:lnSpc>
+            </a:pPr>
+            <a:r>
+              <a:rPr sz="1400" b="0" i="0">
+                <a:solidFill>
+                  <a:srgbClr val="1F2A28"/>
+                </a:solidFill>
+                <a:latin typeface="Calibri"/>
+              </a:rPr>
+              <a:t>Which single decision, copied from the other universe, would most help your own team?</a:t>
+            </a:r>
+          </a:p>
+        </p:txBody>
+      </p:sp>
+      <p:sp>
+        <p:nvSpPr>
+          <p:cNvPr id="21" name="Rectangle 20"/>
+          <p:cNvSpPr/>
+          <p:nvPr/>
+        </p:nvSpPr>
+        <p:spPr>
+          <a:xfrm>
+            <a:off x="0" y="6812280"/>
+            <a:ext cx="12191695" cy="45720"/>
+          </a:xfrm>
+          <a:prstGeom prst="rect">
+            <a:avLst/>
+          </a:prstGeom>
+          <a:solidFill>
+            <a:srgbClr val="78A79B"/>
+          </a:solidFill>
+          <a:ln>
+            <a:noFill/>
+          </a:ln>
+          <a:effectLst/>
+        </p:spPr>
+        <p:style>
+          <a:lnRef idx="1">
+            <a:schemeClr val="accent1"/>
+          </a:lnRef>
+          <a:fillRef idx="3">
+            <a:schemeClr val="accent1"/>
+          </a:fillRef>
+          <a:effectRef idx="2">
+            <a:schemeClr val="accent1"/>
+          </a:effectRef>
+          <a:fontRef idx="minor">
+            <a:schemeClr val="lt1"/>
+          </a:fontRef>
+        </p:style>
+        <p:txBody>
+          <a:bodyPr rtlCol="0" anchor="ctr"/>
+          <a:lstStyle/>
+          <a:p>
+            <a:pPr algn="ctr"/>
+          </a:p>
+        </p:txBody>
+      </p:sp>
+      <p:sp>
+        <p:nvSpPr>
+          <p:cNvPr id="22" name="TextBox 21"/>
+          <p:cNvSpPr txBox="1"/>
+          <p:nvPr/>
+        </p:nvSpPr>
+        <p:spPr>
+          <a:xfrm>
+            <a:off x="365760" y="6473952"/>
+            <a:ext cx="7315200" cy="274320"/>
+          </a:xfrm>
+          <a:prstGeom prst="rect">
+            <a:avLst/>
+          </a:prstGeom>
+          <a:noFill/>
+        </p:spPr>
+        <p:txBody>
+          <a:bodyPr wrap="square">
+            <a:spAutoFit/>
+          </a:bodyPr>
+          <a:lstStyle/>
+          <a:p>
+            <a:pPr algn="l">
+              <a:lnSpc>
+                <a:spcPct val="115000"/>
+              </a:lnSpc>
+            </a:pPr>
+            <a:r>
               <a:rPr sz="1000" b="0" i="0">
                 <a:solidFill>
-                  <a:srgbClr val="4A5552"/>
+                  <a:srgbClr val="55605D"/>
                 </a:solidFill>
                 <a:latin typeface="Calibri"/>
               </a:rPr>
@@ -6103,7 +10348,7 @@
       </p:sp>
       <p:sp>
         <p:nvSpPr>
-          <p:cNvPr id="7" name="TextBox 6"/>
+          <p:cNvPr id="23" name="TextBox 22"/>
           <p:cNvSpPr txBox="1"/>
           <p:nvPr/>
         </p:nvSpPr>
@@ -6131,7 +10376,7 @@
             <a:r>
               <a:rPr sz="1000" b="0" i="0">
                 <a:solidFill>
-                  <a:srgbClr val="4A5552"/>
+                  <a:srgbClr val="55605D"/>
                 </a:solidFill>
                 <a:latin typeface="Calibri"/>
               </a:rPr>
@@ -6204,7 +10449,53 @@
       </p:sp>
       <p:sp>
         <p:nvSpPr>
-          <p:cNvPr id="3" name="TextBox 2"/>
+          <p:cNvPr id="3" name="Oval 2"/>
+          <p:cNvSpPr/>
+          <p:nvPr/>
+        </p:nvSpPr>
+        <p:spPr>
+          <a:xfrm>
+            <a:off x="9875520" y="-1371600"/>
+            <a:ext cx="4114800" cy="3657600"/>
+          </a:xfrm>
+          <a:prstGeom prst="ellipse">
+            <a:avLst/>
+          </a:prstGeom>
+          <a:solidFill>
+            <a:srgbClr val="4E7D72">
+              <a:alpha val="45000"/>
+            </a:srgbClr>
+          </a:solidFill>
+          <a:ln>
+            <a:noFill/>
+          </a:ln>
+          <a:effectLst/>
+        </p:spPr>
+        <p:style>
+          <a:lnRef idx="1">
+            <a:schemeClr val="accent1"/>
+          </a:lnRef>
+          <a:fillRef idx="3">
+            <a:schemeClr val="accent1"/>
+          </a:fillRef>
+          <a:effectRef idx="2">
+            <a:schemeClr val="accent1"/>
+          </a:effectRef>
+          <a:fontRef idx="minor">
+            <a:schemeClr val="lt1"/>
+          </a:fontRef>
+        </p:style>
+        <p:txBody>
+          <a:bodyPr rtlCol="0" anchor="ctr"/>
+          <a:lstStyle/>
+          <a:p>
+            <a:pPr algn="ctr"/>
+          </a:p>
+        </p:txBody>
+      </p:sp>
+      <p:sp>
+        <p:nvSpPr>
+          <p:cNvPr id="4" name="TextBox 3"/>
           <p:cNvSpPr txBox="1"/>
           <p:nvPr/>
         </p:nvSpPr>
@@ -6243,7 +10534,7 @@
       </p:sp>
       <p:sp>
         <p:nvSpPr>
-          <p:cNvPr id="4" name="TextBox 3"/>
+          <p:cNvPr id="5" name="TextBox 4"/>
           <p:cNvSpPr txBox="1"/>
           <p:nvPr/>
         </p:nvSpPr>
@@ -6282,7 +10573,7 @@
       </p:sp>
       <p:sp>
         <p:nvSpPr>
-          <p:cNvPr id="5" name="Rounded Rectangle 4"/>
+          <p:cNvPr id="6" name="Rounded Rectangle 5"/>
           <p:cNvSpPr/>
           <p:nvPr/>
         </p:nvSpPr>
@@ -6328,7 +10619,7 @@
       </p:sp>
       <p:sp>
         <p:nvSpPr>
-          <p:cNvPr id="6" name="TextBox 5"/>
+          <p:cNvPr id="7" name="TextBox 6"/>
           <p:cNvSpPr txBox="1"/>
           <p:nvPr/>
         </p:nvSpPr>
@@ -6408,7 +10699,7 @@
       </p:sp>
       <p:sp>
         <p:nvSpPr>
-          <p:cNvPr id="7" name="Rectangle 6"/>
+          <p:cNvPr id="8" name="Rectangle 7"/>
           <p:cNvSpPr/>
           <p:nvPr/>
         </p:nvSpPr>
@@ -6452,7 +10743,7 @@
       </p:sp>
       <p:sp>
         <p:nvSpPr>
-          <p:cNvPr id="8" name="TextBox 7"/>
+          <p:cNvPr id="9" name="TextBox 8"/>
           <p:cNvSpPr txBox="1"/>
           <p:nvPr/>
         </p:nvSpPr>
@@ -6480,7 +10771,7 @@
             <a:r>
               <a:rPr sz="1000" b="0" i="0">
                 <a:solidFill>
-                  <a:srgbClr val="4A5552"/>
+                  <a:srgbClr val="55605D"/>
                 </a:solidFill>
                 <a:latin typeface="Calibri"/>
               </a:rPr>
@@ -6491,7 +10782,7 @@
       </p:sp>
       <p:sp>
         <p:nvSpPr>
-          <p:cNvPr id="9" name="TextBox 8"/>
+          <p:cNvPr id="10" name="TextBox 9"/>
           <p:cNvSpPr txBox="1"/>
           <p:nvPr/>
         </p:nvSpPr>
@@ -6519,7 +10810,7 @@
             <a:r>
               <a:rPr sz="1000" b="0" i="0">
                 <a:solidFill>
-                  <a:srgbClr val="4A5552"/>
+                  <a:srgbClr val="55605D"/>
                 </a:solidFill>
                 <a:latin typeface="Calibri"/>
               </a:rPr>
